--- a/docs/pptx/whole/jx-linsubhr-sens-anemia3.pptx
+++ b/docs/pptx/whole/jx-linsubhr-sens-anemia3.pptx
@@ -5339,7 +5339,7 @@
           <p:spPr>
             <a:xfrm>
               <a:off x="817517" y="1896563"/>
-              <a:ext cx="6169365" cy="82021"/>
+              <a:ext cx="6833128" cy="82021"/>
             </a:xfrm>
             <a:prstGeom prst="rect">
               <a:avLst/>
@@ -5371,7 +5371,7 @@
                   <a:latin typeface="Helvetica"/>
                   <a:cs typeface="Helvetica"/>
                 </a:rPr>
-                <a:t>subHR per 0.1 ratio decline: 1.21 (1.07-1.36), p = 0.002  |  per IQR decline (Δ = 0.27): 1.68 (1.21-2.32)  |  IQR: [0.71, 0.98]</a:t>
+                <a:t>subHR per 0.1 ratio decline: 1.21 (1.07-1.36), p_Bonf = 0.011 (n = 6)  |  per IQR decline (Δ = 0.27): 1.68 (1.21-2.32)  |  IQR: [0.71, 0.98]</a:t>
               </a:r>
             </a:p>
           </p:txBody>

--- a/docs/pptx/whole/jx-linsubhr-sens-anemia3.pptx
+++ b/docs/pptx/whole/jx-linsubhr-sens-anemia3.pptx
@@ -5062,8 +5062,8 @@
           </p:nvSpPr>
           <p:spPr>
             <a:xfrm>
-              <a:off x="1980137" y="5785772"/>
-              <a:ext cx="155356" cy="80101"/>
+              <a:off x="1977028" y="5785772"/>
+              <a:ext cx="161574" cy="80101"/>
             </a:xfrm>
             <a:prstGeom prst="rect">
               <a:avLst/>
@@ -5095,7 +5095,7 @@
                   <a:latin typeface="Helvetica"/>
                   <a:cs typeface="Helvetica"/>
                 </a:rPr>
-                <a:t>0.6</a:t>
+                <a:t>-40</a:t>
               </a:r>
             </a:p>
           </p:txBody>
@@ -5108,8 +5108,8 @@
           </p:nvSpPr>
           <p:spPr>
             <a:xfrm>
-              <a:off x="3731922" y="5785772"/>
-              <a:ext cx="155356" cy="80101"/>
+              <a:off x="3728813" y="5785772"/>
+              <a:ext cx="161574" cy="80101"/>
             </a:xfrm>
             <a:prstGeom prst="rect">
               <a:avLst/>
@@ -5141,7 +5141,7 @@
                   <a:latin typeface="Helvetica"/>
                   <a:cs typeface="Helvetica"/>
                 </a:rPr>
-                <a:t>0.8</a:t>
+                <a:t>-20</a:t>
               </a:r>
             </a:p>
           </p:txBody>
@@ -5154,8 +5154,8 @@
           </p:nvSpPr>
           <p:spPr>
             <a:xfrm>
-              <a:off x="5483707" y="5785772"/>
-              <a:ext cx="155356" cy="80101"/>
+              <a:off x="5530296" y="5785772"/>
+              <a:ext cx="62179" cy="80101"/>
             </a:xfrm>
             <a:prstGeom prst="rect">
               <a:avLst/>
@@ -5187,7 +5187,7 @@
                   <a:latin typeface="Helvetica"/>
                   <a:cs typeface="Helvetica"/>
                 </a:rPr>
-                <a:t>1.0</a:t>
+                <a:t>0</a:t>
               </a:r>
             </a:p>
           </p:txBody>
@@ -5200,8 +5200,8 @@
           </p:nvSpPr>
           <p:spPr>
             <a:xfrm>
-              <a:off x="7235493" y="5785772"/>
-              <a:ext cx="155356" cy="80101"/>
+              <a:off x="7250992" y="5785772"/>
+              <a:ext cx="124358" cy="80101"/>
             </a:xfrm>
             <a:prstGeom prst="rect">
               <a:avLst/>
@@ -5233,7 +5233,7 @@
                   <a:latin typeface="Helvetica"/>
                   <a:cs typeface="Helvetica"/>
                 </a:rPr>
-                <a:t>1.2</a:t>
+                <a:t>20</a:t>
               </a:r>
             </a:p>
           </p:txBody>
@@ -5246,8 +5246,8 @@
           </p:nvSpPr>
           <p:spPr>
             <a:xfrm>
-              <a:off x="2691419" y="5925448"/>
-              <a:ext cx="4051889" cy="100218"/>
+              <a:off x="1561815" y="5925448"/>
+              <a:ext cx="6311097" cy="100218"/>
             </a:xfrm>
             <a:prstGeom prst="rect">
               <a:avLst/>
@@ -5279,7 +5279,7 @@
                   <a:latin typeface="Helvetica"/>
                   <a:cs typeface="Helvetica"/>
                 </a:rPr>
-                <a:t>Sensitivity eGFR Ratio (CKD-EPI 2012 CysC / CKD-EPI 2021 Cr)</a:t>
+                <a:t>Sensitivity eGFR Difference (%): 100 × (CKD-EPI 2012 CysC − CKD-EPI 2021 Cr) / CKD-EPI 2021 Cr</a:t>
               </a:r>
             </a:p>
           </p:txBody>
@@ -5339,7 +5339,7 @@
           <p:spPr>
             <a:xfrm>
               <a:off x="817517" y="1896563"/>
-              <a:ext cx="6833128" cy="82021"/>
+              <a:ext cx="6959864" cy="82021"/>
             </a:xfrm>
             <a:prstGeom prst="rect">
               <a:avLst/>
@@ -5371,7 +5371,7 @@
                   <a:latin typeface="Helvetica"/>
                   <a:cs typeface="Helvetica"/>
                 </a:rPr>
-                <a:t>subHR per 0.1 ratio decline: 1.21 (1.07-1.36), p_Bonf = 0.011 (n = 6)  |  per IQR decline (Δ = 0.27): 1.68 (1.21-2.32)  |  IQR: [0.71, 0.98]</a:t>
+                <a:t>subHR per 10 % decline: 1.21 (1.07-1.36), p_Bonf = 0.011 (n = 6)  |  per IQR decline (Δ = 27.5 %): 1.68 (1.21-2.32)  |  IQR: [-29.1, -1.6] %</a:t>
               </a:r>
             </a:p>
           </p:txBody>

--- a/docs/pptx/whole/jx-linsubhr-sens-anemia3.pptx
+++ b/docs/pptx/whole/jx-linsubhr-sens-anemia3.pptx
@@ -2265,34 +2265,26 @@
         </p:sp>
         <p:sp>
           <p:nvSpPr>
-            <p:cNvPr id="4" name="pl4"/>
+            <p:cNvPr id="4" name="rc4"/>
             <p:cNvSpPr/>
             <p:nvPr/>
           </p:nvSpPr>
           <p:spPr>
             <a:xfrm>
-              <a:off x="817517" y="5142518"/>
-              <a:ext cx="7799693" cy="0"/>
+              <a:off x="457200" y="1600200"/>
+              <a:ext cx="8229600" cy="4525962"/>
             </a:xfrm>
-            <a:custGeom>
+            <a:prstGeom prst="rect">
               <a:avLst/>
-              <a:pathLst>
-                <a:path w="7799693" h="0">
-                  <a:moveTo>
-                    <a:pt x="0" y="0"/>
-                  </a:moveTo>
-                  <a:lnTo>
-                    <a:pt x="7799693" y="0"/>
-                  </a:lnTo>
-                  <a:lnTo>
-                    <a:pt x="7799693" y="0"/>
-                  </a:lnTo>
-                </a:path>
-              </a:pathLst>
-            </a:custGeom>
-            <a:ln w="6775" cap="flat">
+            </a:prstGeom>
+            <a:solidFill>
+              <a:srgbClr val="FFFFFF">
+                <a:alpha val="100000"/>
+              </a:srgbClr>
+            </a:solidFill>
+            <a:ln w="13550" cap="rnd">
               <a:solidFill>
-                <a:srgbClr val="EBEBEB">
+                <a:srgbClr val="FFFFFF">
                   <a:alpha val="100000"/>
                 </a:srgbClr>
               </a:solidFill>
@@ -2314,21 +2306,21 @@
           </p:nvSpPr>
           <p:spPr>
             <a:xfrm>
-              <a:off x="817517" y="4313054"/>
-              <a:ext cx="7799693" cy="0"/>
+              <a:off x="887106" y="3250627"/>
+              <a:ext cx="7660515" cy="0"/>
             </a:xfrm>
             <a:custGeom>
               <a:avLst/>
               <a:pathLst>
-                <a:path w="7799693" h="0">
+                <a:path w="7660515" h="0">
                   <a:moveTo>
                     <a:pt x="0" y="0"/>
                   </a:moveTo>
                   <a:lnTo>
-                    <a:pt x="7799693" y="0"/>
-                  </a:lnTo>
-                  <a:lnTo>
-                    <a:pt x="7799693" y="0"/>
+                    <a:pt x="7660515" y="0"/>
+                  </a:lnTo>
+                  <a:lnTo>
+                    <a:pt x="7660515" y="0"/>
                   </a:lnTo>
                 </a:path>
               </a:pathLst>
@@ -2357,21 +2349,21 @@
           </p:nvSpPr>
           <p:spPr>
             <a:xfrm>
-              <a:off x="817517" y="3483591"/>
-              <a:ext cx="7799693" cy="0"/>
+              <a:off x="887106" y="2951293"/>
+              <a:ext cx="7660515" cy="0"/>
             </a:xfrm>
             <a:custGeom>
               <a:avLst/>
               <a:pathLst>
-                <a:path w="7799693" h="0">
+                <a:path w="7660515" h="0">
                   <a:moveTo>
                     <a:pt x="0" y="0"/>
                   </a:moveTo>
                   <a:lnTo>
-                    <a:pt x="7799693" y="0"/>
-                  </a:lnTo>
-                  <a:lnTo>
-                    <a:pt x="7799693" y="0"/>
+                    <a:pt x="7660515" y="0"/>
+                  </a:lnTo>
+                  <a:lnTo>
+                    <a:pt x="7660515" y="0"/>
                   </a:lnTo>
                 </a:path>
               </a:pathLst>
@@ -2400,21 +2392,21 @@
           </p:nvSpPr>
           <p:spPr>
             <a:xfrm>
-              <a:off x="817517" y="2654127"/>
-              <a:ext cx="7799693" cy="0"/>
+              <a:off x="887106" y="2651959"/>
+              <a:ext cx="7660515" cy="0"/>
             </a:xfrm>
             <a:custGeom>
               <a:avLst/>
               <a:pathLst>
-                <a:path w="7799693" h="0">
+                <a:path w="7660515" h="0">
                   <a:moveTo>
                     <a:pt x="0" y="0"/>
                   </a:moveTo>
                   <a:lnTo>
-                    <a:pt x="7799693" y="0"/>
-                  </a:lnTo>
-                  <a:lnTo>
-                    <a:pt x="7799693" y="0"/>
+                    <a:pt x="7660515" y="0"/>
+                  </a:lnTo>
+                  <a:lnTo>
+                    <a:pt x="7660515" y="0"/>
                   </a:lnTo>
                 </a:path>
               </a:pathLst>
@@ -2443,21 +2435,21 @@
           </p:nvSpPr>
           <p:spPr>
             <a:xfrm>
-              <a:off x="1181923" y="2073503"/>
-              <a:ext cx="0" cy="3649639"/>
+              <a:off x="887106" y="2352625"/>
+              <a:ext cx="7660515" cy="0"/>
             </a:xfrm>
             <a:custGeom>
               <a:avLst/>
               <a:pathLst>
-                <a:path w="0" h="3649639">
+                <a:path w="7660515" h="0">
                   <a:moveTo>
-                    <a:pt x="0" y="3649639"/>
+                    <a:pt x="0" y="0"/>
                   </a:moveTo>
                   <a:lnTo>
-                    <a:pt x="0" y="0"/>
-                  </a:lnTo>
-                  <a:lnTo>
-                    <a:pt x="0" y="0"/>
+                    <a:pt x="7660515" y="0"/>
+                  </a:lnTo>
+                  <a:lnTo>
+                    <a:pt x="7660515" y="0"/>
                   </a:lnTo>
                 </a:path>
               </a:pathLst>
@@ -2486,15 +2478,15 @@
           </p:nvSpPr>
           <p:spPr>
             <a:xfrm>
-              <a:off x="2933708" y="2073503"/>
-              <a:ext cx="0" cy="3649639"/>
+              <a:off x="1245010" y="2143092"/>
+              <a:ext cx="0" cy="1317069"/>
             </a:xfrm>
             <a:custGeom>
               <a:avLst/>
               <a:pathLst>
-                <a:path w="0" h="3649639">
+                <a:path w="0" h="1317069">
                   <a:moveTo>
-                    <a:pt x="0" y="3649639"/>
+                    <a:pt x="0" y="1317069"/>
                   </a:moveTo>
                   <a:lnTo>
                     <a:pt x="0" y="0"/>
@@ -2529,15 +2521,15 @@
           </p:nvSpPr>
           <p:spPr>
             <a:xfrm>
-              <a:off x="4685493" y="2073503"/>
-              <a:ext cx="0" cy="3649639"/>
+              <a:off x="2965536" y="2143092"/>
+              <a:ext cx="0" cy="1317069"/>
             </a:xfrm>
             <a:custGeom>
               <a:avLst/>
               <a:pathLst>
-                <a:path w="0" h="3649639">
+                <a:path w="0" h="1317069">
                   <a:moveTo>
-                    <a:pt x="0" y="3649639"/>
+                    <a:pt x="0" y="1317069"/>
                   </a:moveTo>
                   <a:lnTo>
                     <a:pt x="0" y="0"/>
@@ -2572,15 +2564,15 @@
           </p:nvSpPr>
           <p:spPr>
             <a:xfrm>
-              <a:off x="6437278" y="2073503"/>
-              <a:ext cx="0" cy="3649639"/>
+              <a:off x="4686062" y="2143092"/>
+              <a:ext cx="0" cy="1317069"/>
             </a:xfrm>
             <a:custGeom>
               <a:avLst/>
               <a:pathLst>
-                <a:path w="0" h="3649639">
+                <a:path w="0" h="1317069">
                   <a:moveTo>
-                    <a:pt x="0" y="3649639"/>
+                    <a:pt x="0" y="1317069"/>
                   </a:moveTo>
                   <a:lnTo>
                     <a:pt x="0" y="0"/>
@@ -2615,15 +2607,15 @@
           </p:nvSpPr>
           <p:spPr>
             <a:xfrm>
-              <a:off x="8189063" y="2073503"/>
-              <a:ext cx="0" cy="3649639"/>
+              <a:off x="6406588" y="2143092"/>
+              <a:ext cx="0" cy="1317069"/>
             </a:xfrm>
             <a:custGeom>
               <a:avLst/>
               <a:pathLst>
-                <a:path w="0" h="3649639">
+                <a:path w="0" h="1317069">
                   <a:moveTo>
-                    <a:pt x="0" y="3649639"/>
+                    <a:pt x="0" y="1317069"/>
                   </a:moveTo>
                   <a:lnTo>
                     <a:pt x="0" y="0"/>
@@ -2658,26 +2650,26 @@
           </p:nvSpPr>
           <p:spPr>
             <a:xfrm>
-              <a:off x="817517" y="5557249"/>
-              <a:ext cx="7799693" cy="0"/>
+              <a:off x="8127114" y="2143092"/>
+              <a:ext cx="0" cy="1317069"/>
             </a:xfrm>
             <a:custGeom>
               <a:avLst/>
               <a:pathLst>
-                <a:path w="7799693" h="0">
+                <a:path w="0" h="1317069">
                   <a:moveTo>
+                    <a:pt x="0" y="1317069"/>
+                  </a:moveTo>
+                  <a:lnTo>
                     <a:pt x="0" y="0"/>
-                  </a:moveTo>
-                  <a:lnTo>
-                    <a:pt x="7799693" y="0"/>
-                  </a:lnTo>
-                  <a:lnTo>
-                    <a:pt x="7799693" y="0"/>
+                  </a:lnTo>
+                  <a:lnTo>
+                    <a:pt x="0" y="0"/>
                   </a:lnTo>
                 </a:path>
               </a:pathLst>
             </a:custGeom>
-            <a:ln w="13550" cap="flat">
+            <a:ln w="6775" cap="flat">
               <a:solidFill>
                 <a:srgbClr val="EBEBEB">
                   <a:alpha val="100000"/>
@@ -2701,21 +2693,21 @@
           </p:nvSpPr>
           <p:spPr>
             <a:xfrm>
-              <a:off x="817517" y="4727786"/>
-              <a:ext cx="7799693" cy="0"/>
+              <a:off x="887106" y="3400294"/>
+              <a:ext cx="7660515" cy="0"/>
             </a:xfrm>
             <a:custGeom>
               <a:avLst/>
               <a:pathLst>
-                <a:path w="7799693" h="0">
+                <a:path w="7660515" h="0">
                   <a:moveTo>
                     <a:pt x="0" y="0"/>
                   </a:moveTo>
                   <a:lnTo>
-                    <a:pt x="7799693" y="0"/>
-                  </a:lnTo>
-                  <a:lnTo>
-                    <a:pt x="7799693" y="0"/>
+                    <a:pt x="7660515" y="0"/>
+                  </a:lnTo>
+                  <a:lnTo>
+                    <a:pt x="7660515" y="0"/>
                   </a:lnTo>
                 </a:path>
               </a:pathLst>
@@ -2744,21 +2736,21 @@
           </p:nvSpPr>
           <p:spPr>
             <a:xfrm>
-              <a:off x="817517" y="3898322"/>
-              <a:ext cx="7799693" cy="0"/>
+              <a:off x="887106" y="3100960"/>
+              <a:ext cx="7660515" cy="0"/>
             </a:xfrm>
             <a:custGeom>
               <a:avLst/>
               <a:pathLst>
-                <a:path w="7799693" h="0">
+                <a:path w="7660515" h="0">
                   <a:moveTo>
                     <a:pt x="0" y="0"/>
                   </a:moveTo>
                   <a:lnTo>
-                    <a:pt x="7799693" y="0"/>
-                  </a:lnTo>
-                  <a:lnTo>
-                    <a:pt x="7799693" y="0"/>
+                    <a:pt x="7660515" y="0"/>
+                  </a:lnTo>
+                  <a:lnTo>
+                    <a:pt x="7660515" y="0"/>
                   </a:lnTo>
                 </a:path>
               </a:pathLst>
@@ -2787,21 +2779,21 @@
           </p:nvSpPr>
           <p:spPr>
             <a:xfrm>
-              <a:off x="817517" y="3068859"/>
-              <a:ext cx="7799693" cy="0"/>
+              <a:off x="887106" y="2801626"/>
+              <a:ext cx="7660515" cy="0"/>
             </a:xfrm>
             <a:custGeom>
               <a:avLst/>
               <a:pathLst>
-                <a:path w="7799693" h="0">
+                <a:path w="7660515" h="0">
                   <a:moveTo>
                     <a:pt x="0" y="0"/>
                   </a:moveTo>
                   <a:lnTo>
-                    <a:pt x="7799693" y="0"/>
-                  </a:lnTo>
-                  <a:lnTo>
-                    <a:pt x="7799693" y="0"/>
+                    <a:pt x="7660515" y="0"/>
+                  </a:lnTo>
+                  <a:lnTo>
+                    <a:pt x="7660515" y="0"/>
                   </a:lnTo>
                 </a:path>
               </a:pathLst>
@@ -2830,21 +2822,21 @@
           </p:nvSpPr>
           <p:spPr>
             <a:xfrm>
-              <a:off x="817517" y="2239395"/>
-              <a:ext cx="7799693" cy="0"/>
+              <a:off x="887106" y="2502292"/>
+              <a:ext cx="7660515" cy="0"/>
             </a:xfrm>
             <a:custGeom>
               <a:avLst/>
               <a:pathLst>
-                <a:path w="7799693" h="0">
+                <a:path w="7660515" h="0">
                   <a:moveTo>
                     <a:pt x="0" y="0"/>
                   </a:moveTo>
                   <a:lnTo>
-                    <a:pt x="7799693" y="0"/>
-                  </a:lnTo>
-                  <a:lnTo>
-                    <a:pt x="7799693" y="0"/>
+                    <a:pt x="7660515" y="0"/>
+                  </a:lnTo>
+                  <a:lnTo>
+                    <a:pt x="7660515" y="0"/>
                   </a:lnTo>
                 </a:path>
               </a:pathLst>
@@ -2873,21 +2865,21 @@
           </p:nvSpPr>
           <p:spPr>
             <a:xfrm>
-              <a:off x="2057816" y="2073503"/>
-              <a:ext cx="0" cy="3649639"/>
+              <a:off x="887106" y="2202958"/>
+              <a:ext cx="7660515" cy="0"/>
             </a:xfrm>
             <a:custGeom>
               <a:avLst/>
               <a:pathLst>
-                <a:path w="0" h="3649639">
+                <a:path w="7660515" h="0">
                   <a:moveTo>
-                    <a:pt x="0" y="3649639"/>
+                    <a:pt x="0" y="0"/>
                   </a:moveTo>
                   <a:lnTo>
-                    <a:pt x="0" y="0"/>
-                  </a:lnTo>
-                  <a:lnTo>
-                    <a:pt x="0" y="0"/>
+                    <a:pt x="7660515" y="0"/>
+                  </a:lnTo>
+                  <a:lnTo>
+                    <a:pt x="7660515" y="0"/>
                   </a:lnTo>
                 </a:path>
               </a:pathLst>
@@ -2916,15 +2908,15 @@
           </p:nvSpPr>
           <p:spPr>
             <a:xfrm>
-              <a:off x="3809601" y="2073503"/>
-              <a:ext cx="0" cy="3649639"/>
+              <a:off x="2105273" y="2143092"/>
+              <a:ext cx="0" cy="1317069"/>
             </a:xfrm>
             <a:custGeom>
               <a:avLst/>
               <a:pathLst>
-                <a:path w="0" h="3649639">
+                <a:path w="0" h="1317069">
                   <a:moveTo>
-                    <a:pt x="0" y="3649639"/>
+                    <a:pt x="0" y="1317069"/>
                   </a:moveTo>
                   <a:lnTo>
                     <a:pt x="0" y="0"/>
@@ -2959,15 +2951,15 @@
           </p:nvSpPr>
           <p:spPr>
             <a:xfrm>
-              <a:off x="5561386" y="2073503"/>
-              <a:ext cx="0" cy="3649639"/>
+              <a:off x="3825799" y="2143092"/>
+              <a:ext cx="0" cy="1317069"/>
             </a:xfrm>
             <a:custGeom>
               <a:avLst/>
               <a:pathLst>
-                <a:path w="0" h="3649639">
+                <a:path w="0" h="1317069">
                   <a:moveTo>
-                    <a:pt x="0" y="3649639"/>
+                    <a:pt x="0" y="1317069"/>
                   </a:moveTo>
                   <a:lnTo>
                     <a:pt x="0" y="0"/>
@@ -3002,15 +2994,15 @@
           </p:nvSpPr>
           <p:spPr>
             <a:xfrm>
-              <a:off x="7313171" y="2073503"/>
-              <a:ext cx="0" cy="3649639"/>
+              <a:off x="5546325" y="2143092"/>
+              <a:ext cx="0" cy="1317069"/>
             </a:xfrm>
             <a:custGeom>
               <a:avLst/>
               <a:pathLst>
-                <a:path w="0" h="3649639">
+                <a:path w="0" h="1317069">
                   <a:moveTo>
-                    <a:pt x="0" y="3649639"/>
+                    <a:pt x="0" y="1317069"/>
                   </a:moveTo>
                   <a:lnTo>
                     <a:pt x="0" y="0"/>
@@ -3039,618 +3031,661 @@
         </p:sp>
         <p:sp>
           <p:nvSpPr>
-            <p:cNvPr id="22" name="pg22"/>
+            <p:cNvPr id="22" name="pl22"/>
             <p:cNvSpPr/>
             <p:nvPr/>
           </p:nvSpPr>
           <p:spPr>
             <a:xfrm>
-              <a:off x="1172049" y="3154731"/>
-              <a:ext cx="7090630" cy="2202428"/>
+              <a:off x="7266851" y="2143092"/>
+              <a:ext cx="0" cy="1317069"/>
             </a:xfrm>
             <a:custGeom>
               <a:avLst/>
               <a:pathLst>
-                <a:path w="7090630" h="2202428">
+                <a:path w="0" h="1317069">
+                  <a:moveTo>
+                    <a:pt x="0" y="1317069"/>
+                  </a:moveTo>
+                  <a:lnTo>
+                    <a:pt x="0" y="0"/>
+                  </a:lnTo>
+                  <a:lnTo>
+                    <a:pt x="0" y="0"/>
+                  </a:lnTo>
+                </a:path>
+              </a:pathLst>
+            </a:custGeom>
+            <a:ln w="13550" cap="flat">
+              <a:solidFill>
+                <a:srgbClr val="EBEBEB">
+                  <a:alpha val="100000"/>
+                </a:srgbClr>
+              </a:solidFill>
+              <a:prstDash val="solid"/>
+              <a:round/>
+            </a:ln>
+          </p:spPr>
+          <p:txBody>
+            <a:bodyPr/>
+            <a:lstStyle/>
+            <a:p/>
+          </p:txBody>
+        </p:sp>
+        <p:sp>
+          <p:nvSpPr>
+            <p:cNvPr id="23" name="pg23"/>
+            <p:cNvSpPr/>
+            <p:nvPr/>
+          </p:nvSpPr>
+          <p:spPr>
+            <a:xfrm>
+              <a:off x="1235312" y="2533281"/>
+              <a:ext cx="6964104" cy="794804"/>
+            </a:xfrm>
+            <a:custGeom>
+              <a:avLst/>
+              <a:pathLst>
+                <a:path w="6964104" h="794804">
                   <a:moveTo>
                     <a:pt x="0" y="0"/>
                   </a:moveTo>
                   <a:lnTo>
-                    <a:pt x="71622" y="59567"/>
-                  </a:lnTo>
-                  <a:lnTo>
-                    <a:pt x="143245" y="117657"/>
-                  </a:lnTo>
-                  <a:lnTo>
-                    <a:pt x="214867" y="174307"/>
-                  </a:lnTo>
-                  <a:lnTo>
-                    <a:pt x="286490" y="229552"/>
-                  </a:lnTo>
-                  <a:lnTo>
-                    <a:pt x="358112" y="283428"/>
-                  </a:lnTo>
-                  <a:lnTo>
-                    <a:pt x="429735" y="335967"/>
-                  </a:lnTo>
-                  <a:lnTo>
-                    <a:pt x="501357" y="387205"/>
-                  </a:lnTo>
-                  <a:lnTo>
-                    <a:pt x="572980" y="437172"/>
-                  </a:lnTo>
-                  <a:lnTo>
-                    <a:pt x="644602" y="485900"/>
-                  </a:lnTo>
-                  <a:lnTo>
-                    <a:pt x="716225" y="533419"/>
-                  </a:lnTo>
-                  <a:lnTo>
-                    <a:pt x="787847" y="579761"/>
-                  </a:lnTo>
-                  <a:lnTo>
-                    <a:pt x="859470" y="624954"/>
-                  </a:lnTo>
-                  <a:lnTo>
-                    <a:pt x="931092" y="669026"/>
-                  </a:lnTo>
-                  <a:lnTo>
-                    <a:pt x="1002715" y="712005"/>
-                  </a:lnTo>
-                  <a:lnTo>
-                    <a:pt x="1074337" y="753919"/>
-                  </a:lnTo>
-                  <a:lnTo>
-                    <a:pt x="1145960" y="794794"/>
-                  </a:lnTo>
-                  <a:lnTo>
-                    <a:pt x="1217582" y="834655"/>
-                  </a:lnTo>
-                  <a:lnTo>
-                    <a:pt x="1289205" y="873528"/>
-                  </a:lnTo>
-                  <a:lnTo>
-                    <a:pt x="1360827" y="911437"/>
-                  </a:lnTo>
-                  <a:lnTo>
-                    <a:pt x="1432450" y="948407"/>
-                  </a:lnTo>
-                  <a:lnTo>
-                    <a:pt x="1504073" y="984459"/>
-                  </a:lnTo>
-                  <a:lnTo>
-                    <a:pt x="1575695" y="1019618"/>
-                  </a:lnTo>
-                  <a:lnTo>
-                    <a:pt x="1647318" y="1053905"/>
-                  </a:lnTo>
-                  <a:lnTo>
-                    <a:pt x="1718940" y="1087342"/>
-                  </a:lnTo>
-                  <a:lnTo>
-                    <a:pt x="1790563" y="1119950"/>
-                  </a:lnTo>
-                  <a:lnTo>
-                    <a:pt x="1862185" y="1151749"/>
-                  </a:lnTo>
-                  <a:lnTo>
-                    <a:pt x="1933808" y="1182760"/>
-                  </a:lnTo>
-                  <a:lnTo>
-                    <a:pt x="2005430" y="1213003"/>
-                  </a:lnTo>
-                  <a:lnTo>
-                    <a:pt x="2077053" y="1242495"/>
-                  </a:lnTo>
-                  <a:lnTo>
-                    <a:pt x="2148675" y="1271256"/>
-                  </a:lnTo>
-                  <a:lnTo>
-                    <a:pt x="2220298" y="1299304"/>
-                  </a:lnTo>
-                  <a:lnTo>
-                    <a:pt x="2291920" y="1326657"/>
-                  </a:lnTo>
-                  <a:lnTo>
-                    <a:pt x="2363543" y="1353331"/>
-                  </a:lnTo>
-                  <a:lnTo>
-                    <a:pt x="2435165" y="1379344"/>
-                  </a:lnTo>
-                  <a:lnTo>
-                    <a:pt x="2506788" y="1404712"/>
-                  </a:lnTo>
-                  <a:lnTo>
-                    <a:pt x="2578410" y="1429452"/>
-                  </a:lnTo>
-                  <a:lnTo>
-                    <a:pt x="2650033" y="1453577"/>
-                  </a:lnTo>
-                  <a:lnTo>
-                    <a:pt x="2721655" y="1477105"/>
-                  </a:lnTo>
-                  <a:lnTo>
-                    <a:pt x="2793278" y="1500049"/>
-                  </a:lnTo>
-                  <a:lnTo>
-                    <a:pt x="2864901" y="1522425"/>
-                  </a:lnTo>
-                  <a:lnTo>
-                    <a:pt x="2936523" y="1544246"/>
-                  </a:lnTo>
-                  <a:lnTo>
-                    <a:pt x="3008146" y="1565525"/>
-                  </a:lnTo>
-                  <a:lnTo>
-                    <a:pt x="3079768" y="1576104"/>
-                  </a:lnTo>
-                  <a:lnTo>
-                    <a:pt x="3151391" y="1580845"/>
-                  </a:lnTo>
-                  <a:lnTo>
-                    <a:pt x="3223013" y="1585560"/>
-                  </a:lnTo>
-                  <a:lnTo>
-                    <a:pt x="3294636" y="1590247"/>
-                  </a:lnTo>
-                  <a:lnTo>
-                    <a:pt x="3366258" y="1594907"/>
-                  </a:lnTo>
-                  <a:lnTo>
-                    <a:pt x="3437881" y="1599541"/>
-                  </a:lnTo>
-                  <a:lnTo>
-                    <a:pt x="3509503" y="1604148"/>
-                  </a:lnTo>
-                  <a:lnTo>
-                    <a:pt x="3581126" y="1608728"/>
-                  </a:lnTo>
-                  <a:lnTo>
-                    <a:pt x="3652748" y="1613283"/>
-                  </a:lnTo>
-                  <a:lnTo>
-                    <a:pt x="3724371" y="1617811"/>
-                  </a:lnTo>
-                  <a:lnTo>
-                    <a:pt x="3795993" y="1622313"/>
-                  </a:lnTo>
-                  <a:lnTo>
-                    <a:pt x="3867616" y="1626789"/>
-                  </a:lnTo>
-                  <a:lnTo>
-                    <a:pt x="3939238" y="1631240"/>
-                  </a:lnTo>
-                  <a:lnTo>
-                    <a:pt x="4010861" y="1635665"/>
-                  </a:lnTo>
-                  <a:lnTo>
-                    <a:pt x="4082483" y="1640065"/>
-                  </a:lnTo>
-                  <a:lnTo>
-                    <a:pt x="4154106" y="1644439"/>
-                  </a:lnTo>
-                  <a:lnTo>
-                    <a:pt x="4225729" y="1648789"/>
-                  </a:lnTo>
-                  <a:lnTo>
-                    <a:pt x="4297351" y="1653113"/>
-                  </a:lnTo>
-                  <a:lnTo>
-                    <a:pt x="4368974" y="1657413"/>
-                  </a:lnTo>
-                  <a:lnTo>
-                    <a:pt x="4440596" y="1661688"/>
-                  </a:lnTo>
-                  <a:lnTo>
-                    <a:pt x="4512219" y="1665938"/>
-                  </a:lnTo>
-                  <a:lnTo>
-                    <a:pt x="4583841" y="1670164"/>
-                  </a:lnTo>
-                  <a:lnTo>
-                    <a:pt x="4655464" y="1674366"/>
-                  </a:lnTo>
-                  <a:lnTo>
-                    <a:pt x="4727086" y="1678544"/>
-                  </a:lnTo>
-                  <a:lnTo>
-                    <a:pt x="4798709" y="1682697"/>
-                  </a:lnTo>
-                  <a:lnTo>
-                    <a:pt x="4870331" y="1686827"/>
-                  </a:lnTo>
-                  <a:lnTo>
-                    <a:pt x="4941954" y="1690934"/>
-                  </a:lnTo>
-                  <a:lnTo>
-                    <a:pt x="5013576" y="1695016"/>
-                  </a:lnTo>
-                  <a:lnTo>
-                    <a:pt x="5085199" y="1699075"/>
-                  </a:lnTo>
-                  <a:lnTo>
-                    <a:pt x="5156821" y="1703111"/>
-                  </a:lnTo>
-                  <a:lnTo>
-                    <a:pt x="5228444" y="1707124"/>
-                  </a:lnTo>
-                  <a:lnTo>
-                    <a:pt x="5300066" y="1711114"/>
-                  </a:lnTo>
-                  <a:lnTo>
-                    <a:pt x="5371689" y="1715081"/>
-                  </a:lnTo>
-                  <a:lnTo>
-                    <a:pt x="5443311" y="1719025"/>
-                  </a:lnTo>
-                  <a:lnTo>
-                    <a:pt x="5514934" y="1722946"/>
-                  </a:lnTo>
-                  <a:lnTo>
-                    <a:pt x="5586557" y="1726845"/>
-                  </a:lnTo>
-                  <a:lnTo>
-                    <a:pt x="5658179" y="1730722"/>
-                  </a:lnTo>
-                  <a:lnTo>
-                    <a:pt x="5729802" y="1734576"/>
-                  </a:lnTo>
-                  <a:lnTo>
-                    <a:pt x="5801424" y="1738408"/>
-                  </a:lnTo>
-                  <a:lnTo>
-                    <a:pt x="5873047" y="1742219"/>
-                  </a:lnTo>
-                  <a:lnTo>
-                    <a:pt x="5944669" y="1746007"/>
-                  </a:lnTo>
-                  <a:lnTo>
-                    <a:pt x="6016292" y="1749774"/>
-                  </a:lnTo>
-                  <a:lnTo>
-                    <a:pt x="6087914" y="1753519"/>
-                  </a:lnTo>
-                  <a:lnTo>
-                    <a:pt x="6159537" y="1757242"/>
-                  </a:lnTo>
-                  <a:lnTo>
-                    <a:pt x="6231159" y="1760945"/>
-                  </a:lnTo>
-                  <a:lnTo>
-                    <a:pt x="6302782" y="1764626"/>
-                  </a:lnTo>
-                  <a:lnTo>
-                    <a:pt x="6374404" y="1768285"/>
-                  </a:lnTo>
-                  <a:lnTo>
-                    <a:pt x="6446027" y="1771924"/>
-                  </a:lnTo>
-                  <a:lnTo>
-                    <a:pt x="6517649" y="1775542"/>
-                  </a:lnTo>
-                  <a:lnTo>
-                    <a:pt x="6589272" y="1779139"/>
-                  </a:lnTo>
-                  <a:lnTo>
-                    <a:pt x="6660894" y="1782716"/>
-                  </a:lnTo>
-                  <a:lnTo>
-                    <a:pt x="6732517" y="1786272"/>
-                  </a:lnTo>
-                  <a:lnTo>
-                    <a:pt x="6804139" y="1789808"/>
-                  </a:lnTo>
-                  <a:lnTo>
-                    <a:pt x="6875762" y="1793323"/>
-                  </a:lnTo>
-                  <a:lnTo>
-                    <a:pt x="6947385" y="1796818"/>
-                  </a:lnTo>
-                  <a:lnTo>
-                    <a:pt x="7019007" y="1800293"/>
-                  </a:lnTo>
-                  <a:lnTo>
-                    <a:pt x="7090630" y="1803749"/>
-                  </a:lnTo>
-                  <a:lnTo>
-                    <a:pt x="7090630" y="2202428"/>
-                  </a:lnTo>
-                  <a:lnTo>
-                    <a:pt x="7019007" y="2197341"/>
-                  </a:lnTo>
-                  <a:lnTo>
-                    <a:pt x="6947385" y="2192125"/>
-                  </a:lnTo>
-                  <a:lnTo>
-                    <a:pt x="6875762" y="2186776"/>
-                  </a:lnTo>
-                  <a:lnTo>
-                    <a:pt x="6804139" y="2181291"/>
-                  </a:lnTo>
-                  <a:lnTo>
-                    <a:pt x="6732517" y="2175666"/>
-                  </a:lnTo>
-                  <a:lnTo>
-                    <a:pt x="6660894" y="2169899"/>
-                  </a:lnTo>
-                  <a:lnTo>
-                    <a:pt x="6589272" y="2163985"/>
-                  </a:lnTo>
-                  <a:lnTo>
-                    <a:pt x="6517649" y="2157920"/>
-                  </a:lnTo>
-                  <a:lnTo>
-                    <a:pt x="6446027" y="2151702"/>
-                  </a:lnTo>
-                  <a:lnTo>
-                    <a:pt x="6374404" y="2145325"/>
-                  </a:lnTo>
-                  <a:lnTo>
-                    <a:pt x="6302782" y="2138786"/>
-                  </a:lnTo>
-                  <a:lnTo>
-                    <a:pt x="6231159" y="2132081"/>
-                  </a:lnTo>
-                  <a:lnTo>
-                    <a:pt x="6159537" y="2125205"/>
-                  </a:lnTo>
-                  <a:lnTo>
-                    <a:pt x="6087914" y="2118155"/>
-                  </a:lnTo>
-                  <a:lnTo>
-                    <a:pt x="6016292" y="2110925"/>
-                  </a:lnTo>
-                  <a:lnTo>
-                    <a:pt x="5944669" y="2103512"/>
-                  </a:lnTo>
-                  <a:lnTo>
-                    <a:pt x="5873047" y="2095910"/>
-                  </a:lnTo>
-                  <a:lnTo>
-                    <a:pt x="5801424" y="2088115"/>
-                  </a:lnTo>
-                  <a:lnTo>
-                    <a:pt x="5729802" y="2080121"/>
-                  </a:lnTo>
-                  <a:lnTo>
-                    <a:pt x="5658179" y="2071925"/>
-                  </a:lnTo>
-                  <a:lnTo>
-                    <a:pt x="5586557" y="2063520"/>
-                  </a:lnTo>
-                  <a:lnTo>
-                    <a:pt x="5514934" y="2054901"/>
-                  </a:lnTo>
-                  <a:lnTo>
-                    <a:pt x="5443311" y="2046063"/>
-                  </a:lnTo>
-                  <a:lnTo>
-                    <a:pt x="5371689" y="2037001"/>
-                  </a:lnTo>
-                  <a:lnTo>
-                    <a:pt x="5300066" y="2027708"/>
-                  </a:lnTo>
-                  <a:lnTo>
-                    <a:pt x="5228444" y="2018179"/>
-                  </a:lnTo>
-                  <a:lnTo>
-                    <a:pt x="5156821" y="2008407"/>
-                  </a:lnTo>
-                  <a:lnTo>
-                    <a:pt x="5085199" y="1998388"/>
-                  </a:lnTo>
-                  <a:lnTo>
-                    <a:pt x="5013576" y="1988113"/>
-                  </a:lnTo>
-                  <a:lnTo>
-                    <a:pt x="4941954" y="1977577"/>
-                  </a:lnTo>
-                  <a:lnTo>
-                    <a:pt x="4870331" y="1966774"/>
-                  </a:lnTo>
-                  <a:lnTo>
-                    <a:pt x="4798709" y="1955695"/>
-                  </a:lnTo>
-                  <a:lnTo>
-                    <a:pt x="4727086" y="1944335"/>
-                  </a:lnTo>
-                  <a:lnTo>
-                    <a:pt x="4655464" y="1932686"/>
-                  </a:lnTo>
-                  <a:lnTo>
-                    <a:pt x="4583841" y="1920741"/>
-                  </a:lnTo>
-                  <a:lnTo>
-                    <a:pt x="4512219" y="1908493"/>
-                  </a:lnTo>
-                  <a:lnTo>
-                    <a:pt x="4440596" y="1895933"/>
-                  </a:lnTo>
-                  <a:lnTo>
-                    <a:pt x="4368974" y="1883053"/>
-                  </a:lnTo>
-                  <a:lnTo>
-                    <a:pt x="4297351" y="1869846"/>
-                  </a:lnTo>
-                  <a:lnTo>
-                    <a:pt x="4225729" y="1856304"/>
-                  </a:lnTo>
-                  <a:lnTo>
-                    <a:pt x="4154106" y="1842417"/>
-                  </a:lnTo>
-                  <a:lnTo>
-                    <a:pt x="4082483" y="1828177"/>
-                  </a:lnTo>
-                  <a:lnTo>
-                    <a:pt x="4010861" y="1813575"/>
-                  </a:lnTo>
-                  <a:lnTo>
-                    <a:pt x="3939238" y="1798602"/>
-                  </a:lnTo>
-                  <a:lnTo>
-                    <a:pt x="3867616" y="1783248"/>
-                  </a:lnTo>
-                  <a:lnTo>
-                    <a:pt x="3795993" y="1767503"/>
-                  </a:lnTo>
-                  <a:lnTo>
-                    <a:pt x="3724371" y="1751359"/>
-                  </a:lnTo>
-                  <a:lnTo>
-                    <a:pt x="3652748" y="1734804"/>
-                  </a:lnTo>
-                  <a:lnTo>
-                    <a:pt x="3581126" y="1717828"/>
-                  </a:lnTo>
-                  <a:lnTo>
-                    <a:pt x="3509503" y="1700420"/>
-                  </a:lnTo>
-                  <a:lnTo>
-                    <a:pt x="3437881" y="1682570"/>
-                  </a:lnTo>
-                  <a:lnTo>
-                    <a:pt x="3366258" y="1664266"/>
-                  </a:lnTo>
-                  <a:lnTo>
-                    <a:pt x="3294636" y="1645497"/>
-                  </a:lnTo>
-                  <a:lnTo>
-                    <a:pt x="3223013" y="1626251"/>
-                  </a:lnTo>
-                  <a:lnTo>
-                    <a:pt x="3151391" y="1606515"/>
-                  </a:lnTo>
-                  <a:lnTo>
-                    <a:pt x="3079768" y="1586277"/>
-                  </a:lnTo>
-                  <a:lnTo>
-                    <a:pt x="3008146" y="1571335"/>
-                  </a:lnTo>
-                  <a:lnTo>
-                    <a:pt x="2936523" y="1566539"/>
-                  </a:lnTo>
-                  <a:lnTo>
-                    <a:pt x="2864901" y="1561715"/>
-                  </a:lnTo>
-                  <a:lnTo>
-                    <a:pt x="2793278" y="1556863"/>
-                  </a:lnTo>
-                  <a:lnTo>
-                    <a:pt x="2721655" y="1551983"/>
-                  </a:lnTo>
-                  <a:lnTo>
-                    <a:pt x="2650033" y="1547075"/>
-                  </a:lnTo>
-                  <a:lnTo>
-                    <a:pt x="2578410" y="1542139"/>
-                  </a:lnTo>
-                  <a:lnTo>
-                    <a:pt x="2506788" y="1537174"/>
-                  </a:lnTo>
-                  <a:lnTo>
-                    <a:pt x="2435165" y="1532180"/>
-                  </a:lnTo>
-                  <a:lnTo>
-                    <a:pt x="2363543" y="1527158"/>
-                  </a:lnTo>
-                  <a:lnTo>
-                    <a:pt x="2291920" y="1522107"/>
-                  </a:lnTo>
-                  <a:lnTo>
-                    <a:pt x="2220298" y="1517026"/>
-                  </a:lnTo>
-                  <a:lnTo>
-                    <a:pt x="2148675" y="1511917"/>
-                  </a:lnTo>
-                  <a:lnTo>
-                    <a:pt x="2077053" y="1506778"/>
-                  </a:lnTo>
-                  <a:lnTo>
-                    <a:pt x="2005430" y="1501609"/>
-                  </a:lnTo>
-                  <a:lnTo>
-                    <a:pt x="1933808" y="1496410"/>
-                  </a:lnTo>
-                  <a:lnTo>
-                    <a:pt x="1862185" y="1491181"/>
-                  </a:lnTo>
-                  <a:lnTo>
-                    <a:pt x="1790563" y="1485922"/>
-                  </a:lnTo>
-                  <a:lnTo>
-                    <a:pt x="1718940" y="1480633"/>
-                  </a:lnTo>
-                  <a:lnTo>
-                    <a:pt x="1647318" y="1475313"/>
-                  </a:lnTo>
-                  <a:lnTo>
-                    <a:pt x="1575695" y="1469963"/>
-                  </a:lnTo>
-                  <a:lnTo>
-                    <a:pt x="1504073" y="1464582"/>
-                  </a:lnTo>
-                  <a:lnTo>
-                    <a:pt x="1432450" y="1459169"/>
-                  </a:lnTo>
-                  <a:lnTo>
-                    <a:pt x="1360827" y="1453726"/>
-                  </a:lnTo>
-                  <a:lnTo>
-                    <a:pt x="1289205" y="1448251"/>
-                  </a:lnTo>
-                  <a:lnTo>
-                    <a:pt x="1217582" y="1442744"/>
-                  </a:lnTo>
-                  <a:lnTo>
-                    <a:pt x="1145960" y="1437206"/>
-                  </a:lnTo>
-                  <a:lnTo>
-                    <a:pt x="1074337" y="1431635"/>
-                  </a:lnTo>
-                  <a:lnTo>
-                    <a:pt x="1002715" y="1426033"/>
-                  </a:lnTo>
-                  <a:lnTo>
-                    <a:pt x="931092" y="1420398"/>
-                  </a:lnTo>
-                  <a:lnTo>
-                    <a:pt x="859470" y="1414731"/>
-                  </a:lnTo>
-                  <a:lnTo>
-                    <a:pt x="787847" y="1409031"/>
-                  </a:lnTo>
-                  <a:lnTo>
-                    <a:pt x="716225" y="1403298"/>
-                  </a:lnTo>
-                  <a:lnTo>
-                    <a:pt x="644602" y="1397532"/>
-                  </a:lnTo>
-                  <a:lnTo>
-                    <a:pt x="572980" y="1391733"/>
-                  </a:lnTo>
-                  <a:lnTo>
-                    <a:pt x="501357" y="1385900"/>
-                  </a:lnTo>
-                  <a:lnTo>
-                    <a:pt x="429735" y="1380033"/>
-                  </a:lnTo>
-                  <a:lnTo>
-                    <a:pt x="358112" y="1374133"/>
-                  </a:lnTo>
-                  <a:lnTo>
-                    <a:pt x="286490" y="1368199"/>
-                  </a:lnTo>
-                  <a:lnTo>
-                    <a:pt x="214867" y="1362230"/>
-                  </a:lnTo>
-                  <a:lnTo>
-                    <a:pt x="143245" y="1356227"/>
-                  </a:lnTo>
-                  <a:lnTo>
-                    <a:pt x="71622" y="1350190"/>
-                  </a:lnTo>
-                  <a:lnTo>
-                    <a:pt x="0" y="1344117"/>
+                    <a:pt x="70344" y="21496"/>
+                  </a:lnTo>
+                  <a:lnTo>
+                    <a:pt x="140688" y="42459"/>
+                  </a:lnTo>
+                  <a:lnTo>
+                    <a:pt x="211033" y="62903"/>
+                  </a:lnTo>
+                  <a:lnTo>
+                    <a:pt x="281377" y="82840"/>
+                  </a:lnTo>
+                  <a:lnTo>
+                    <a:pt x="351722" y="102282"/>
+                  </a:lnTo>
+                  <a:lnTo>
+                    <a:pt x="422066" y="121242"/>
+                  </a:lnTo>
+                  <a:lnTo>
+                    <a:pt x="492411" y="139733"/>
+                  </a:lnTo>
+                  <a:lnTo>
+                    <a:pt x="562755" y="157765"/>
+                  </a:lnTo>
+                  <a:lnTo>
+                    <a:pt x="633100" y="175349"/>
+                  </a:lnTo>
+                  <a:lnTo>
+                    <a:pt x="703444" y="192498"/>
+                  </a:lnTo>
+                  <a:lnTo>
+                    <a:pt x="773789" y="209222"/>
+                  </a:lnTo>
+                  <a:lnTo>
+                    <a:pt x="844133" y="225531"/>
+                  </a:lnTo>
+                  <a:lnTo>
+                    <a:pt x="914478" y="241435"/>
+                  </a:lnTo>
+                  <a:lnTo>
+                    <a:pt x="984822" y="256946"/>
+                  </a:lnTo>
+                  <a:lnTo>
+                    <a:pt x="1055167" y="272071"/>
+                  </a:lnTo>
+                  <a:lnTo>
+                    <a:pt x="1125511" y="286822"/>
+                  </a:lnTo>
+                  <a:lnTo>
+                    <a:pt x="1195856" y="301207"/>
+                  </a:lnTo>
+                  <a:lnTo>
+                    <a:pt x="1266200" y="315235"/>
+                  </a:lnTo>
+                  <a:lnTo>
+                    <a:pt x="1336545" y="328916"/>
+                  </a:lnTo>
+                  <a:lnTo>
+                    <a:pt x="1406889" y="342257"/>
+                  </a:lnTo>
+                  <a:lnTo>
+                    <a:pt x="1477234" y="355268"/>
+                  </a:lnTo>
+                  <a:lnTo>
+                    <a:pt x="1547578" y="367956"/>
+                  </a:lnTo>
+                  <a:lnTo>
+                    <a:pt x="1617923" y="380329"/>
+                  </a:lnTo>
+                  <a:lnTo>
+                    <a:pt x="1688267" y="392396"/>
+                  </a:lnTo>
+                  <a:lnTo>
+                    <a:pt x="1758612" y="404163"/>
+                  </a:lnTo>
+                  <a:lnTo>
+                    <a:pt x="1828956" y="415639"/>
+                  </a:lnTo>
+                  <a:lnTo>
+                    <a:pt x="1899301" y="426830"/>
+                  </a:lnTo>
+                  <a:lnTo>
+                    <a:pt x="1969645" y="437744"/>
+                  </a:lnTo>
+                  <a:lnTo>
+                    <a:pt x="2039990" y="448387"/>
+                  </a:lnTo>
+                  <a:lnTo>
+                    <a:pt x="2110334" y="458766"/>
+                  </a:lnTo>
+                  <a:lnTo>
+                    <a:pt x="2180679" y="468888"/>
+                  </a:lnTo>
+                  <a:lnTo>
+                    <a:pt x="2251023" y="478759"/>
+                  </a:lnTo>
+                  <a:lnTo>
+                    <a:pt x="2321368" y="488385"/>
+                  </a:lnTo>
+                  <a:lnTo>
+                    <a:pt x="2391712" y="497773"/>
+                  </a:lnTo>
+                  <a:lnTo>
+                    <a:pt x="2462057" y="506927"/>
+                  </a:lnTo>
+                  <a:lnTo>
+                    <a:pt x="2532401" y="515855"/>
+                  </a:lnTo>
+                  <a:lnTo>
+                    <a:pt x="2602746" y="524562"/>
+                  </a:lnTo>
+                  <a:lnTo>
+                    <a:pt x="2673090" y="533052"/>
+                  </a:lnTo>
+                  <a:lnTo>
+                    <a:pt x="2743435" y="541332"/>
+                  </a:lnTo>
+                  <a:lnTo>
+                    <a:pt x="2813779" y="549407"/>
+                  </a:lnTo>
+                  <a:lnTo>
+                    <a:pt x="2884124" y="557282"/>
+                  </a:lnTo>
+                  <a:lnTo>
+                    <a:pt x="2954468" y="564961"/>
+                  </a:lnTo>
+                  <a:lnTo>
+                    <a:pt x="3024813" y="568779"/>
+                  </a:lnTo>
+                  <a:lnTo>
+                    <a:pt x="3095157" y="570490"/>
+                  </a:lnTo>
+                  <a:lnTo>
+                    <a:pt x="3165502" y="572191"/>
+                  </a:lnTo>
+                  <a:lnTo>
+                    <a:pt x="3235846" y="573882"/>
+                  </a:lnTo>
+                  <a:lnTo>
+                    <a:pt x="3306191" y="575564"/>
+                  </a:lnTo>
+                  <a:lnTo>
+                    <a:pt x="3376535" y="577236"/>
+                  </a:lnTo>
+                  <a:lnTo>
+                    <a:pt x="3446880" y="578899"/>
+                  </a:lnTo>
+                  <a:lnTo>
+                    <a:pt x="3517224" y="580552"/>
+                  </a:lnTo>
+                  <a:lnTo>
+                    <a:pt x="3587569" y="582195"/>
+                  </a:lnTo>
+                  <a:lnTo>
+                    <a:pt x="3657913" y="583830"/>
+                  </a:lnTo>
+                  <a:lnTo>
+                    <a:pt x="3728257" y="585454"/>
+                  </a:lnTo>
+                  <a:lnTo>
+                    <a:pt x="3798602" y="587070"/>
+                  </a:lnTo>
+                  <a:lnTo>
+                    <a:pt x="3868946" y="588676"/>
+                  </a:lnTo>
+                  <a:lnTo>
+                    <a:pt x="3939291" y="590273"/>
+                  </a:lnTo>
+                  <a:lnTo>
+                    <a:pt x="4009635" y="591860"/>
+                  </a:lnTo>
+                  <a:lnTo>
+                    <a:pt x="4079980" y="593439"/>
+                  </a:lnTo>
+                  <a:lnTo>
+                    <a:pt x="4150324" y="595009"/>
+                  </a:lnTo>
+                  <a:lnTo>
+                    <a:pt x="4220669" y="596569"/>
+                  </a:lnTo>
+                  <a:lnTo>
+                    <a:pt x="4291013" y="598121"/>
+                  </a:lnTo>
+                  <a:lnTo>
+                    <a:pt x="4361358" y="599664"/>
+                  </a:lnTo>
+                  <a:lnTo>
+                    <a:pt x="4431702" y="601198"/>
+                  </a:lnTo>
+                  <a:lnTo>
+                    <a:pt x="4502047" y="602723"/>
+                  </a:lnTo>
+                  <a:lnTo>
+                    <a:pt x="4572391" y="604239"/>
+                  </a:lnTo>
+                  <a:lnTo>
+                    <a:pt x="4642736" y="605747"/>
+                  </a:lnTo>
+                  <a:lnTo>
+                    <a:pt x="4713080" y="607246"/>
+                  </a:lnTo>
+                  <a:lnTo>
+                    <a:pt x="4783425" y="608736"/>
+                  </a:lnTo>
+                  <a:lnTo>
+                    <a:pt x="4853769" y="610218"/>
+                  </a:lnTo>
+                  <a:lnTo>
+                    <a:pt x="4924114" y="611691"/>
+                  </a:lnTo>
+                  <a:lnTo>
+                    <a:pt x="4994458" y="613156"/>
+                  </a:lnTo>
+                  <a:lnTo>
+                    <a:pt x="5064803" y="614612"/>
+                  </a:lnTo>
+                  <a:lnTo>
+                    <a:pt x="5135147" y="616061"/>
+                  </a:lnTo>
+                  <a:lnTo>
+                    <a:pt x="5205492" y="617500"/>
+                  </a:lnTo>
+                  <a:lnTo>
+                    <a:pt x="5275836" y="618932"/>
+                  </a:lnTo>
+                  <a:lnTo>
+                    <a:pt x="5346181" y="620355"/>
+                  </a:lnTo>
+                  <a:lnTo>
+                    <a:pt x="5416525" y="621770"/>
+                  </a:lnTo>
+                  <a:lnTo>
+                    <a:pt x="5486870" y="623177"/>
+                  </a:lnTo>
+                  <a:lnTo>
+                    <a:pt x="5557214" y="624576"/>
+                  </a:lnTo>
+                  <a:lnTo>
+                    <a:pt x="5627559" y="625967"/>
+                  </a:lnTo>
+                  <a:lnTo>
+                    <a:pt x="5697903" y="627350"/>
+                  </a:lnTo>
+                  <a:lnTo>
+                    <a:pt x="5768248" y="628725"/>
+                  </a:lnTo>
+                  <a:lnTo>
+                    <a:pt x="5838592" y="630093"/>
+                  </a:lnTo>
+                  <a:lnTo>
+                    <a:pt x="5908937" y="631452"/>
+                  </a:lnTo>
+                  <a:lnTo>
+                    <a:pt x="5979281" y="632803"/>
+                  </a:lnTo>
+                  <a:lnTo>
+                    <a:pt x="6049626" y="634147"/>
+                  </a:lnTo>
+                  <a:lnTo>
+                    <a:pt x="6119970" y="635483"/>
+                  </a:lnTo>
+                  <a:lnTo>
+                    <a:pt x="6190315" y="636812"/>
+                  </a:lnTo>
+                  <a:lnTo>
+                    <a:pt x="6260659" y="638132"/>
+                  </a:lnTo>
+                  <a:lnTo>
+                    <a:pt x="6331004" y="639445"/>
+                  </a:lnTo>
+                  <a:lnTo>
+                    <a:pt x="6401348" y="640751"/>
+                  </a:lnTo>
+                  <a:lnTo>
+                    <a:pt x="6471693" y="642049"/>
+                  </a:lnTo>
+                  <a:lnTo>
+                    <a:pt x="6542037" y="643340"/>
+                  </a:lnTo>
+                  <a:lnTo>
+                    <a:pt x="6612382" y="644623"/>
+                  </a:lnTo>
+                  <a:lnTo>
+                    <a:pt x="6682726" y="645899"/>
+                  </a:lnTo>
+                  <a:lnTo>
+                    <a:pt x="6753071" y="647168"/>
+                  </a:lnTo>
+                  <a:lnTo>
+                    <a:pt x="6823415" y="648429"/>
+                  </a:lnTo>
+                  <a:lnTo>
+                    <a:pt x="6893760" y="649683"/>
+                  </a:lnTo>
+                  <a:lnTo>
+                    <a:pt x="6964104" y="650930"/>
+                  </a:lnTo>
+                  <a:lnTo>
+                    <a:pt x="6964104" y="794804"/>
+                  </a:lnTo>
+                  <a:lnTo>
+                    <a:pt x="6893760" y="792968"/>
+                  </a:lnTo>
+                  <a:lnTo>
+                    <a:pt x="6823415" y="791086"/>
+                  </a:lnTo>
+                  <a:lnTo>
+                    <a:pt x="6753071" y="789156"/>
+                  </a:lnTo>
+                  <a:lnTo>
+                    <a:pt x="6682726" y="787176"/>
+                  </a:lnTo>
+                  <a:lnTo>
+                    <a:pt x="6612382" y="785146"/>
+                  </a:lnTo>
+                  <a:lnTo>
+                    <a:pt x="6542037" y="783065"/>
+                  </a:lnTo>
+                  <a:lnTo>
+                    <a:pt x="6471693" y="780931"/>
+                  </a:lnTo>
+                  <a:lnTo>
+                    <a:pt x="6401348" y="778742"/>
+                  </a:lnTo>
+                  <a:lnTo>
+                    <a:pt x="6331004" y="776498"/>
+                  </a:lnTo>
+                  <a:lnTo>
+                    <a:pt x="6260659" y="774197"/>
+                  </a:lnTo>
+                  <a:lnTo>
+                    <a:pt x="6190315" y="771837"/>
+                  </a:lnTo>
+                  <a:lnTo>
+                    <a:pt x="6119970" y="769418"/>
+                  </a:lnTo>
+                  <a:lnTo>
+                    <a:pt x="6049626" y="766936"/>
+                  </a:lnTo>
+                  <a:lnTo>
+                    <a:pt x="5979281" y="764392"/>
+                  </a:lnTo>
+                  <a:lnTo>
+                    <a:pt x="5908937" y="761783"/>
+                  </a:lnTo>
+                  <a:lnTo>
+                    <a:pt x="5838592" y="759108"/>
+                  </a:lnTo>
+                  <a:lnTo>
+                    <a:pt x="5768248" y="756364"/>
+                  </a:lnTo>
+                  <a:lnTo>
+                    <a:pt x="5697903" y="753551"/>
+                  </a:lnTo>
+                  <a:lnTo>
+                    <a:pt x="5627559" y="750667"/>
+                  </a:lnTo>
+                  <a:lnTo>
+                    <a:pt x="5557214" y="747709"/>
+                  </a:lnTo>
+                  <a:lnTo>
+                    <a:pt x="5486870" y="744675"/>
+                  </a:lnTo>
+                  <a:lnTo>
+                    <a:pt x="5416525" y="741565"/>
+                  </a:lnTo>
+                  <a:lnTo>
+                    <a:pt x="5346181" y="738376"/>
+                  </a:lnTo>
+                  <a:lnTo>
+                    <a:pt x="5275836" y="735105"/>
+                  </a:lnTo>
+                  <a:lnTo>
+                    <a:pt x="5205492" y="731752"/>
+                  </a:lnTo>
+                  <a:lnTo>
+                    <a:pt x="5135147" y="728313"/>
+                  </a:lnTo>
+                  <a:lnTo>
+                    <a:pt x="5064803" y="724787"/>
+                  </a:lnTo>
+                  <a:lnTo>
+                    <a:pt x="4994458" y="721171"/>
+                  </a:lnTo>
+                  <a:lnTo>
+                    <a:pt x="4924114" y="717463"/>
+                  </a:lnTo>
+                  <a:lnTo>
+                    <a:pt x="4853769" y="713661"/>
+                  </a:lnTo>
+                  <a:lnTo>
+                    <a:pt x="4783425" y="709762"/>
+                  </a:lnTo>
+                  <a:lnTo>
+                    <a:pt x="4713080" y="705764"/>
+                  </a:lnTo>
+                  <a:lnTo>
+                    <a:pt x="4642736" y="701665"/>
+                  </a:lnTo>
+                  <a:lnTo>
+                    <a:pt x="4572391" y="697461"/>
+                  </a:lnTo>
+                  <a:lnTo>
+                    <a:pt x="4502047" y="693150"/>
+                  </a:lnTo>
+                  <a:lnTo>
+                    <a:pt x="4431702" y="688730"/>
+                  </a:lnTo>
+                  <a:lnTo>
+                    <a:pt x="4361358" y="684197"/>
+                  </a:lnTo>
+                  <a:lnTo>
+                    <a:pt x="4291013" y="679549"/>
+                  </a:lnTo>
+                  <a:lnTo>
+                    <a:pt x="4220669" y="674783"/>
+                  </a:lnTo>
+                  <a:lnTo>
+                    <a:pt x="4150324" y="669896"/>
+                  </a:lnTo>
+                  <a:lnTo>
+                    <a:pt x="4079980" y="664885"/>
+                  </a:lnTo>
+                  <a:lnTo>
+                    <a:pt x="4009635" y="659746"/>
+                  </a:lnTo>
+                  <a:lnTo>
+                    <a:pt x="3939291" y="654476"/>
+                  </a:lnTo>
+                  <a:lnTo>
+                    <a:pt x="3868946" y="649073"/>
+                  </a:lnTo>
+                  <a:lnTo>
+                    <a:pt x="3798602" y="643532"/>
+                  </a:lnTo>
+                  <a:lnTo>
+                    <a:pt x="3728257" y="637850"/>
+                  </a:lnTo>
+                  <a:lnTo>
+                    <a:pt x="3657913" y="632024"/>
+                  </a:lnTo>
+                  <a:lnTo>
+                    <a:pt x="3587569" y="626050"/>
+                  </a:lnTo>
+                  <a:lnTo>
+                    <a:pt x="3517224" y="619923"/>
+                  </a:lnTo>
+                  <a:lnTo>
+                    <a:pt x="3446880" y="613641"/>
+                  </a:lnTo>
+                  <a:lnTo>
+                    <a:pt x="3376535" y="607200"/>
+                  </a:lnTo>
+                  <a:lnTo>
+                    <a:pt x="3306191" y="600594"/>
+                  </a:lnTo>
+                  <a:lnTo>
+                    <a:pt x="3235846" y="593821"/>
+                  </a:lnTo>
+                  <a:lnTo>
+                    <a:pt x="3165502" y="586875"/>
+                  </a:lnTo>
+                  <a:lnTo>
+                    <a:pt x="3095157" y="579753"/>
+                  </a:lnTo>
+                  <a:lnTo>
+                    <a:pt x="3024813" y="572450"/>
+                  </a:lnTo>
+                  <a:lnTo>
+                    <a:pt x="2954468" y="567058"/>
+                  </a:lnTo>
+                  <a:lnTo>
+                    <a:pt x="2884124" y="565327"/>
+                  </a:lnTo>
+                  <a:lnTo>
+                    <a:pt x="2813779" y="563586"/>
+                  </a:lnTo>
+                  <a:lnTo>
+                    <a:pt x="2743435" y="561835"/>
+                  </a:lnTo>
+                  <a:lnTo>
+                    <a:pt x="2673090" y="560074"/>
+                  </a:lnTo>
+                  <a:lnTo>
+                    <a:pt x="2602746" y="558303"/>
+                  </a:lnTo>
+                  <a:lnTo>
+                    <a:pt x="2532401" y="556521"/>
+                  </a:lnTo>
+                  <a:lnTo>
+                    <a:pt x="2462057" y="554730"/>
+                  </a:lnTo>
+                  <a:lnTo>
+                    <a:pt x="2391712" y="552928"/>
+                  </a:lnTo>
+                  <a:lnTo>
+                    <a:pt x="2321368" y="551115"/>
+                  </a:lnTo>
+                  <a:lnTo>
+                    <a:pt x="2251023" y="549292"/>
+                  </a:lnTo>
+                  <a:lnTo>
+                    <a:pt x="2180679" y="547459"/>
+                  </a:lnTo>
+                  <a:lnTo>
+                    <a:pt x="2110334" y="545615"/>
+                  </a:lnTo>
+                  <a:lnTo>
+                    <a:pt x="2039990" y="543760"/>
+                  </a:lnTo>
+                  <a:lnTo>
+                    <a:pt x="1969645" y="541895"/>
+                  </a:lnTo>
+                  <a:lnTo>
+                    <a:pt x="1899301" y="540019"/>
+                  </a:lnTo>
+                  <a:lnTo>
+                    <a:pt x="1828956" y="538132"/>
+                  </a:lnTo>
+                  <a:lnTo>
+                    <a:pt x="1758612" y="536234"/>
+                  </a:lnTo>
+                  <a:lnTo>
+                    <a:pt x="1688267" y="534325"/>
+                  </a:lnTo>
+                  <a:lnTo>
+                    <a:pt x="1617923" y="532406"/>
+                  </a:lnTo>
+                  <a:lnTo>
+                    <a:pt x="1547578" y="530475"/>
+                  </a:lnTo>
+                  <a:lnTo>
+                    <a:pt x="1477234" y="528533"/>
+                  </a:lnTo>
+                  <a:lnTo>
+                    <a:pt x="1406889" y="526580"/>
+                  </a:lnTo>
+                  <a:lnTo>
+                    <a:pt x="1336545" y="524615"/>
+                  </a:lnTo>
+                  <a:lnTo>
+                    <a:pt x="1266200" y="522639"/>
+                  </a:lnTo>
+                  <a:lnTo>
+                    <a:pt x="1195856" y="520652"/>
+                  </a:lnTo>
+                  <a:lnTo>
+                    <a:pt x="1125511" y="518653"/>
+                  </a:lnTo>
+                  <a:lnTo>
+                    <a:pt x="1055167" y="516643"/>
+                  </a:lnTo>
+                  <a:lnTo>
+                    <a:pt x="984822" y="514621"/>
+                  </a:lnTo>
+                  <a:lnTo>
+                    <a:pt x="914478" y="512588"/>
+                  </a:lnTo>
+                  <a:lnTo>
+                    <a:pt x="844133" y="510543"/>
+                  </a:lnTo>
+                  <a:lnTo>
+                    <a:pt x="773789" y="508486"/>
+                  </a:lnTo>
+                  <a:lnTo>
+                    <a:pt x="703444" y="506417"/>
+                  </a:lnTo>
+                  <a:lnTo>
+                    <a:pt x="633100" y="504336"/>
+                  </a:lnTo>
+                  <a:lnTo>
+                    <a:pt x="562755" y="502243"/>
+                  </a:lnTo>
+                  <a:lnTo>
+                    <a:pt x="492411" y="500138"/>
+                  </a:lnTo>
+                  <a:lnTo>
+                    <a:pt x="422066" y="498021"/>
+                  </a:lnTo>
+                  <a:lnTo>
+                    <a:pt x="351722" y="495892"/>
+                  </a:lnTo>
+                  <a:lnTo>
+                    <a:pt x="281377" y="493750"/>
+                  </a:lnTo>
+                  <a:lnTo>
+                    <a:pt x="211033" y="491597"/>
+                  </a:lnTo>
+                  <a:lnTo>
+                    <a:pt x="140688" y="489430"/>
+                  </a:lnTo>
+                  <a:lnTo>
+                    <a:pt x="70344" y="487251"/>
+                  </a:lnTo>
+                  <a:lnTo>
+                    <a:pt x="0" y="485060"/>
                   </a:lnTo>
                   <a:close/>
                 </a:path>
@@ -3670,643 +3705,318 @@
         </p:sp>
         <p:sp>
           <p:nvSpPr>
-            <p:cNvPr id="23" name="pl23"/>
-            <p:cNvSpPr/>
-            <p:nvPr/>
-          </p:nvSpPr>
-          <p:spPr>
-            <a:xfrm>
-              <a:off x="1172049" y="3154731"/>
-              <a:ext cx="7090630" cy="1803749"/>
-            </a:xfrm>
-            <a:custGeom>
-              <a:avLst/>
-              <a:pathLst>
-                <a:path w="7090630" h="1803749">
-                  <a:moveTo>
-                    <a:pt x="0" y="0"/>
-                  </a:moveTo>
-                  <a:lnTo>
-                    <a:pt x="71622" y="59567"/>
-                  </a:lnTo>
-                  <a:lnTo>
-                    <a:pt x="143245" y="117657"/>
-                  </a:lnTo>
-                  <a:lnTo>
-                    <a:pt x="214867" y="174307"/>
-                  </a:lnTo>
-                  <a:lnTo>
-                    <a:pt x="286490" y="229552"/>
-                  </a:lnTo>
-                  <a:lnTo>
-                    <a:pt x="358112" y="283428"/>
-                  </a:lnTo>
-                  <a:lnTo>
-                    <a:pt x="429735" y="335967"/>
-                  </a:lnTo>
-                  <a:lnTo>
-                    <a:pt x="501357" y="387205"/>
-                  </a:lnTo>
-                  <a:lnTo>
-                    <a:pt x="572980" y="437172"/>
-                  </a:lnTo>
-                  <a:lnTo>
-                    <a:pt x="644602" y="485900"/>
-                  </a:lnTo>
-                  <a:lnTo>
-                    <a:pt x="716225" y="533419"/>
-                  </a:lnTo>
-                  <a:lnTo>
-                    <a:pt x="787847" y="579761"/>
-                  </a:lnTo>
-                  <a:lnTo>
-                    <a:pt x="859470" y="624954"/>
-                  </a:lnTo>
-                  <a:lnTo>
-                    <a:pt x="931092" y="669026"/>
-                  </a:lnTo>
-                  <a:lnTo>
-                    <a:pt x="1002715" y="712005"/>
-                  </a:lnTo>
-                  <a:lnTo>
-                    <a:pt x="1074337" y="753919"/>
-                  </a:lnTo>
-                  <a:lnTo>
-                    <a:pt x="1145960" y="794794"/>
-                  </a:lnTo>
-                  <a:lnTo>
-                    <a:pt x="1217582" y="834655"/>
-                  </a:lnTo>
-                  <a:lnTo>
-                    <a:pt x="1289205" y="873528"/>
-                  </a:lnTo>
-                  <a:lnTo>
-                    <a:pt x="1360827" y="911437"/>
-                  </a:lnTo>
-                  <a:lnTo>
-                    <a:pt x="1432450" y="948407"/>
-                  </a:lnTo>
-                  <a:lnTo>
-                    <a:pt x="1504073" y="984459"/>
-                  </a:lnTo>
-                  <a:lnTo>
-                    <a:pt x="1575695" y="1019618"/>
-                  </a:lnTo>
-                  <a:lnTo>
-                    <a:pt x="1647318" y="1053905"/>
-                  </a:lnTo>
-                  <a:lnTo>
-                    <a:pt x="1718940" y="1087342"/>
-                  </a:lnTo>
-                  <a:lnTo>
-                    <a:pt x="1790563" y="1119950"/>
-                  </a:lnTo>
-                  <a:lnTo>
-                    <a:pt x="1862185" y="1151749"/>
-                  </a:lnTo>
-                  <a:lnTo>
-                    <a:pt x="1933808" y="1182760"/>
-                  </a:lnTo>
-                  <a:lnTo>
-                    <a:pt x="2005430" y="1213003"/>
-                  </a:lnTo>
-                  <a:lnTo>
-                    <a:pt x="2077053" y="1242495"/>
-                  </a:lnTo>
-                  <a:lnTo>
-                    <a:pt x="2148675" y="1271256"/>
-                  </a:lnTo>
-                  <a:lnTo>
-                    <a:pt x="2220298" y="1299304"/>
-                  </a:lnTo>
-                  <a:lnTo>
-                    <a:pt x="2291920" y="1326657"/>
-                  </a:lnTo>
-                  <a:lnTo>
-                    <a:pt x="2363543" y="1353331"/>
-                  </a:lnTo>
-                  <a:lnTo>
-                    <a:pt x="2435165" y="1379344"/>
-                  </a:lnTo>
-                  <a:lnTo>
-                    <a:pt x="2506788" y="1404712"/>
-                  </a:lnTo>
-                  <a:lnTo>
-                    <a:pt x="2578410" y="1429452"/>
-                  </a:lnTo>
-                  <a:lnTo>
-                    <a:pt x="2650033" y="1453577"/>
-                  </a:lnTo>
-                  <a:lnTo>
-                    <a:pt x="2721655" y="1477105"/>
-                  </a:lnTo>
-                  <a:lnTo>
-                    <a:pt x="2793278" y="1500049"/>
-                  </a:lnTo>
-                  <a:lnTo>
-                    <a:pt x="2864901" y="1522425"/>
-                  </a:lnTo>
-                  <a:lnTo>
-                    <a:pt x="2936523" y="1544246"/>
-                  </a:lnTo>
-                  <a:lnTo>
-                    <a:pt x="3008146" y="1565525"/>
-                  </a:lnTo>
-                  <a:lnTo>
-                    <a:pt x="3079768" y="1576104"/>
-                  </a:lnTo>
-                  <a:lnTo>
-                    <a:pt x="3151391" y="1580845"/>
-                  </a:lnTo>
-                  <a:lnTo>
-                    <a:pt x="3223013" y="1585560"/>
-                  </a:lnTo>
-                  <a:lnTo>
-                    <a:pt x="3294636" y="1590247"/>
-                  </a:lnTo>
-                  <a:lnTo>
-                    <a:pt x="3366258" y="1594907"/>
-                  </a:lnTo>
-                  <a:lnTo>
-                    <a:pt x="3437881" y="1599541"/>
-                  </a:lnTo>
-                  <a:lnTo>
-                    <a:pt x="3509503" y="1604148"/>
-                  </a:lnTo>
-                  <a:lnTo>
-                    <a:pt x="3581126" y="1608728"/>
-                  </a:lnTo>
-                  <a:lnTo>
-                    <a:pt x="3652748" y="1613283"/>
-                  </a:lnTo>
-                  <a:lnTo>
-                    <a:pt x="3724371" y="1617811"/>
-                  </a:lnTo>
-                  <a:lnTo>
-                    <a:pt x="3795993" y="1622313"/>
-                  </a:lnTo>
-                  <a:lnTo>
-                    <a:pt x="3867616" y="1626789"/>
-                  </a:lnTo>
-                  <a:lnTo>
-                    <a:pt x="3939238" y="1631240"/>
-                  </a:lnTo>
-                  <a:lnTo>
-                    <a:pt x="4010861" y="1635665"/>
-                  </a:lnTo>
-                  <a:lnTo>
-                    <a:pt x="4082483" y="1640065"/>
-                  </a:lnTo>
-                  <a:lnTo>
-                    <a:pt x="4154106" y="1644439"/>
-                  </a:lnTo>
-                  <a:lnTo>
-                    <a:pt x="4225729" y="1648789"/>
-                  </a:lnTo>
-                  <a:lnTo>
-                    <a:pt x="4297351" y="1653113"/>
-                  </a:lnTo>
-                  <a:lnTo>
-                    <a:pt x="4368974" y="1657413"/>
-                  </a:lnTo>
-                  <a:lnTo>
-                    <a:pt x="4440596" y="1661688"/>
-                  </a:lnTo>
-                  <a:lnTo>
-                    <a:pt x="4512219" y="1665938"/>
-                  </a:lnTo>
-                  <a:lnTo>
-                    <a:pt x="4583841" y="1670164"/>
-                  </a:lnTo>
-                  <a:lnTo>
-                    <a:pt x="4655464" y="1674366"/>
-                  </a:lnTo>
-                  <a:lnTo>
-                    <a:pt x="4727086" y="1678544"/>
-                  </a:lnTo>
-                  <a:lnTo>
-                    <a:pt x="4798709" y="1682697"/>
-                  </a:lnTo>
-                  <a:lnTo>
-                    <a:pt x="4870331" y="1686827"/>
-                  </a:lnTo>
-                  <a:lnTo>
-                    <a:pt x="4941954" y="1690934"/>
-                  </a:lnTo>
-                  <a:lnTo>
-                    <a:pt x="5013576" y="1695016"/>
-                  </a:lnTo>
-                  <a:lnTo>
-                    <a:pt x="5085199" y="1699075"/>
-                  </a:lnTo>
-                  <a:lnTo>
-                    <a:pt x="5156821" y="1703111"/>
-                  </a:lnTo>
-                  <a:lnTo>
-                    <a:pt x="5228444" y="1707124"/>
-                  </a:lnTo>
-                  <a:lnTo>
-                    <a:pt x="5300066" y="1711114"/>
-                  </a:lnTo>
-                  <a:lnTo>
-                    <a:pt x="5371689" y="1715081"/>
-                  </a:lnTo>
-                  <a:lnTo>
-                    <a:pt x="5443311" y="1719025"/>
-                  </a:lnTo>
-                  <a:lnTo>
-                    <a:pt x="5514934" y="1722946"/>
-                  </a:lnTo>
-                  <a:lnTo>
-                    <a:pt x="5586557" y="1726845"/>
-                  </a:lnTo>
-                  <a:lnTo>
-                    <a:pt x="5658179" y="1730722"/>
-                  </a:lnTo>
-                  <a:lnTo>
-                    <a:pt x="5729802" y="1734576"/>
-                  </a:lnTo>
-                  <a:lnTo>
-                    <a:pt x="5801424" y="1738408"/>
-                  </a:lnTo>
-                  <a:lnTo>
-                    <a:pt x="5873047" y="1742219"/>
-                  </a:lnTo>
-                  <a:lnTo>
-                    <a:pt x="5944669" y="1746007"/>
-                  </a:lnTo>
-                  <a:lnTo>
-                    <a:pt x="6016292" y="1749774"/>
-                  </a:lnTo>
-                  <a:lnTo>
-                    <a:pt x="6087914" y="1753519"/>
-                  </a:lnTo>
-                  <a:lnTo>
-                    <a:pt x="6159537" y="1757242"/>
-                  </a:lnTo>
-                  <a:lnTo>
-                    <a:pt x="6231159" y="1760945"/>
-                  </a:lnTo>
-                  <a:lnTo>
-                    <a:pt x="6302782" y="1764626"/>
-                  </a:lnTo>
-                  <a:lnTo>
-                    <a:pt x="6374404" y="1768285"/>
-                  </a:lnTo>
-                  <a:lnTo>
-                    <a:pt x="6446027" y="1771924"/>
-                  </a:lnTo>
-                  <a:lnTo>
-                    <a:pt x="6517649" y="1775542"/>
-                  </a:lnTo>
-                  <a:lnTo>
-                    <a:pt x="6589272" y="1779139"/>
-                  </a:lnTo>
-                  <a:lnTo>
-                    <a:pt x="6660894" y="1782716"/>
-                  </a:lnTo>
-                  <a:lnTo>
-                    <a:pt x="6732517" y="1786272"/>
-                  </a:lnTo>
-                  <a:lnTo>
-                    <a:pt x="6804139" y="1789808"/>
-                  </a:lnTo>
-                  <a:lnTo>
-                    <a:pt x="6875762" y="1793323"/>
-                  </a:lnTo>
-                  <a:lnTo>
-                    <a:pt x="6947385" y="1796818"/>
-                  </a:lnTo>
-                  <a:lnTo>
-                    <a:pt x="7019007" y="1800293"/>
-                  </a:lnTo>
-                  <a:lnTo>
-                    <a:pt x="7090630" y="1803749"/>
-                  </a:lnTo>
-                </a:path>
-              </a:pathLst>
-            </a:custGeom>
-          </p:spPr>
-          <p:txBody>
-            <a:bodyPr/>
-            <a:lstStyle/>
-            <a:p/>
-          </p:txBody>
-        </p:sp>
-        <p:sp>
-          <p:nvSpPr>
             <p:cNvPr id="24" name="pl24"/>
             <p:cNvSpPr/>
             <p:nvPr/>
           </p:nvSpPr>
           <p:spPr>
             <a:xfrm>
-              <a:off x="1172049" y="4498848"/>
-              <a:ext cx="7090630" cy="858311"/>
+              <a:off x="1235312" y="2533281"/>
+              <a:ext cx="6964104" cy="650930"/>
             </a:xfrm>
             <a:custGeom>
               <a:avLst/>
               <a:pathLst>
-                <a:path w="7090630" h="858311">
+                <a:path w="6964104" h="650930">
                   <a:moveTo>
-                    <a:pt x="7090630" y="858311"/>
+                    <a:pt x="0" y="0"/>
                   </a:moveTo>
                   <a:lnTo>
-                    <a:pt x="7019007" y="853223"/>
-                  </a:lnTo>
-                  <a:lnTo>
-                    <a:pt x="6947385" y="848007"/>
-                  </a:lnTo>
-                  <a:lnTo>
-                    <a:pt x="6875762" y="842658"/>
-                  </a:lnTo>
-                  <a:lnTo>
-                    <a:pt x="6804139" y="837173"/>
-                  </a:lnTo>
-                  <a:lnTo>
-                    <a:pt x="6732517" y="831549"/>
-                  </a:lnTo>
-                  <a:lnTo>
-                    <a:pt x="6660894" y="825781"/>
-                  </a:lnTo>
-                  <a:lnTo>
-                    <a:pt x="6589272" y="819867"/>
-                  </a:lnTo>
-                  <a:lnTo>
-                    <a:pt x="6517649" y="813803"/>
-                  </a:lnTo>
-                  <a:lnTo>
-                    <a:pt x="6446027" y="807584"/>
-                  </a:lnTo>
-                  <a:lnTo>
-                    <a:pt x="6374404" y="801207"/>
-                  </a:lnTo>
-                  <a:lnTo>
-                    <a:pt x="6302782" y="794668"/>
-                  </a:lnTo>
-                  <a:lnTo>
-                    <a:pt x="6231159" y="787963"/>
-                  </a:lnTo>
-                  <a:lnTo>
-                    <a:pt x="6159537" y="781088"/>
-                  </a:lnTo>
-                  <a:lnTo>
-                    <a:pt x="6087914" y="774037"/>
-                  </a:lnTo>
-                  <a:lnTo>
-                    <a:pt x="6016292" y="766808"/>
-                  </a:lnTo>
-                  <a:lnTo>
-                    <a:pt x="5944669" y="759394"/>
-                  </a:lnTo>
-                  <a:lnTo>
-                    <a:pt x="5873047" y="751792"/>
-                  </a:lnTo>
-                  <a:lnTo>
-                    <a:pt x="5801424" y="743997"/>
-                  </a:lnTo>
-                  <a:lnTo>
-                    <a:pt x="5729802" y="736004"/>
-                  </a:lnTo>
-                  <a:lnTo>
-                    <a:pt x="5658179" y="727807"/>
-                  </a:lnTo>
-                  <a:lnTo>
-                    <a:pt x="5586557" y="719402"/>
-                  </a:lnTo>
-                  <a:lnTo>
-                    <a:pt x="5514934" y="710783"/>
-                  </a:lnTo>
-                  <a:lnTo>
-                    <a:pt x="5443311" y="701946"/>
-                  </a:lnTo>
-                  <a:lnTo>
-                    <a:pt x="5371689" y="692883"/>
-                  </a:lnTo>
-                  <a:lnTo>
-                    <a:pt x="5300066" y="683590"/>
-                  </a:lnTo>
-                  <a:lnTo>
-                    <a:pt x="5228444" y="674061"/>
-                  </a:lnTo>
-                  <a:lnTo>
-                    <a:pt x="5156821" y="664290"/>
-                  </a:lnTo>
-                  <a:lnTo>
-                    <a:pt x="5085199" y="654270"/>
-                  </a:lnTo>
-                  <a:lnTo>
-                    <a:pt x="5013576" y="643995"/>
-                  </a:lnTo>
-                  <a:lnTo>
-                    <a:pt x="4941954" y="633459"/>
-                  </a:lnTo>
-                  <a:lnTo>
-                    <a:pt x="4870331" y="622656"/>
-                  </a:lnTo>
-                  <a:lnTo>
-                    <a:pt x="4798709" y="611577"/>
-                  </a:lnTo>
-                  <a:lnTo>
-                    <a:pt x="4727086" y="600217"/>
-                  </a:lnTo>
-                  <a:lnTo>
-                    <a:pt x="4655464" y="588569"/>
-                  </a:lnTo>
-                  <a:lnTo>
-                    <a:pt x="4583841" y="576624"/>
-                  </a:lnTo>
-                  <a:lnTo>
-                    <a:pt x="4512219" y="564375"/>
-                  </a:lnTo>
-                  <a:lnTo>
-                    <a:pt x="4440596" y="551815"/>
-                  </a:lnTo>
-                  <a:lnTo>
-                    <a:pt x="4368974" y="538935"/>
-                  </a:lnTo>
-                  <a:lnTo>
-                    <a:pt x="4297351" y="525729"/>
-                  </a:lnTo>
-                  <a:lnTo>
-                    <a:pt x="4225729" y="512186"/>
-                  </a:lnTo>
-                  <a:lnTo>
-                    <a:pt x="4154106" y="498299"/>
-                  </a:lnTo>
-                  <a:lnTo>
-                    <a:pt x="4082483" y="484059"/>
-                  </a:lnTo>
-                  <a:lnTo>
-                    <a:pt x="4010861" y="469457"/>
-                  </a:lnTo>
-                  <a:lnTo>
-                    <a:pt x="3939238" y="454484"/>
-                  </a:lnTo>
-                  <a:lnTo>
-                    <a:pt x="3867616" y="439130"/>
-                  </a:lnTo>
-                  <a:lnTo>
-                    <a:pt x="3795993" y="423386"/>
-                  </a:lnTo>
-                  <a:lnTo>
-                    <a:pt x="3724371" y="407241"/>
-                  </a:lnTo>
-                  <a:lnTo>
-                    <a:pt x="3652748" y="390686"/>
-                  </a:lnTo>
-                  <a:lnTo>
-                    <a:pt x="3581126" y="373710"/>
-                  </a:lnTo>
-                  <a:lnTo>
-                    <a:pt x="3509503" y="356302"/>
-                  </a:lnTo>
-                  <a:lnTo>
-                    <a:pt x="3437881" y="338452"/>
-                  </a:lnTo>
-                  <a:lnTo>
-                    <a:pt x="3366258" y="320148"/>
-                  </a:lnTo>
-                  <a:lnTo>
-                    <a:pt x="3294636" y="301379"/>
-                  </a:lnTo>
-                  <a:lnTo>
-                    <a:pt x="3223013" y="282133"/>
-                  </a:lnTo>
-                  <a:lnTo>
-                    <a:pt x="3151391" y="262397"/>
-                  </a:lnTo>
-                  <a:lnTo>
-                    <a:pt x="3079768" y="242159"/>
-                  </a:lnTo>
-                  <a:lnTo>
-                    <a:pt x="3008146" y="227217"/>
-                  </a:lnTo>
-                  <a:lnTo>
-                    <a:pt x="2936523" y="222421"/>
-                  </a:lnTo>
-                  <a:lnTo>
-                    <a:pt x="2864901" y="217597"/>
-                  </a:lnTo>
-                  <a:lnTo>
-                    <a:pt x="2793278" y="212745"/>
-                  </a:lnTo>
-                  <a:lnTo>
-                    <a:pt x="2721655" y="207865"/>
-                  </a:lnTo>
-                  <a:lnTo>
-                    <a:pt x="2650033" y="202957"/>
-                  </a:lnTo>
-                  <a:lnTo>
-                    <a:pt x="2578410" y="198021"/>
-                  </a:lnTo>
-                  <a:lnTo>
-                    <a:pt x="2506788" y="193056"/>
-                  </a:lnTo>
-                  <a:lnTo>
-                    <a:pt x="2435165" y="188063"/>
-                  </a:lnTo>
-                  <a:lnTo>
-                    <a:pt x="2363543" y="183040"/>
-                  </a:lnTo>
-                  <a:lnTo>
-                    <a:pt x="2291920" y="177989"/>
-                  </a:lnTo>
-                  <a:lnTo>
-                    <a:pt x="2220298" y="172909"/>
-                  </a:lnTo>
-                  <a:lnTo>
-                    <a:pt x="2148675" y="167799"/>
-                  </a:lnTo>
-                  <a:lnTo>
-                    <a:pt x="2077053" y="162660"/>
-                  </a:lnTo>
-                  <a:lnTo>
-                    <a:pt x="2005430" y="157491"/>
-                  </a:lnTo>
-                  <a:lnTo>
-                    <a:pt x="1933808" y="152292"/>
-                  </a:lnTo>
-                  <a:lnTo>
-                    <a:pt x="1862185" y="147063"/>
-                  </a:lnTo>
-                  <a:lnTo>
-                    <a:pt x="1790563" y="141805"/>
-                  </a:lnTo>
-                  <a:lnTo>
-                    <a:pt x="1718940" y="136515"/>
-                  </a:lnTo>
-                  <a:lnTo>
-                    <a:pt x="1647318" y="131196"/>
-                  </a:lnTo>
-                  <a:lnTo>
-                    <a:pt x="1575695" y="125845"/>
-                  </a:lnTo>
-                  <a:lnTo>
-                    <a:pt x="1504073" y="120464"/>
-                  </a:lnTo>
-                  <a:lnTo>
-                    <a:pt x="1432450" y="115051"/>
-                  </a:lnTo>
-                  <a:lnTo>
-                    <a:pt x="1360827" y="109608"/>
-                  </a:lnTo>
-                  <a:lnTo>
-                    <a:pt x="1289205" y="104133"/>
-                  </a:lnTo>
-                  <a:lnTo>
-                    <a:pt x="1217582" y="98626"/>
-                  </a:lnTo>
-                  <a:lnTo>
-                    <a:pt x="1145960" y="93088"/>
-                  </a:lnTo>
-                  <a:lnTo>
-                    <a:pt x="1074337" y="87518"/>
-                  </a:lnTo>
-                  <a:lnTo>
-                    <a:pt x="1002715" y="81915"/>
-                  </a:lnTo>
-                  <a:lnTo>
-                    <a:pt x="931092" y="76280"/>
-                  </a:lnTo>
-                  <a:lnTo>
-                    <a:pt x="859470" y="70613"/>
-                  </a:lnTo>
-                  <a:lnTo>
-                    <a:pt x="787847" y="64913"/>
-                  </a:lnTo>
-                  <a:lnTo>
-                    <a:pt x="716225" y="59180"/>
-                  </a:lnTo>
-                  <a:lnTo>
-                    <a:pt x="644602" y="53414"/>
-                  </a:lnTo>
-                  <a:lnTo>
-                    <a:pt x="572980" y="47615"/>
-                  </a:lnTo>
-                  <a:lnTo>
-                    <a:pt x="501357" y="41782"/>
-                  </a:lnTo>
-                  <a:lnTo>
-                    <a:pt x="429735" y="35916"/>
-                  </a:lnTo>
-                  <a:lnTo>
-                    <a:pt x="358112" y="30015"/>
-                  </a:lnTo>
-                  <a:lnTo>
-                    <a:pt x="286490" y="24081"/>
-                  </a:lnTo>
-                  <a:lnTo>
-                    <a:pt x="214867" y="18113"/>
-                  </a:lnTo>
-                  <a:lnTo>
-                    <a:pt x="143245" y="12110"/>
-                  </a:lnTo>
-                  <a:lnTo>
-                    <a:pt x="71622" y="6072"/>
-                  </a:lnTo>
-                  <a:lnTo>
-                    <a:pt x="0" y="0"/>
+                    <a:pt x="70344" y="21496"/>
+                  </a:lnTo>
+                  <a:lnTo>
+                    <a:pt x="140688" y="42459"/>
+                  </a:lnTo>
+                  <a:lnTo>
+                    <a:pt x="211033" y="62903"/>
+                  </a:lnTo>
+                  <a:lnTo>
+                    <a:pt x="281377" y="82840"/>
+                  </a:lnTo>
+                  <a:lnTo>
+                    <a:pt x="351722" y="102282"/>
+                  </a:lnTo>
+                  <a:lnTo>
+                    <a:pt x="422066" y="121242"/>
+                  </a:lnTo>
+                  <a:lnTo>
+                    <a:pt x="492411" y="139733"/>
+                  </a:lnTo>
+                  <a:lnTo>
+                    <a:pt x="562755" y="157765"/>
+                  </a:lnTo>
+                  <a:lnTo>
+                    <a:pt x="633100" y="175349"/>
+                  </a:lnTo>
+                  <a:lnTo>
+                    <a:pt x="703444" y="192498"/>
+                  </a:lnTo>
+                  <a:lnTo>
+                    <a:pt x="773789" y="209222"/>
+                  </a:lnTo>
+                  <a:lnTo>
+                    <a:pt x="844133" y="225531"/>
+                  </a:lnTo>
+                  <a:lnTo>
+                    <a:pt x="914478" y="241435"/>
+                  </a:lnTo>
+                  <a:lnTo>
+                    <a:pt x="984822" y="256946"/>
+                  </a:lnTo>
+                  <a:lnTo>
+                    <a:pt x="1055167" y="272071"/>
+                  </a:lnTo>
+                  <a:lnTo>
+                    <a:pt x="1125511" y="286822"/>
+                  </a:lnTo>
+                  <a:lnTo>
+                    <a:pt x="1195856" y="301207"/>
+                  </a:lnTo>
+                  <a:lnTo>
+                    <a:pt x="1266200" y="315235"/>
+                  </a:lnTo>
+                  <a:lnTo>
+                    <a:pt x="1336545" y="328916"/>
+                  </a:lnTo>
+                  <a:lnTo>
+                    <a:pt x="1406889" y="342257"/>
+                  </a:lnTo>
+                  <a:lnTo>
+                    <a:pt x="1477234" y="355268"/>
+                  </a:lnTo>
+                  <a:lnTo>
+                    <a:pt x="1547578" y="367956"/>
+                  </a:lnTo>
+                  <a:lnTo>
+                    <a:pt x="1617923" y="380329"/>
+                  </a:lnTo>
+                  <a:lnTo>
+                    <a:pt x="1688267" y="392396"/>
+                  </a:lnTo>
+                  <a:lnTo>
+                    <a:pt x="1758612" y="404163"/>
+                  </a:lnTo>
+                  <a:lnTo>
+                    <a:pt x="1828956" y="415639"/>
+                  </a:lnTo>
+                  <a:lnTo>
+                    <a:pt x="1899301" y="426830"/>
+                  </a:lnTo>
+                  <a:lnTo>
+                    <a:pt x="1969645" y="437744"/>
+                  </a:lnTo>
+                  <a:lnTo>
+                    <a:pt x="2039990" y="448387"/>
+                  </a:lnTo>
+                  <a:lnTo>
+                    <a:pt x="2110334" y="458766"/>
+                  </a:lnTo>
+                  <a:lnTo>
+                    <a:pt x="2180679" y="468888"/>
+                  </a:lnTo>
+                  <a:lnTo>
+                    <a:pt x="2251023" y="478759"/>
+                  </a:lnTo>
+                  <a:lnTo>
+                    <a:pt x="2321368" y="488385"/>
+                  </a:lnTo>
+                  <a:lnTo>
+                    <a:pt x="2391712" y="497773"/>
+                  </a:lnTo>
+                  <a:lnTo>
+                    <a:pt x="2462057" y="506927"/>
+                  </a:lnTo>
+                  <a:lnTo>
+                    <a:pt x="2532401" y="515855"/>
+                  </a:lnTo>
+                  <a:lnTo>
+                    <a:pt x="2602746" y="524562"/>
+                  </a:lnTo>
+                  <a:lnTo>
+                    <a:pt x="2673090" y="533052"/>
+                  </a:lnTo>
+                  <a:lnTo>
+                    <a:pt x="2743435" y="541332"/>
+                  </a:lnTo>
+                  <a:lnTo>
+                    <a:pt x="2813779" y="549407"/>
+                  </a:lnTo>
+                  <a:lnTo>
+                    <a:pt x="2884124" y="557282"/>
+                  </a:lnTo>
+                  <a:lnTo>
+                    <a:pt x="2954468" y="564961"/>
+                  </a:lnTo>
+                  <a:lnTo>
+                    <a:pt x="3024813" y="568779"/>
+                  </a:lnTo>
+                  <a:lnTo>
+                    <a:pt x="3095157" y="570490"/>
+                  </a:lnTo>
+                  <a:lnTo>
+                    <a:pt x="3165502" y="572191"/>
+                  </a:lnTo>
+                  <a:lnTo>
+                    <a:pt x="3235846" y="573882"/>
+                  </a:lnTo>
+                  <a:lnTo>
+                    <a:pt x="3306191" y="575564"/>
+                  </a:lnTo>
+                  <a:lnTo>
+                    <a:pt x="3376535" y="577236"/>
+                  </a:lnTo>
+                  <a:lnTo>
+                    <a:pt x="3446880" y="578899"/>
+                  </a:lnTo>
+                  <a:lnTo>
+                    <a:pt x="3517224" y="580552"/>
+                  </a:lnTo>
+                  <a:lnTo>
+                    <a:pt x="3587569" y="582195"/>
+                  </a:lnTo>
+                  <a:lnTo>
+                    <a:pt x="3657913" y="583830"/>
+                  </a:lnTo>
+                  <a:lnTo>
+                    <a:pt x="3728257" y="585454"/>
+                  </a:lnTo>
+                  <a:lnTo>
+                    <a:pt x="3798602" y="587070"/>
+                  </a:lnTo>
+                  <a:lnTo>
+                    <a:pt x="3868946" y="588676"/>
+                  </a:lnTo>
+                  <a:lnTo>
+                    <a:pt x="3939291" y="590273"/>
+                  </a:lnTo>
+                  <a:lnTo>
+                    <a:pt x="4009635" y="591860"/>
+                  </a:lnTo>
+                  <a:lnTo>
+                    <a:pt x="4079980" y="593439"/>
+                  </a:lnTo>
+                  <a:lnTo>
+                    <a:pt x="4150324" y="595009"/>
+                  </a:lnTo>
+                  <a:lnTo>
+                    <a:pt x="4220669" y="596569"/>
+                  </a:lnTo>
+                  <a:lnTo>
+                    <a:pt x="4291013" y="598121"/>
+                  </a:lnTo>
+                  <a:lnTo>
+                    <a:pt x="4361358" y="599664"/>
+                  </a:lnTo>
+                  <a:lnTo>
+                    <a:pt x="4431702" y="601198"/>
+                  </a:lnTo>
+                  <a:lnTo>
+                    <a:pt x="4502047" y="602723"/>
+                  </a:lnTo>
+                  <a:lnTo>
+                    <a:pt x="4572391" y="604239"/>
+                  </a:lnTo>
+                  <a:lnTo>
+                    <a:pt x="4642736" y="605747"/>
+                  </a:lnTo>
+                  <a:lnTo>
+                    <a:pt x="4713080" y="607246"/>
+                  </a:lnTo>
+                  <a:lnTo>
+                    <a:pt x="4783425" y="608736"/>
+                  </a:lnTo>
+                  <a:lnTo>
+                    <a:pt x="4853769" y="610218"/>
+                  </a:lnTo>
+                  <a:lnTo>
+                    <a:pt x="4924114" y="611691"/>
+                  </a:lnTo>
+                  <a:lnTo>
+                    <a:pt x="4994458" y="613156"/>
+                  </a:lnTo>
+                  <a:lnTo>
+                    <a:pt x="5064803" y="614612"/>
+                  </a:lnTo>
+                  <a:lnTo>
+                    <a:pt x="5135147" y="616061"/>
+                  </a:lnTo>
+                  <a:lnTo>
+                    <a:pt x="5205492" y="617500"/>
+                  </a:lnTo>
+                  <a:lnTo>
+                    <a:pt x="5275836" y="618932"/>
+                  </a:lnTo>
+                  <a:lnTo>
+                    <a:pt x="5346181" y="620355"/>
+                  </a:lnTo>
+                  <a:lnTo>
+                    <a:pt x="5416525" y="621770"/>
+                  </a:lnTo>
+                  <a:lnTo>
+                    <a:pt x="5486870" y="623177"/>
+                  </a:lnTo>
+                  <a:lnTo>
+                    <a:pt x="5557214" y="624576"/>
+                  </a:lnTo>
+                  <a:lnTo>
+                    <a:pt x="5627559" y="625967"/>
+                  </a:lnTo>
+                  <a:lnTo>
+                    <a:pt x="5697903" y="627350"/>
+                  </a:lnTo>
+                  <a:lnTo>
+                    <a:pt x="5768248" y="628725"/>
+                  </a:lnTo>
+                  <a:lnTo>
+                    <a:pt x="5838592" y="630093"/>
+                  </a:lnTo>
+                  <a:lnTo>
+                    <a:pt x="5908937" y="631452"/>
+                  </a:lnTo>
+                  <a:lnTo>
+                    <a:pt x="5979281" y="632803"/>
+                  </a:lnTo>
+                  <a:lnTo>
+                    <a:pt x="6049626" y="634147"/>
+                  </a:lnTo>
+                  <a:lnTo>
+                    <a:pt x="6119970" y="635483"/>
+                  </a:lnTo>
+                  <a:lnTo>
+                    <a:pt x="6190315" y="636812"/>
+                  </a:lnTo>
+                  <a:lnTo>
+                    <a:pt x="6260659" y="638132"/>
+                  </a:lnTo>
+                  <a:lnTo>
+                    <a:pt x="6331004" y="639445"/>
+                  </a:lnTo>
+                  <a:lnTo>
+                    <a:pt x="6401348" y="640751"/>
+                  </a:lnTo>
+                  <a:lnTo>
+                    <a:pt x="6471693" y="642049"/>
+                  </a:lnTo>
+                  <a:lnTo>
+                    <a:pt x="6542037" y="643340"/>
+                  </a:lnTo>
+                  <a:lnTo>
+                    <a:pt x="6612382" y="644623"/>
+                  </a:lnTo>
+                  <a:lnTo>
+                    <a:pt x="6682726" y="645899"/>
+                  </a:lnTo>
+                  <a:lnTo>
+                    <a:pt x="6753071" y="647168"/>
+                  </a:lnTo>
+                  <a:lnTo>
+                    <a:pt x="6823415" y="648429"/>
+                  </a:lnTo>
+                  <a:lnTo>
+                    <a:pt x="6893760" y="649683"/>
+                  </a:lnTo>
+                  <a:lnTo>
+                    <a:pt x="6964104" y="650930"/>
                   </a:lnTo>
                 </a:path>
               </a:pathLst>
@@ -4326,312 +4036,637 @@
           </p:nvSpPr>
           <p:spPr>
             <a:xfrm>
-              <a:off x="1172049" y="3962625"/>
-              <a:ext cx="7090630" cy="1248492"/>
+              <a:off x="1235312" y="3018342"/>
+              <a:ext cx="6964104" cy="309744"/>
             </a:xfrm>
             <a:custGeom>
               <a:avLst/>
               <a:pathLst>
-                <a:path w="7090630" h="1248492">
+                <a:path w="6964104" h="309744">
+                  <a:moveTo>
+                    <a:pt x="6964104" y="309744"/>
+                  </a:moveTo>
+                  <a:lnTo>
+                    <a:pt x="6893760" y="307908"/>
+                  </a:lnTo>
+                  <a:lnTo>
+                    <a:pt x="6823415" y="306025"/>
+                  </a:lnTo>
+                  <a:lnTo>
+                    <a:pt x="6753071" y="304095"/>
+                  </a:lnTo>
+                  <a:lnTo>
+                    <a:pt x="6682726" y="302116"/>
+                  </a:lnTo>
+                  <a:lnTo>
+                    <a:pt x="6612382" y="300086"/>
+                  </a:lnTo>
+                  <a:lnTo>
+                    <a:pt x="6542037" y="298005"/>
+                  </a:lnTo>
+                  <a:lnTo>
+                    <a:pt x="6471693" y="295870"/>
+                  </a:lnTo>
+                  <a:lnTo>
+                    <a:pt x="6401348" y="293682"/>
+                  </a:lnTo>
+                  <a:lnTo>
+                    <a:pt x="6331004" y="291438"/>
+                  </a:lnTo>
+                  <a:lnTo>
+                    <a:pt x="6260659" y="289136"/>
+                  </a:lnTo>
+                  <a:lnTo>
+                    <a:pt x="6190315" y="286777"/>
+                  </a:lnTo>
+                  <a:lnTo>
+                    <a:pt x="6119970" y="284357"/>
+                  </a:lnTo>
+                  <a:lnTo>
+                    <a:pt x="6049626" y="281876"/>
+                  </a:lnTo>
+                  <a:lnTo>
+                    <a:pt x="5979281" y="279331"/>
+                  </a:lnTo>
+                  <a:lnTo>
+                    <a:pt x="5908937" y="276722"/>
+                  </a:lnTo>
+                  <a:lnTo>
+                    <a:pt x="5838592" y="274047"/>
+                  </a:lnTo>
+                  <a:lnTo>
+                    <a:pt x="5768248" y="271304"/>
+                  </a:lnTo>
+                  <a:lnTo>
+                    <a:pt x="5697903" y="268491"/>
+                  </a:lnTo>
+                  <a:lnTo>
+                    <a:pt x="5627559" y="265606"/>
+                  </a:lnTo>
+                  <a:lnTo>
+                    <a:pt x="5557214" y="262648"/>
+                  </a:lnTo>
+                  <a:lnTo>
+                    <a:pt x="5486870" y="259615"/>
+                  </a:lnTo>
+                  <a:lnTo>
+                    <a:pt x="5416525" y="256505"/>
+                  </a:lnTo>
+                  <a:lnTo>
+                    <a:pt x="5346181" y="253315"/>
+                  </a:lnTo>
+                  <a:lnTo>
+                    <a:pt x="5275836" y="250045"/>
+                  </a:lnTo>
+                  <a:lnTo>
+                    <a:pt x="5205492" y="246691"/>
+                  </a:lnTo>
+                  <a:lnTo>
+                    <a:pt x="5135147" y="243252"/>
+                  </a:lnTo>
+                  <a:lnTo>
+                    <a:pt x="5064803" y="239726"/>
+                  </a:lnTo>
+                  <a:lnTo>
+                    <a:pt x="4994458" y="236110"/>
+                  </a:lnTo>
+                  <a:lnTo>
+                    <a:pt x="4924114" y="232402"/>
+                  </a:lnTo>
+                  <a:lnTo>
+                    <a:pt x="4853769" y="228600"/>
+                  </a:lnTo>
+                  <a:lnTo>
+                    <a:pt x="4783425" y="224701"/>
+                  </a:lnTo>
+                  <a:lnTo>
+                    <a:pt x="4713080" y="220704"/>
+                  </a:lnTo>
+                  <a:lnTo>
+                    <a:pt x="4642736" y="216604"/>
+                  </a:lnTo>
+                  <a:lnTo>
+                    <a:pt x="4572391" y="212400"/>
+                  </a:lnTo>
+                  <a:lnTo>
+                    <a:pt x="4502047" y="208090"/>
+                  </a:lnTo>
+                  <a:lnTo>
+                    <a:pt x="4431702" y="203669"/>
+                  </a:lnTo>
+                  <a:lnTo>
+                    <a:pt x="4361358" y="199137"/>
+                  </a:lnTo>
+                  <a:lnTo>
+                    <a:pt x="4291013" y="194489"/>
+                  </a:lnTo>
+                  <a:lnTo>
+                    <a:pt x="4220669" y="189723"/>
+                  </a:lnTo>
+                  <a:lnTo>
+                    <a:pt x="4150324" y="184836"/>
+                  </a:lnTo>
+                  <a:lnTo>
+                    <a:pt x="4079980" y="179824"/>
+                  </a:lnTo>
+                  <a:lnTo>
+                    <a:pt x="4009635" y="174685"/>
+                  </a:lnTo>
+                  <a:lnTo>
+                    <a:pt x="3939291" y="169416"/>
+                  </a:lnTo>
+                  <a:lnTo>
+                    <a:pt x="3868946" y="164012"/>
+                  </a:lnTo>
+                  <a:lnTo>
+                    <a:pt x="3798602" y="158471"/>
+                  </a:lnTo>
+                  <a:lnTo>
+                    <a:pt x="3728257" y="152790"/>
+                  </a:lnTo>
+                  <a:lnTo>
+                    <a:pt x="3657913" y="146963"/>
+                  </a:lnTo>
+                  <a:lnTo>
+                    <a:pt x="3587569" y="140989"/>
+                  </a:lnTo>
+                  <a:lnTo>
+                    <a:pt x="3517224" y="134863"/>
+                  </a:lnTo>
+                  <a:lnTo>
+                    <a:pt x="3446880" y="128581"/>
+                  </a:lnTo>
+                  <a:lnTo>
+                    <a:pt x="3376535" y="122139"/>
+                  </a:lnTo>
+                  <a:lnTo>
+                    <a:pt x="3306191" y="115534"/>
+                  </a:lnTo>
+                  <a:lnTo>
+                    <a:pt x="3235846" y="108760"/>
+                  </a:lnTo>
+                  <a:lnTo>
+                    <a:pt x="3165502" y="101815"/>
+                  </a:lnTo>
+                  <a:lnTo>
+                    <a:pt x="3095157" y="94693"/>
+                  </a:lnTo>
+                  <a:lnTo>
+                    <a:pt x="3024813" y="87389"/>
+                  </a:lnTo>
+                  <a:lnTo>
+                    <a:pt x="2954468" y="81997"/>
+                  </a:lnTo>
+                  <a:lnTo>
+                    <a:pt x="2884124" y="80266"/>
+                  </a:lnTo>
+                  <a:lnTo>
+                    <a:pt x="2813779" y="78525"/>
+                  </a:lnTo>
+                  <a:lnTo>
+                    <a:pt x="2743435" y="76774"/>
+                  </a:lnTo>
+                  <a:lnTo>
+                    <a:pt x="2673090" y="75013"/>
+                  </a:lnTo>
+                  <a:lnTo>
+                    <a:pt x="2602746" y="73242"/>
+                  </a:lnTo>
+                  <a:lnTo>
+                    <a:pt x="2532401" y="71461"/>
+                  </a:lnTo>
+                  <a:lnTo>
+                    <a:pt x="2462057" y="69669"/>
+                  </a:lnTo>
+                  <a:lnTo>
+                    <a:pt x="2391712" y="67867"/>
+                  </a:lnTo>
+                  <a:lnTo>
+                    <a:pt x="2321368" y="66055"/>
+                  </a:lnTo>
+                  <a:lnTo>
+                    <a:pt x="2251023" y="64232"/>
+                  </a:lnTo>
+                  <a:lnTo>
+                    <a:pt x="2180679" y="62398"/>
+                  </a:lnTo>
+                  <a:lnTo>
+                    <a:pt x="2110334" y="60554"/>
+                  </a:lnTo>
+                  <a:lnTo>
+                    <a:pt x="2039990" y="58700"/>
+                  </a:lnTo>
+                  <a:lnTo>
+                    <a:pt x="1969645" y="56834"/>
+                  </a:lnTo>
+                  <a:lnTo>
+                    <a:pt x="1899301" y="54958"/>
+                  </a:lnTo>
+                  <a:lnTo>
+                    <a:pt x="1828956" y="53071"/>
+                  </a:lnTo>
+                  <a:lnTo>
+                    <a:pt x="1758612" y="51174"/>
+                  </a:lnTo>
+                  <a:lnTo>
+                    <a:pt x="1688267" y="49265"/>
+                  </a:lnTo>
+                  <a:lnTo>
+                    <a:pt x="1617923" y="47345"/>
+                  </a:lnTo>
+                  <a:lnTo>
+                    <a:pt x="1547578" y="45414"/>
+                  </a:lnTo>
+                  <a:lnTo>
+                    <a:pt x="1477234" y="43472"/>
+                  </a:lnTo>
+                  <a:lnTo>
+                    <a:pt x="1406889" y="41519"/>
+                  </a:lnTo>
+                  <a:lnTo>
+                    <a:pt x="1336545" y="39555"/>
+                  </a:lnTo>
+                  <a:lnTo>
+                    <a:pt x="1266200" y="37579"/>
+                  </a:lnTo>
+                  <a:lnTo>
+                    <a:pt x="1195856" y="35592"/>
+                  </a:lnTo>
+                  <a:lnTo>
+                    <a:pt x="1125511" y="33593"/>
+                  </a:lnTo>
+                  <a:lnTo>
+                    <a:pt x="1055167" y="31583"/>
+                  </a:lnTo>
+                  <a:lnTo>
+                    <a:pt x="984822" y="29561"/>
+                  </a:lnTo>
+                  <a:lnTo>
+                    <a:pt x="914478" y="27527"/>
+                  </a:lnTo>
+                  <a:lnTo>
+                    <a:pt x="844133" y="25482"/>
+                  </a:lnTo>
+                  <a:lnTo>
+                    <a:pt x="773789" y="23425"/>
+                  </a:lnTo>
+                  <a:lnTo>
+                    <a:pt x="703444" y="21356"/>
+                  </a:lnTo>
+                  <a:lnTo>
+                    <a:pt x="633100" y="19276"/>
+                  </a:lnTo>
+                  <a:lnTo>
+                    <a:pt x="562755" y="17183"/>
+                  </a:lnTo>
+                  <a:lnTo>
+                    <a:pt x="492411" y="15078"/>
+                  </a:lnTo>
+                  <a:lnTo>
+                    <a:pt x="422066" y="12961"/>
+                  </a:lnTo>
+                  <a:lnTo>
+                    <a:pt x="351722" y="10832"/>
+                  </a:lnTo>
+                  <a:lnTo>
+                    <a:pt x="281377" y="8690"/>
+                  </a:lnTo>
+                  <a:lnTo>
+                    <a:pt x="211033" y="6536"/>
+                  </a:lnTo>
+                  <a:lnTo>
+                    <a:pt x="140688" y="4370"/>
+                  </a:lnTo>
+                  <a:lnTo>
+                    <a:pt x="70344" y="2191"/>
+                  </a:lnTo>
+                  <a:lnTo>
+                    <a:pt x="0" y="0"/>
+                  </a:lnTo>
+                </a:path>
+              </a:pathLst>
+            </a:custGeom>
+          </p:spPr>
+          <p:txBody>
+            <a:bodyPr/>
+            <a:lstStyle/>
+            <a:p/>
+          </p:txBody>
+        </p:sp>
+        <p:sp>
+          <p:nvSpPr>
+            <p:cNvPr id="26" name="pl26"/>
+            <p:cNvSpPr/>
+            <p:nvPr/>
+          </p:nvSpPr>
+          <p:spPr>
+            <a:xfrm>
+              <a:off x="1235312" y="2824831"/>
+              <a:ext cx="6964104" cy="450551"/>
+            </a:xfrm>
+            <a:custGeom>
+              <a:avLst/>
+              <a:pathLst>
+                <a:path w="6964104" h="450551">
                   <a:moveTo>
                     <a:pt x="0" y="0"/>
                   </a:moveTo>
                   <a:lnTo>
-                    <a:pt x="71622" y="24416"/>
-                  </a:lnTo>
-                  <a:lnTo>
-                    <a:pt x="143245" y="48458"/>
-                  </a:lnTo>
-                  <a:lnTo>
-                    <a:pt x="214867" y="72132"/>
-                  </a:lnTo>
-                  <a:lnTo>
-                    <a:pt x="286490" y="95444"/>
-                  </a:lnTo>
-                  <a:lnTo>
-                    <a:pt x="358112" y="118399"/>
-                  </a:lnTo>
-                  <a:lnTo>
-                    <a:pt x="429735" y="141002"/>
-                  </a:lnTo>
-                  <a:lnTo>
-                    <a:pt x="501357" y="163260"/>
-                  </a:lnTo>
-                  <a:lnTo>
-                    <a:pt x="572980" y="185176"/>
-                  </a:lnTo>
-                  <a:lnTo>
-                    <a:pt x="644602" y="206757"/>
-                  </a:lnTo>
-                  <a:lnTo>
-                    <a:pt x="716225" y="228007"/>
-                  </a:lnTo>
-                  <a:lnTo>
-                    <a:pt x="787847" y="248932"/>
-                  </a:lnTo>
-                  <a:lnTo>
-                    <a:pt x="859470" y="269537"/>
-                  </a:lnTo>
-                  <a:lnTo>
-                    <a:pt x="931092" y="289826"/>
-                  </a:lnTo>
-                  <a:lnTo>
-                    <a:pt x="1002715" y="309805"/>
-                  </a:lnTo>
-                  <a:lnTo>
-                    <a:pt x="1074337" y="329477"/>
-                  </a:lnTo>
-                  <a:lnTo>
-                    <a:pt x="1145960" y="348849"/>
-                  </a:lnTo>
-                  <a:lnTo>
-                    <a:pt x="1217582" y="367924"/>
-                  </a:lnTo>
-                  <a:lnTo>
-                    <a:pt x="1289205" y="386706"/>
-                  </a:lnTo>
-                  <a:lnTo>
-                    <a:pt x="1360827" y="405201"/>
-                  </a:lnTo>
-                  <a:lnTo>
-                    <a:pt x="1432450" y="423413"/>
-                  </a:lnTo>
-                  <a:lnTo>
-                    <a:pt x="1504073" y="441347"/>
-                  </a:lnTo>
-                  <a:lnTo>
-                    <a:pt x="1575695" y="459005"/>
-                  </a:lnTo>
-                  <a:lnTo>
-                    <a:pt x="1647318" y="476393"/>
-                  </a:lnTo>
-                  <a:lnTo>
-                    <a:pt x="1718940" y="493515"/>
-                  </a:lnTo>
-                  <a:lnTo>
-                    <a:pt x="1790563" y="510375"/>
-                  </a:lnTo>
-                  <a:lnTo>
-                    <a:pt x="1862185" y="526976"/>
-                  </a:lnTo>
-                  <a:lnTo>
-                    <a:pt x="1933808" y="543324"/>
-                  </a:lnTo>
-                  <a:lnTo>
-                    <a:pt x="2005430" y="559421"/>
-                  </a:lnTo>
-                  <a:lnTo>
-                    <a:pt x="2077053" y="575271"/>
-                  </a:lnTo>
-                  <a:lnTo>
-                    <a:pt x="2148675" y="590879"/>
-                  </a:lnTo>
-                  <a:lnTo>
-                    <a:pt x="2220298" y="606248"/>
-                  </a:lnTo>
-                  <a:lnTo>
-                    <a:pt x="2291920" y="621382"/>
-                  </a:lnTo>
-                  <a:lnTo>
-                    <a:pt x="2363543" y="636284"/>
-                  </a:lnTo>
-                  <a:lnTo>
-                    <a:pt x="2435165" y="650957"/>
-                  </a:lnTo>
-                  <a:lnTo>
-                    <a:pt x="2506788" y="665407"/>
-                  </a:lnTo>
-                  <a:lnTo>
-                    <a:pt x="2578410" y="679634"/>
-                  </a:lnTo>
-                  <a:lnTo>
-                    <a:pt x="2650033" y="693644"/>
-                  </a:lnTo>
-                  <a:lnTo>
-                    <a:pt x="2721655" y="707440"/>
-                  </a:lnTo>
-                  <a:lnTo>
-                    <a:pt x="2793278" y="721024"/>
-                  </a:lnTo>
-                  <a:lnTo>
-                    <a:pt x="2864901" y="734400"/>
-                  </a:lnTo>
-                  <a:lnTo>
-                    <a:pt x="2936523" y="747571"/>
-                  </a:lnTo>
-                  <a:lnTo>
-                    <a:pt x="3008146" y="760541"/>
-                  </a:lnTo>
-                  <a:lnTo>
-                    <a:pt x="3079768" y="773312"/>
-                  </a:lnTo>
-                  <a:lnTo>
-                    <a:pt x="3151391" y="785888"/>
-                  </a:lnTo>
-                  <a:lnTo>
-                    <a:pt x="3223013" y="798271"/>
-                  </a:lnTo>
-                  <a:lnTo>
-                    <a:pt x="3294636" y="810464"/>
-                  </a:lnTo>
-                  <a:lnTo>
-                    <a:pt x="3366258" y="822471"/>
-                  </a:lnTo>
-                  <a:lnTo>
-                    <a:pt x="3437881" y="834294"/>
-                  </a:lnTo>
-                  <a:lnTo>
-                    <a:pt x="3509503" y="845936"/>
-                  </a:lnTo>
-                  <a:lnTo>
-                    <a:pt x="3581126" y="857399"/>
-                  </a:lnTo>
-                  <a:lnTo>
-                    <a:pt x="3652748" y="868688"/>
-                  </a:lnTo>
-                  <a:lnTo>
-                    <a:pt x="3724371" y="879803"/>
-                  </a:lnTo>
-                  <a:lnTo>
-                    <a:pt x="3795993" y="890748"/>
-                  </a:lnTo>
-                  <a:lnTo>
-                    <a:pt x="3867616" y="901525"/>
-                  </a:lnTo>
-                  <a:lnTo>
-                    <a:pt x="3939238" y="912138"/>
-                  </a:lnTo>
-                  <a:lnTo>
-                    <a:pt x="4010861" y="922588"/>
-                  </a:lnTo>
-                  <a:lnTo>
-                    <a:pt x="4082483" y="932878"/>
-                  </a:lnTo>
-                  <a:lnTo>
-                    <a:pt x="4154106" y="943010"/>
-                  </a:lnTo>
-                  <a:lnTo>
-                    <a:pt x="4225729" y="952987"/>
-                  </a:lnTo>
-                  <a:lnTo>
-                    <a:pt x="4297351" y="962812"/>
-                  </a:lnTo>
-                  <a:lnTo>
-                    <a:pt x="4368974" y="972486"/>
-                  </a:lnTo>
-                  <a:lnTo>
-                    <a:pt x="4440596" y="982012"/>
-                  </a:lnTo>
-                  <a:lnTo>
-                    <a:pt x="4512219" y="991392"/>
-                  </a:lnTo>
-                  <a:lnTo>
-                    <a:pt x="4583841" y="1000628"/>
-                  </a:lnTo>
-                  <a:lnTo>
-                    <a:pt x="4655464" y="1009723"/>
-                  </a:lnTo>
-                  <a:lnTo>
-                    <a:pt x="4727086" y="1018679"/>
-                  </a:lnTo>
-                  <a:lnTo>
-                    <a:pt x="4798709" y="1027498"/>
-                  </a:lnTo>
-                  <a:lnTo>
-                    <a:pt x="4870331" y="1036181"/>
-                  </a:lnTo>
-                  <a:lnTo>
-                    <a:pt x="4941954" y="1044732"/>
-                  </a:lnTo>
-                  <a:lnTo>
-                    <a:pt x="5013576" y="1053152"/>
-                  </a:lnTo>
-                  <a:lnTo>
-                    <a:pt x="5085199" y="1061442"/>
-                  </a:lnTo>
-                  <a:lnTo>
-                    <a:pt x="5156821" y="1069606"/>
-                  </a:lnTo>
-                  <a:lnTo>
-                    <a:pt x="5228444" y="1077645"/>
-                  </a:lnTo>
-                  <a:lnTo>
-                    <a:pt x="5300066" y="1085561"/>
-                  </a:lnTo>
-                  <a:lnTo>
-                    <a:pt x="5371689" y="1093356"/>
-                  </a:lnTo>
-                  <a:lnTo>
-                    <a:pt x="5443311" y="1101031"/>
-                  </a:lnTo>
-                  <a:lnTo>
-                    <a:pt x="5514934" y="1108588"/>
-                  </a:lnTo>
-                  <a:lnTo>
-                    <a:pt x="5586557" y="1116030"/>
-                  </a:lnTo>
-                  <a:lnTo>
-                    <a:pt x="5658179" y="1123358"/>
-                  </a:lnTo>
-                  <a:lnTo>
-                    <a:pt x="5729802" y="1130574"/>
-                  </a:lnTo>
-                  <a:lnTo>
-                    <a:pt x="5801424" y="1137680"/>
-                  </a:lnTo>
-                  <a:lnTo>
-                    <a:pt x="5873047" y="1144676"/>
-                  </a:lnTo>
-                  <a:lnTo>
-                    <a:pt x="5944669" y="1151566"/>
-                  </a:lnTo>
-                  <a:lnTo>
-                    <a:pt x="6016292" y="1158350"/>
-                  </a:lnTo>
-                  <a:lnTo>
-                    <a:pt x="6087914" y="1165030"/>
-                  </a:lnTo>
-                  <a:lnTo>
-                    <a:pt x="6159537" y="1171607"/>
-                  </a:lnTo>
-                  <a:lnTo>
-                    <a:pt x="6231159" y="1178084"/>
-                  </a:lnTo>
-                  <a:lnTo>
-                    <a:pt x="6302782" y="1184462"/>
-                  </a:lnTo>
-                  <a:lnTo>
-                    <a:pt x="6374404" y="1190743"/>
-                  </a:lnTo>
-                  <a:lnTo>
-                    <a:pt x="6446027" y="1196927"/>
-                  </a:lnTo>
-                  <a:lnTo>
-                    <a:pt x="6517649" y="1203016"/>
-                  </a:lnTo>
-                  <a:lnTo>
-                    <a:pt x="6589272" y="1209012"/>
-                  </a:lnTo>
-                  <a:lnTo>
-                    <a:pt x="6660894" y="1214916"/>
-                  </a:lnTo>
-                  <a:lnTo>
-                    <a:pt x="6732517" y="1220730"/>
-                  </a:lnTo>
-                  <a:lnTo>
-                    <a:pt x="6804139" y="1226455"/>
-                  </a:lnTo>
-                  <a:lnTo>
-                    <a:pt x="6875762" y="1232093"/>
-                  </a:lnTo>
-                  <a:lnTo>
-                    <a:pt x="6947385" y="1237643"/>
-                  </a:lnTo>
-                  <a:lnTo>
-                    <a:pt x="7019007" y="1243109"/>
-                  </a:lnTo>
-                  <a:lnTo>
-                    <a:pt x="7090630" y="1248492"/>
+                    <a:pt x="70344" y="8811"/>
+                  </a:lnTo>
+                  <a:lnTo>
+                    <a:pt x="140688" y="17487"/>
+                  </a:lnTo>
+                  <a:lnTo>
+                    <a:pt x="211033" y="26031"/>
+                  </a:lnTo>
+                  <a:lnTo>
+                    <a:pt x="281377" y="34443"/>
+                  </a:lnTo>
+                  <a:lnTo>
+                    <a:pt x="351722" y="42727"/>
+                  </a:lnTo>
+                  <a:lnTo>
+                    <a:pt x="422066" y="50884"/>
+                  </a:lnTo>
+                  <a:lnTo>
+                    <a:pt x="492411" y="58916"/>
+                  </a:lnTo>
+                  <a:lnTo>
+                    <a:pt x="562755" y="66825"/>
+                  </a:lnTo>
+                  <a:lnTo>
+                    <a:pt x="633100" y="74613"/>
+                  </a:lnTo>
+                  <a:lnTo>
+                    <a:pt x="703444" y="82282"/>
+                  </a:lnTo>
+                  <a:lnTo>
+                    <a:pt x="773789" y="89834"/>
+                  </a:lnTo>
+                  <a:lnTo>
+                    <a:pt x="844133" y="97269"/>
+                  </a:lnTo>
+                  <a:lnTo>
+                    <a:pt x="914478" y="104591"/>
+                  </a:lnTo>
+                  <a:lnTo>
+                    <a:pt x="984822" y="111801"/>
+                  </a:lnTo>
+                  <a:lnTo>
+                    <a:pt x="1055167" y="118900"/>
+                  </a:lnTo>
+                  <a:lnTo>
+                    <a:pt x="1125511" y="125891"/>
+                  </a:lnTo>
+                  <a:lnTo>
+                    <a:pt x="1195856" y="132775"/>
+                  </a:lnTo>
+                  <a:lnTo>
+                    <a:pt x="1266200" y="139553"/>
+                  </a:lnTo>
+                  <a:lnTo>
+                    <a:pt x="1336545" y="146227"/>
+                  </a:lnTo>
+                  <a:lnTo>
+                    <a:pt x="1406889" y="152800"/>
+                  </a:lnTo>
+                  <a:lnTo>
+                    <a:pt x="1477234" y="159271"/>
+                  </a:lnTo>
+                  <a:lnTo>
+                    <a:pt x="1547578" y="165644"/>
+                  </a:lnTo>
+                  <a:lnTo>
+                    <a:pt x="1617923" y="171919"/>
+                  </a:lnTo>
+                  <a:lnTo>
+                    <a:pt x="1688267" y="178098"/>
+                  </a:lnTo>
+                  <a:lnTo>
+                    <a:pt x="1758612" y="184182"/>
+                  </a:lnTo>
+                  <a:lnTo>
+                    <a:pt x="1828956" y="190173"/>
+                  </a:lnTo>
+                  <a:lnTo>
+                    <a:pt x="1899301" y="196072"/>
+                  </a:lnTo>
+                  <a:lnTo>
+                    <a:pt x="1969645" y="201881"/>
+                  </a:lnTo>
+                  <a:lnTo>
+                    <a:pt x="2039990" y="207602"/>
+                  </a:lnTo>
+                  <a:lnTo>
+                    <a:pt x="2110334" y="213234"/>
+                  </a:lnTo>
+                  <a:lnTo>
+                    <a:pt x="2180679" y="218780"/>
+                  </a:lnTo>
+                  <a:lnTo>
+                    <a:pt x="2251023" y="224242"/>
+                  </a:lnTo>
+                  <a:lnTo>
+                    <a:pt x="2321368" y="229620"/>
+                  </a:lnTo>
+                  <a:lnTo>
+                    <a:pt x="2391712" y="234915"/>
+                  </a:lnTo>
+                  <a:lnTo>
+                    <a:pt x="2462057" y="240129"/>
+                  </a:lnTo>
+                  <a:lnTo>
+                    <a:pt x="2532401" y="245264"/>
+                  </a:lnTo>
+                  <a:lnTo>
+                    <a:pt x="2602746" y="250320"/>
+                  </a:lnTo>
+                  <a:lnTo>
+                    <a:pt x="2673090" y="255298"/>
+                  </a:lnTo>
+                  <a:lnTo>
+                    <a:pt x="2743435" y="260200"/>
+                  </a:lnTo>
+                  <a:lnTo>
+                    <a:pt x="2813779" y="265027"/>
+                  </a:lnTo>
+                  <a:lnTo>
+                    <a:pt x="2884124" y="269781"/>
+                  </a:lnTo>
+                  <a:lnTo>
+                    <a:pt x="2954468" y="274461"/>
+                  </a:lnTo>
+                  <a:lnTo>
+                    <a:pt x="3024813" y="279070"/>
+                  </a:lnTo>
+                  <a:lnTo>
+                    <a:pt x="3095157" y="283608"/>
+                  </a:lnTo>
+                  <a:lnTo>
+                    <a:pt x="3165502" y="288077"/>
+                  </a:lnTo>
+                  <a:lnTo>
+                    <a:pt x="3235846" y="292477"/>
+                  </a:lnTo>
+                  <a:lnTo>
+                    <a:pt x="3306191" y="296810"/>
+                  </a:lnTo>
+                  <a:lnTo>
+                    <a:pt x="3376535" y="301077"/>
+                  </a:lnTo>
+                  <a:lnTo>
+                    <a:pt x="3446880" y="305278"/>
+                  </a:lnTo>
+                  <a:lnTo>
+                    <a:pt x="3517224" y="309415"/>
+                  </a:lnTo>
+                  <a:lnTo>
+                    <a:pt x="3587569" y="313489"/>
+                  </a:lnTo>
+                  <a:lnTo>
+                    <a:pt x="3657913" y="317500"/>
+                  </a:lnTo>
+                  <a:lnTo>
+                    <a:pt x="3728257" y="321450"/>
+                  </a:lnTo>
+                  <a:lnTo>
+                    <a:pt x="3798602" y="325339"/>
+                  </a:lnTo>
+                  <a:lnTo>
+                    <a:pt x="3868946" y="329169"/>
+                  </a:lnTo>
+                  <a:lnTo>
+                    <a:pt x="3939291" y="332940"/>
+                  </a:lnTo>
+                  <a:lnTo>
+                    <a:pt x="4009635" y="336653"/>
+                  </a:lnTo>
+                  <a:lnTo>
+                    <a:pt x="4079980" y="340310"/>
+                  </a:lnTo>
+                  <a:lnTo>
+                    <a:pt x="4150324" y="343910"/>
+                  </a:lnTo>
+                  <a:lnTo>
+                    <a:pt x="4220669" y="347456"/>
+                  </a:lnTo>
+                  <a:lnTo>
+                    <a:pt x="4291013" y="350947"/>
+                  </a:lnTo>
+                  <a:lnTo>
+                    <a:pt x="4361358" y="354385"/>
+                  </a:lnTo>
+                  <a:lnTo>
+                    <a:pt x="4431702" y="357770"/>
+                  </a:lnTo>
+                  <a:lnTo>
+                    <a:pt x="4502047" y="361103"/>
+                  </a:lnTo>
+                  <a:lnTo>
+                    <a:pt x="4572391" y="364385"/>
+                  </a:lnTo>
+                  <a:lnTo>
+                    <a:pt x="4642736" y="367617"/>
+                  </a:lnTo>
+                  <a:lnTo>
+                    <a:pt x="4713080" y="370799"/>
+                  </a:lnTo>
+                  <a:lnTo>
+                    <a:pt x="4783425" y="373933"/>
+                  </a:lnTo>
+                  <a:lnTo>
+                    <a:pt x="4853769" y="377019"/>
+                  </a:lnTo>
+                  <a:lnTo>
+                    <a:pt x="4924114" y="380057"/>
+                  </a:lnTo>
+                  <a:lnTo>
+                    <a:pt x="4994458" y="383049"/>
+                  </a:lnTo>
+                  <a:lnTo>
+                    <a:pt x="5064803" y="385995"/>
+                  </a:lnTo>
+                  <a:lnTo>
+                    <a:pt x="5135147" y="388896"/>
+                  </a:lnTo>
+                  <a:lnTo>
+                    <a:pt x="5205492" y="391753"/>
+                  </a:lnTo>
+                  <a:lnTo>
+                    <a:pt x="5275836" y="394566"/>
+                  </a:lnTo>
+                  <a:lnTo>
+                    <a:pt x="5346181" y="397336"/>
+                  </a:lnTo>
+                  <a:lnTo>
+                    <a:pt x="5416525" y="400063"/>
+                  </a:lnTo>
+                  <a:lnTo>
+                    <a:pt x="5486870" y="402749"/>
+                  </a:lnTo>
+                  <a:lnTo>
+                    <a:pt x="5557214" y="405393"/>
+                  </a:lnTo>
+                  <a:lnTo>
+                    <a:pt x="5627559" y="407997"/>
+                  </a:lnTo>
+                  <a:lnTo>
+                    <a:pt x="5697903" y="410561"/>
+                  </a:lnTo>
+                  <a:lnTo>
+                    <a:pt x="5768248" y="413086"/>
+                  </a:lnTo>
+                  <a:lnTo>
+                    <a:pt x="5838592" y="415573"/>
+                  </a:lnTo>
+                  <a:lnTo>
+                    <a:pt x="5908937" y="418021"/>
+                  </a:lnTo>
+                  <a:lnTo>
+                    <a:pt x="5979281" y="420431"/>
+                  </a:lnTo>
+                  <a:lnTo>
+                    <a:pt x="6049626" y="422805"/>
+                  </a:lnTo>
+                  <a:lnTo>
+                    <a:pt x="6119970" y="425143"/>
+                  </a:lnTo>
+                  <a:lnTo>
+                    <a:pt x="6190315" y="427444"/>
+                  </a:lnTo>
+                  <a:lnTo>
+                    <a:pt x="6260659" y="429711"/>
+                  </a:lnTo>
+                  <a:lnTo>
+                    <a:pt x="6331004" y="431942"/>
+                  </a:lnTo>
+                  <a:lnTo>
+                    <a:pt x="6401348" y="434140"/>
+                  </a:lnTo>
+                  <a:lnTo>
+                    <a:pt x="6471693" y="436304"/>
+                  </a:lnTo>
+                  <a:lnTo>
+                    <a:pt x="6542037" y="438434"/>
+                  </a:lnTo>
+                  <a:lnTo>
+                    <a:pt x="6612382" y="440533"/>
+                  </a:lnTo>
+                  <a:lnTo>
+                    <a:pt x="6682726" y="442599"/>
+                  </a:lnTo>
+                  <a:lnTo>
+                    <a:pt x="6753071" y="444633"/>
+                  </a:lnTo>
+                  <a:lnTo>
+                    <a:pt x="6823415" y="446636"/>
+                  </a:lnTo>
+                  <a:lnTo>
+                    <a:pt x="6893760" y="448609"/>
+                  </a:lnTo>
+                  <a:lnTo>
+                    <a:pt x="6964104" y="450551"/>
                   </a:lnTo>
                 </a:path>
               </a:pathLst>
@@ -4654,27 +4689,27 @@
         </p:sp>
         <p:sp>
           <p:nvSpPr>
-            <p:cNvPr id="26" name="pl26"/>
+            <p:cNvPr id="27" name="pl27"/>
             <p:cNvSpPr/>
             <p:nvPr/>
           </p:nvSpPr>
           <p:spPr>
             <a:xfrm>
-              <a:off x="817517" y="4727786"/>
-              <a:ext cx="7799693" cy="0"/>
+              <a:off x="887106" y="3100960"/>
+              <a:ext cx="7660515" cy="0"/>
             </a:xfrm>
             <a:custGeom>
               <a:avLst/>
               <a:pathLst>
-                <a:path w="7799693" h="0">
+                <a:path w="7660515" h="0">
                   <a:moveTo>
                     <a:pt x="0" y="0"/>
                   </a:moveTo>
                   <a:lnTo>
-                    <a:pt x="7799693" y="0"/>
-                  </a:lnTo>
-                  <a:lnTo>
-                    <a:pt x="7799693" y="0"/>
+                    <a:pt x="7660515" y="0"/>
+                  </a:lnTo>
+                  <a:lnTo>
+                    <a:pt x="7660515" y="0"/>
                   </a:lnTo>
                 </a:path>
               </a:pathLst>
@@ -4697,21 +4732,21 @@
         </p:sp>
         <p:sp>
           <p:nvSpPr>
-            <p:cNvPr id="27" name="pl27"/>
+            <p:cNvPr id="28" name="pl28"/>
             <p:cNvSpPr/>
             <p:nvPr/>
           </p:nvSpPr>
           <p:spPr>
             <a:xfrm>
-              <a:off x="4205975" y="2073503"/>
-              <a:ext cx="0" cy="3649639"/>
+              <a:off x="4215100" y="2143092"/>
+              <a:ext cx="0" cy="1317069"/>
             </a:xfrm>
             <a:custGeom>
               <a:avLst/>
               <a:pathLst>
-                <a:path w="0" h="3649639">
+                <a:path w="0" h="1317069">
                   <a:moveTo>
-                    <a:pt x="0" y="3649639"/>
+                    <a:pt x="0" y="1317069"/>
                   </a:moveTo>
                   <a:lnTo>
                     <a:pt x="0" y="0"/>
@@ -4740,21 +4775,21 @@
         </p:sp>
         <p:sp>
           <p:nvSpPr>
-            <p:cNvPr id="28" name="pl28"/>
+            <p:cNvPr id="29" name="pl29"/>
             <p:cNvSpPr/>
             <p:nvPr/>
           </p:nvSpPr>
           <p:spPr>
             <a:xfrm>
-              <a:off x="3016442" y="2073503"/>
-              <a:ext cx="0" cy="3649639"/>
+              <a:off x="3046793" y="2143092"/>
+              <a:ext cx="0" cy="1317069"/>
             </a:xfrm>
             <a:custGeom>
               <a:avLst/>
               <a:pathLst>
-                <a:path w="0" h="3649639">
+                <a:path w="0" h="1317069">
                   <a:moveTo>
-                    <a:pt x="0" y="3649639"/>
+                    <a:pt x="0" y="1317069"/>
                   </a:moveTo>
                   <a:lnTo>
                     <a:pt x="0" y="0"/>
@@ -4783,21 +4818,21 @@
         </p:sp>
         <p:sp>
           <p:nvSpPr>
-            <p:cNvPr id="29" name="pl29"/>
+            <p:cNvPr id="30" name="pl30"/>
             <p:cNvSpPr/>
             <p:nvPr/>
           </p:nvSpPr>
           <p:spPr>
             <a:xfrm>
-              <a:off x="5421760" y="2073503"/>
-              <a:ext cx="0" cy="3649639"/>
+              <a:off x="5409191" y="2143092"/>
+              <a:ext cx="0" cy="1317069"/>
             </a:xfrm>
             <a:custGeom>
               <a:avLst/>
               <a:pathLst>
-                <a:path w="0" h="3649639">
+                <a:path w="0" h="1317069">
                   <a:moveTo>
-                    <a:pt x="0" y="3649639"/>
+                    <a:pt x="0" y="1317069"/>
                   </a:moveTo>
                   <a:lnTo>
                     <a:pt x="0" y="0"/>
@@ -4826,13 +4861,13 @@
         </p:sp>
         <p:sp>
           <p:nvSpPr>
-            <p:cNvPr id="30" name="tx30"/>
+            <p:cNvPr id="31" name="tx31"/>
             <p:cNvSpPr/>
             <p:nvPr/>
           </p:nvSpPr>
           <p:spPr>
             <a:xfrm>
-              <a:off x="692708" y="5517199"/>
+              <a:off x="762297" y="3360243"/>
               <a:ext cx="62179" cy="80101"/>
             </a:xfrm>
             <a:prstGeom prst="rect">
@@ -4872,13 +4907,13 @@
         </p:sp>
         <p:sp>
           <p:nvSpPr>
-            <p:cNvPr id="31" name="tx31"/>
+            <p:cNvPr id="32" name="tx32"/>
             <p:cNvSpPr/>
             <p:nvPr/>
           </p:nvSpPr>
           <p:spPr>
             <a:xfrm>
-              <a:off x="692708" y="4687735"/>
+              <a:off x="762297" y="3060909"/>
               <a:ext cx="62179" cy="80101"/>
             </a:xfrm>
             <a:prstGeom prst="rect">
@@ -4918,13 +4953,13 @@
         </p:sp>
         <p:sp>
           <p:nvSpPr>
-            <p:cNvPr id="32" name="tx32"/>
+            <p:cNvPr id="33" name="tx33"/>
             <p:cNvSpPr/>
             <p:nvPr/>
           </p:nvSpPr>
           <p:spPr>
             <a:xfrm>
-              <a:off x="692708" y="3858272"/>
+              <a:off x="762297" y="2761575"/>
               <a:ext cx="62179" cy="80101"/>
             </a:xfrm>
             <a:prstGeom prst="rect">
@@ -4964,13 +4999,13 @@
         </p:sp>
         <p:sp>
           <p:nvSpPr>
-            <p:cNvPr id="33" name="tx33"/>
+            <p:cNvPr id="34" name="tx34"/>
             <p:cNvSpPr/>
             <p:nvPr/>
           </p:nvSpPr>
           <p:spPr>
             <a:xfrm>
-              <a:off x="692708" y="3028808"/>
+              <a:off x="762297" y="2462242"/>
               <a:ext cx="62179" cy="80101"/>
             </a:xfrm>
             <a:prstGeom prst="rect">
@@ -5010,13 +5045,13 @@
         </p:sp>
         <p:sp>
           <p:nvSpPr>
-            <p:cNvPr id="34" name="tx34"/>
+            <p:cNvPr id="35" name="tx35"/>
             <p:cNvSpPr/>
             <p:nvPr/>
           </p:nvSpPr>
           <p:spPr>
             <a:xfrm>
-              <a:off x="692708" y="2199345"/>
+              <a:off x="762297" y="2162908"/>
               <a:ext cx="62179" cy="80101"/>
             </a:xfrm>
             <a:prstGeom prst="rect">
@@ -5056,13 +5091,13 @@
         </p:sp>
         <p:sp>
           <p:nvSpPr>
-            <p:cNvPr id="35" name="tx35"/>
+            <p:cNvPr id="36" name="tx36"/>
             <p:cNvSpPr/>
             <p:nvPr/>
           </p:nvSpPr>
           <p:spPr>
             <a:xfrm>
-              <a:off x="1977028" y="5785772"/>
+              <a:off x="2024485" y="3522791"/>
               <a:ext cx="161574" cy="80101"/>
             </a:xfrm>
             <a:prstGeom prst="rect">
@@ -5102,13 +5137,13 @@
         </p:sp>
         <p:sp>
           <p:nvSpPr>
-            <p:cNvPr id="36" name="tx36"/>
+            <p:cNvPr id="37" name="tx37"/>
             <p:cNvSpPr/>
             <p:nvPr/>
           </p:nvSpPr>
           <p:spPr>
             <a:xfrm>
-              <a:off x="3728813" y="5785772"/>
+              <a:off x="3745012" y="3522791"/>
               <a:ext cx="161574" cy="80101"/>
             </a:xfrm>
             <a:prstGeom prst="rect">
@@ -5148,13 +5183,13 @@
         </p:sp>
         <p:sp>
           <p:nvSpPr>
-            <p:cNvPr id="37" name="tx37"/>
+            <p:cNvPr id="38" name="tx38"/>
             <p:cNvSpPr/>
             <p:nvPr/>
           </p:nvSpPr>
           <p:spPr>
             <a:xfrm>
-              <a:off x="5530296" y="5785772"/>
+              <a:off x="5515235" y="3522791"/>
               <a:ext cx="62179" cy="80101"/>
             </a:xfrm>
             <a:prstGeom prst="rect">
@@ -5194,13 +5229,13 @@
         </p:sp>
         <p:sp>
           <p:nvSpPr>
-            <p:cNvPr id="38" name="tx38"/>
+            <p:cNvPr id="39" name="tx39"/>
             <p:cNvSpPr/>
             <p:nvPr/>
           </p:nvSpPr>
           <p:spPr>
             <a:xfrm>
-              <a:off x="7250992" y="5785772"/>
+              <a:off x="7204672" y="3522791"/>
               <a:ext cx="124358" cy="80101"/>
             </a:xfrm>
             <a:prstGeom prst="rect">
@@ -5240,13 +5275,13 @@
         </p:sp>
         <p:sp>
           <p:nvSpPr>
-            <p:cNvPr id="39" name="tx39"/>
+            <p:cNvPr id="40" name="tx40"/>
             <p:cNvSpPr/>
             <p:nvPr/>
           </p:nvSpPr>
           <p:spPr>
             <a:xfrm>
-              <a:off x="1561815" y="5925448"/>
+              <a:off x="1561815" y="3662467"/>
               <a:ext cx="6311097" cy="100218"/>
             </a:xfrm>
             <a:prstGeom prst="rect">
@@ -5286,13 +5321,13 @@
         </p:sp>
         <p:sp>
           <p:nvSpPr>
-            <p:cNvPr id="40" name="tx40"/>
+            <p:cNvPr id="41" name="tx41"/>
             <p:cNvSpPr/>
             <p:nvPr/>
           </p:nvSpPr>
           <p:spPr>
             <a:xfrm rot="-5400000">
-              <a:off x="68446" y="3848213"/>
+              <a:off x="138035" y="2751517"/>
               <a:ext cx="1016904" cy="100218"/>
             </a:xfrm>
             <a:prstGeom prst="rect">
@@ -5332,13 +5367,13 @@
         </p:sp>
         <p:sp>
           <p:nvSpPr>
-            <p:cNvPr id="41" name="tx41"/>
+            <p:cNvPr id="42" name="tx42"/>
             <p:cNvSpPr/>
             <p:nvPr/>
           </p:nvSpPr>
           <p:spPr>
             <a:xfrm>
-              <a:off x="817517" y="1896563"/>
+              <a:off x="887106" y="1966152"/>
               <a:ext cx="6959864" cy="82021"/>
             </a:xfrm>
             <a:prstGeom prst="rect">
@@ -5378,13 +5413,3746 @@
         </p:sp>
         <p:sp>
           <p:nvSpPr>
-            <p:cNvPr id="42" name="tx42"/>
+            <p:cNvPr id="43" name="tx43"/>
             <p:cNvSpPr/>
             <p:nvPr/>
           </p:nvSpPr>
           <p:spPr>
             <a:xfrm>
-              <a:off x="817517" y="1669789"/>
+              <a:off x="887106" y="1739378"/>
+              <a:ext cx="2132106" cy="120152"/>
+            </a:xfrm>
+            <a:prstGeom prst="rect">
+              <a:avLst/>
+            </a:prstGeom>
+            <a:noFill/>
+          </p:spPr>
+          <p:txBody>
+            <a:bodyPr lIns="0" rIns="0" tIns="0" bIns="0" anchorCtr="1" anchor="ctr" wrap="none"/>
+            <a:lstStyle/>
+            <a:p>
+              <a:pPr algn="l" marL="0" marR="0" indent="0">
+                <a:lnSpc>
+                  <a:spcPts val="1320"/>
+                </a:lnSpc>
+                <a:spcBef>
+                  <a:spcPts val="0"/>
+                </a:spcBef>
+                <a:spcAft>
+                  <a:spcPts val="0"/>
+                </a:spcAft>
+              </a:pPr>
+              <a:r>
+                <a:rPr sz="1320">
+                  <a:solidFill>
+                    <a:srgbClr val="000000">
+                      <a:alpha val="100000"/>
+                    </a:srgbClr>
+                  </a:solidFill>
+                  <a:latin typeface="Helvetica"/>
+                  <a:cs typeface="Helvetica"/>
+                </a:rPr>
+                <a:t>Anemia Grade 3 (Sensitivity)</a:t>
+              </a:r>
+            </a:p>
+          </p:txBody>
+        </p:sp>
+        <p:sp>
+          <p:nvSpPr>
+            <p:cNvPr id="44" name="pl44"/>
+            <p:cNvSpPr/>
+            <p:nvPr/>
+          </p:nvSpPr>
+          <p:spPr>
+            <a:xfrm>
+              <a:off x="887106" y="5444019"/>
+              <a:ext cx="7660515" cy="0"/>
+            </a:xfrm>
+            <a:custGeom>
+              <a:avLst/>
+              <a:pathLst>
+                <a:path w="7660515" h="0">
+                  <a:moveTo>
+                    <a:pt x="0" y="0"/>
+                  </a:moveTo>
+                  <a:lnTo>
+                    <a:pt x="7660515" y="0"/>
+                  </a:lnTo>
+                  <a:lnTo>
+                    <a:pt x="7660515" y="0"/>
+                  </a:lnTo>
+                </a:path>
+              </a:pathLst>
+            </a:custGeom>
+            <a:ln w="6775" cap="flat">
+              <a:solidFill>
+                <a:srgbClr val="EBEBEB">
+                  <a:alpha val="100000"/>
+                </a:srgbClr>
+              </a:solidFill>
+              <a:prstDash val="solid"/>
+              <a:round/>
+            </a:ln>
+          </p:spPr>
+          <p:txBody>
+            <a:bodyPr/>
+            <a:lstStyle/>
+            <a:p/>
+          </p:txBody>
+        </p:sp>
+        <p:sp>
+          <p:nvSpPr>
+            <p:cNvPr id="45" name="pl45"/>
+            <p:cNvSpPr/>
+            <p:nvPr/>
+          </p:nvSpPr>
+          <p:spPr>
+            <a:xfrm>
+              <a:off x="887106" y="5144686"/>
+              <a:ext cx="7660515" cy="0"/>
+            </a:xfrm>
+            <a:custGeom>
+              <a:avLst/>
+              <a:pathLst>
+                <a:path w="7660515" h="0">
+                  <a:moveTo>
+                    <a:pt x="0" y="0"/>
+                  </a:moveTo>
+                  <a:lnTo>
+                    <a:pt x="7660515" y="0"/>
+                  </a:lnTo>
+                  <a:lnTo>
+                    <a:pt x="7660515" y="0"/>
+                  </a:lnTo>
+                </a:path>
+              </a:pathLst>
+            </a:custGeom>
+            <a:ln w="6775" cap="flat">
+              <a:solidFill>
+                <a:srgbClr val="EBEBEB">
+                  <a:alpha val="100000"/>
+                </a:srgbClr>
+              </a:solidFill>
+              <a:prstDash val="solid"/>
+              <a:round/>
+            </a:ln>
+          </p:spPr>
+          <p:txBody>
+            <a:bodyPr/>
+            <a:lstStyle/>
+            <a:p/>
+          </p:txBody>
+        </p:sp>
+        <p:sp>
+          <p:nvSpPr>
+            <p:cNvPr id="46" name="pl46"/>
+            <p:cNvSpPr/>
+            <p:nvPr/>
+          </p:nvSpPr>
+          <p:spPr>
+            <a:xfrm>
+              <a:off x="887106" y="4845352"/>
+              <a:ext cx="7660515" cy="0"/>
+            </a:xfrm>
+            <a:custGeom>
+              <a:avLst/>
+              <a:pathLst>
+                <a:path w="7660515" h="0">
+                  <a:moveTo>
+                    <a:pt x="0" y="0"/>
+                  </a:moveTo>
+                  <a:lnTo>
+                    <a:pt x="7660515" y="0"/>
+                  </a:lnTo>
+                  <a:lnTo>
+                    <a:pt x="7660515" y="0"/>
+                  </a:lnTo>
+                </a:path>
+              </a:pathLst>
+            </a:custGeom>
+            <a:ln w="6775" cap="flat">
+              <a:solidFill>
+                <a:srgbClr val="EBEBEB">
+                  <a:alpha val="100000"/>
+                </a:srgbClr>
+              </a:solidFill>
+              <a:prstDash val="solid"/>
+              <a:round/>
+            </a:ln>
+          </p:spPr>
+          <p:txBody>
+            <a:bodyPr/>
+            <a:lstStyle/>
+            <a:p/>
+          </p:txBody>
+        </p:sp>
+        <p:sp>
+          <p:nvSpPr>
+            <p:cNvPr id="47" name="pl47"/>
+            <p:cNvSpPr/>
+            <p:nvPr/>
+          </p:nvSpPr>
+          <p:spPr>
+            <a:xfrm>
+              <a:off x="887106" y="4546018"/>
+              <a:ext cx="7660515" cy="0"/>
+            </a:xfrm>
+            <a:custGeom>
+              <a:avLst/>
+              <a:pathLst>
+                <a:path w="7660515" h="0">
+                  <a:moveTo>
+                    <a:pt x="0" y="0"/>
+                  </a:moveTo>
+                  <a:lnTo>
+                    <a:pt x="7660515" y="0"/>
+                  </a:lnTo>
+                  <a:lnTo>
+                    <a:pt x="7660515" y="0"/>
+                  </a:lnTo>
+                </a:path>
+              </a:pathLst>
+            </a:custGeom>
+            <a:ln w="6775" cap="flat">
+              <a:solidFill>
+                <a:srgbClr val="EBEBEB">
+                  <a:alpha val="100000"/>
+                </a:srgbClr>
+              </a:solidFill>
+              <a:prstDash val="solid"/>
+              <a:round/>
+            </a:ln>
+          </p:spPr>
+          <p:txBody>
+            <a:bodyPr/>
+            <a:lstStyle/>
+            <a:p/>
+          </p:txBody>
+        </p:sp>
+        <p:sp>
+          <p:nvSpPr>
+            <p:cNvPr id="48" name="pl48"/>
+            <p:cNvSpPr/>
+            <p:nvPr/>
+          </p:nvSpPr>
+          <p:spPr>
+            <a:xfrm>
+              <a:off x="1675141" y="4336484"/>
+              <a:ext cx="0" cy="1317069"/>
+            </a:xfrm>
+            <a:custGeom>
+              <a:avLst/>
+              <a:pathLst>
+                <a:path w="0" h="1317069">
+                  <a:moveTo>
+                    <a:pt x="0" y="1317069"/>
+                  </a:moveTo>
+                  <a:lnTo>
+                    <a:pt x="0" y="0"/>
+                  </a:lnTo>
+                  <a:lnTo>
+                    <a:pt x="0" y="0"/>
+                  </a:lnTo>
+                </a:path>
+              </a:pathLst>
+            </a:custGeom>
+            <a:ln w="6775" cap="flat">
+              <a:solidFill>
+                <a:srgbClr val="EBEBEB">
+                  <a:alpha val="100000"/>
+                </a:srgbClr>
+              </a:solidFill>
+              <a:prstDash val="solid"/>
+              <a:round/>
+            </a:ln>
+          </p:spPr>
+          <p:txBody>
+            <a:bodyPr/>
+            <a:lstStyle/>
+            <a:p/>
+          </p:txBody>
+        </p:sp>
+        <p:sp>
+          <p:nvSpPr>
+            <p:cNvPr id="49" name="pl49"/>
+            <p:cNvSpPr/>
+            <p:nvPr/>
+          </p:nvSpPr>
+          <p:spPr>
+            <a:xfrm>
+              <a:off x="2535404" y="4336484"/>
+              <a:ext cx="0" cy="1317069"/>
+            </a:xfrm>
+            <a:custGeom>
+              <a:avLst/>
+              <a:pathLst>
+                <a:path w="0" h="1317069">
+                  <a:moveTo>
+                    <a:pt x="0" y="1317069"/>
+                  </a:moveTo>
+                  <a:lnTo>
+                    <a:pt x="0" y="0"/>
+                  </a:lnTo>
+                  <a:lnTo>
+                    <a:pt x="0" y="0"/>
+                  </a:lnTo>
+                </a:path>
+              </a:pathLst>
+            </a:custGeom>
+            <a:ln w="6775" cap="flat">
+              <a:solidFill>
+                <a:srgbClr val="EBEBEB">
+                  <a:alpha val="100000"/>
+                </a:srgbClr>
+              </a:solidFill>
+              <a:prstDash val="solid"/>
+              <a:round/>
+            </a:ln>
+          </p:spPr>
+          <p:txBody>
+            <a:bodyPr/>
+            <a:lstStyle/>
+            <a:p/>
+          </p:txBody>
+        </p:sp>
+        <p:sp>
+          <p:nvSpPr>
+            <p:cNvPr id="50" name="pl50"/>
+            <p:cNvSpPr/>
+            <p:nvPr/>
+          </p:nvSpPr>
+          <p:spPr>
+            <a:xfrm>
+              <a:off x="3395667" y="4336484"/>
+              <a:ext cx="0" cy="1317069"/>
+            </a:xfrm>
+            <a:custGeom>
+              <a:avLst/>
+              <a:pathLst>
+                <a:path w="0" h="1317069">
+                  <a:moveTo>
+                    <a:pt x="0" y="1317069"/>
+                  </a:moveTo>
+                  <a:lnTo>
+                    <a:pt x="0" y="0"/>
+                  </a:lnTo>
+                  <a:lnTo>
+                    <a:pt x="0" y="0"/>
+                  </a:lnTo>
+                </a:path>
+              </a:pathLst>
+            </a:custGeom>
+            <a:ln w="6775" cap="flat">
+              <a:solidFill>
+                <a:srgbClr val="EBEBEB">
+                  <a:alpha val="100000"/>
+                </a:srgbClr>
+              </a:solidFill>
+              <a:prstDash val="solid"/>
+              <a:round/>
+            </a:ln>
+          </p:spPr>
+          <p:txBody>
+            <a:bodyPr/>
+            <a:lstStyle/>
+            <a:p/>
+          </p:txBody>
+        </p:sp>
+        <p:sp>
+          <p:nvSpPr>
+            <p:cNvPr id="51" name="pl51"/>
+            <p:cNvSpPr/>
+            <p:nvPr/>
+          </p:nvSpPr>
+          <p:spPr>
+            <a:xfrm>
+              <a:off x="4255930" y="4336484"/>
+              <a:ext cx="0" cy="1317069"/>
+            </a:xfrm>
+            <a:custGeom>
+              <a:avLst/>
+              <a:pathLst>
+                <a:path w="0" h="1317069">
+                  <a:moveTo>
+                    <a:pt x="0" y="1317069"/>
+                  </a:moveTo>
+                  <a:lnTo>
+                    <a:pt x="0" y="0"/>
+                  </a:lnTo>
+                  <a:lnTo>
+                    <a:pt x="0" y="0"/>
+                  </a:lnTo>
+                </a:path>
+              </a:pathLst>
+            </a:custGeom>
+            <a:ln w="6775" cap="flat">
+              <a:solidFill>
+                <a:srgbClr val="EBEBEB">
+                  <a:alpha val="100000"/>
+                </a:srgbClr>
+              </a:solidFill>
+              <a:prstDash val="solid"/>
+              <a:round/>
+            </a:ln>
+          </p:spPr>
+          <p:txBody>
+            <a:bodyPr/>
+            <a:lstStyle/>
+            <a:p/>
+          </p:txBody>
+        </p:sp>
+        <p:sp>
+          <p:nvSpPr>
+            <p:cNvPr id="52" name="pl52"/>
+            <p:cNvSpPr/>
+            <p:nvPr/>
+          </p:nvSpPr>
+          <p:spPr>
+            <a:xfrm>
+              <a:off x="5116193" y="4336484"/>
+              <a:ext cx="0" cy="1317069"/>
+            </a:xfrm>
+            <a:custGeom>
+              <a:avLst/>
+              <a:pathLst>
+                <a:path w="0" h="1317069">
+                  <a:moveTo>
+                    <a:pt x="0" y="1317069"/>
+                  </a:moveTo>
+                  <a:lnTo>
+                    <a:pt x="0" y="0"/>
+                  </a:lnTo>
+                  <a:lnTo>
+                    <a:pt x="0" y="0"/>
+                  </a:lnTo>
+                </a:path>
+              </a:pathLst>
+            </a:custGeom>
+            <a:ln w="6775" cap="flat">
+              <a:solidFill>
+                <a:srgbClr val="EBEBEB">
+                  <a:alpha val="100000"/>
+                </a:srgbClr>
+              </a:solidFill>
+              <a:prstDash val="solid"/>
+              <a:round/>
+            </a:ln>
+          </p:spPr>
+          <p:txBody>
+            <a:bodyPr/>
+            <a:lstStyle/>
+            <a:p/>
+          </p:txBody>
+        </p:sp>
+        <p:sp>
+          <p:nvSpPr>
+            <p:cNvPr id="53" name="pl53"/>
+            <p:cNvSpPr/>
+            <p:nvPr/>
+          </p:nvSpPr>
+          <p:spPr>
+            <a:xfrm>
+              <a:off x="5976457" y="4336484"/>
+              <a:ext cx="0" cy="1317069"/>
+            </a:xfrm>
+            <a:custGeom>
+              <a:avLst/>
+              <a:pathLst>
+                <a:path w="0" h="1317069">
+                  <a:moveTo>
+                    <a:pt x="0" y="1317069"/>
+                  </a:moveTo>
+                  <a:lnTo>
+                    <a:pt x="0" y="0"/>
+                  </a:lnTo>
+                  <a:lnTo>
+                    <a:pt x="0" y="0"/>
+                  </a:lnTo>
+                </a:path>
+              </a:pathLst>
+            </a:custGeom>
+            <a:ln w="6775" cap="flat">
+              <a:solidFill>
+                <a:srgbClr val="EBEBEB">
+                  <a:alpha val="100000"/>
+                </a:srgbClr>
+              </a:solidFill>
+              <a:prstDash val="solid"/>
+              <a:round/>
+            </a:ln>
+          </p:spPr>
+          <p:txBody>
+            <a:bodyPr/>
+            <a:lstStyle/>
+            <a:p/>
+          </p:txBody>
+        </p:sp>
+        <p:sp>
+          <p:nvSpPr>
+            <p:cNvPr id="54" name="pl54"/>
+            <p:cNvSpPr/>
+            <p:nvPr/>
+          </p:nvSpPr>
+          <p:spPr>
+            <a:xfrm>
+              <a:off x="6836720" y="4336484"/>
+              <a:ext cx="0" cy="1317069"/>
+            </a:xfrm>
+            <a:custGeom>
+              <a:avLst/>
+              <a:pathLst>
+                <a:path w="0" h="1317069">
+                  <a:moveTo>
+                    <a:pt x="0" y="1317069"/>
+                  </a:moveTo>
+                  <a:lnTo>
+                    <a:pt x="0" y="0"/>
+                  </a:lnTo>
+                  <a:lnTo>
+                    <a:pt x="0" y="0"/>
+                  </a:lnTo>
+                </a:path>
+              </a:pathLst>
+            </a:custGeom>
+            <a:ln w="6775" cap="flat">
+              <a:solidFill>
+                <a:srgbClr val="EBEBEB">
+                  <a:alpha val="100000"/>
+                </a:srgbClr>
+              </a:solidFill>
+              <a:prstDash val="solid"/>
+              <a:round/>
+            </a:ln>
+          </p:spPr>
+          <p:txBody>
+            <a:bodyPr/>
+            <a:lstStyle/>
+            <a:p/>
+          </p:txBody>
+        </p:sp>
+        <p:sp>
+          <p:nvSpPr>
+            <p:cNvPr id="55" name="pl55"/>
+            <p:cNvSpPr/>
+            <p:nvPr/>
+          </p:nvSpPr>
+          <p:spPr>
+            <a:xfrm>
+              <a:off x="7696983" y="4336484"/>
+              <a:ext cx="0" cy="1317069"/>
+            </a:xfrm>
+            <a:custGeom>
+              <a:avLst/>
+              <a:pathLst>
+                <a:path w="0" h="1317069">
+                  <a:moveTo>
+                    <a:pt x="0" y="1317069"/>
+                  </a:moveTo>
+                  <a:lnTo>
+                    <a:pt x="0" y="0"/>
+                  </a:lnTo>
+                  <a:lnTo>
+                    <a:pt x="0" y="0"/>
+                  </a:lnTo>
+                </a:path>
+              </a:pathLst>
+            </a:custGeom>
+            <a:ln w="6775" cap="flat">
+              <a:solidFill>
+                <a:srgbClr val="EBEBEB">
+                  <a:alpha val="100000"/>
+                </a:srgbClr>
+              </a:solidFill>
+              <a:prstDash val="solid"/>
+              <a:round/>
+            </a:ln>
+          </p:spPr>
+          <p:txBody>
+            <a:bodyPr/>
+            <a:lstStyle/>
+            <a:p/>
+          </p:txBody>
+        </p:sp>
+        <p:sp>
+          <p:nvSpPr>
+            <p:cNvPr id="56" name="pl56"/>
+            <p:cNvSpPr/>
+            <p:nvPr/>
+          </p:nvSpPr>
+          <p:spPr>
+            <a:xfrm>
+              <a:off x="887106" y="5593686"/>
+              <a:ext cx="7660515" cy="0"/>
+            </a:xfrm>
+            <a:custGeom>
+              <a:avLst/>
+              <a:pathLst>
+                <a:path w="7660515" h="0">
+                  <a:moveTo>
+                    <a:pt x="0" y="0"/>
+                  </a:moveTo>
+                  <a:lnTo>
+                    <a:pt x="7660515" y="0"/>
+                  </a:lnTo>
+                  <a:lnTo>
+                    <a:pt x="7660515" y="0"/>
+                  </a:lnTo>
+                </a:path>
+              </a:pathLst>
+            </a:custGeom>
+            <a:ln w="13550" cap="flat">
+              <a:solidFill>
+                <a:srgbClr val="EBEBEB">
+                  <a:alpha val="100000"/>
+                </a:srgbClr>
+              </a:solidFill>
+              <a:prstDash val="solid"/>
+              <a:round/>
+            </a:ln>
+          </p:spPr>
+          <p:txBody>
+            <a:bodyPr/>
+            <a:lstStyle/>
+            <a:p/>
+          </p:txBody>
+        </p:sp>
+        <p:sp>
+          <p:nvSpPr>
+            <p:cNvPr id="57" name="pl57"/>
+            <p:cNvSpPr/>
+            <p:nvPr/>
+          </p:nvSpPr>
+          <p:spPr>
+            <a:xfrm>
+              <a:off x="887106" y="5294352"/>
+              <a:ext cx="7660515" cy="0"/>
+            </a:xfrm>
+            <a:custGeom>
+              <a:avLst/>
+              <a:pathLst>
+                <a:path w="7660515" h="0">
+                  <a:moveTo>
+                    <a:pt x="0" y="0"/>
+                  </a:moveTo>
+                  <a:lnTo>
+                    <a:pt x="7660515" y="0"/>
+                  </a:lnTo>
+                  <a:lnTo>
+                    <a:pt x="7660515" y="0"/>
+                  </a:lnTo>
+                </a:path>
+              </a:pathLst>
+            </a:custGeom>
+            <a:ln w="13550" cap="flat">
+              <a:solidFill>
+                <a:srgbClr val="EBEBEB">
+                  <a:alpha val="100000"/>
+                </a:srgbClr>
+              </a:solidFill>
+              <a:prstDash val="solid"/>
+              <a:round/>
+            </a:ln>
+          </p:spPr>
+          <p:txBody>
+            <a:bodyPr/>
+            <a:lstStyle/>
+            <a:p/>
+          </p:txBody>
+        </p:sp>
+        <p:sp>
+          <p:nvSpPr>
+            <p:cNvPr id="58" name="pl58"/>
+            <p:cNvSpPr/>
+            <p:nvPr/>
+          </p:nvSpPr>
+          <p:spPr>
+            <a:xfrm>
+              <a:off x="887106" y="4995019"/>
+              <a:ext cx="7660515" cy="0"/>
+            </a:xfrm>
+            <a:custGeom>
+              <a:avLst/>
+              <a:pathLst>
+                <a:path w="7660515" h="0">
+                  <a:moveTo>
+                    <a:pt x="0" y="0"/>
+                  </a:moveTo>
+                  <a:lnTo>
+                    <a:pt x="7660515" y="0"/>
+                  </a:lnTo>
+                  <a:lnTo>
+                    <a:pt x="7660515" y="0"/>
+                  </a:lnTo>
+                </a:path>
+              </a:pathLst>
+            </a:custGeom>
+            <a:ln w="13550" cap="flat">
+              <a:solidFill>
+                <a:srgbClr val="EBEBEB">
+                  <a:alpha val="100000"/>
+                </a:srgbClr>
+              </a:solidFill>
+              <a:prstDash val="solid"/>
+              <a:round/>
+            </a:ln>
+          </p:spPr>
+          <p:txBody>
+            <a:bodyPr/>
+            <a:lstStyle/>
+            <a:p/>
+          </p:txBody>
+        </p:sp>
+        <p:sp>
+          <p:nvSpPr>
+            <p:cNvPr id="59" name="pl59"/>
+            <p:cNvSpPr/>
+            <p:nvPr/>
+          </p:nvSpPr>
+          <p:spPr>
+            <a:xfrm>
+              <a:off x="887106" y="4695685"/>
+              <a:ext cx="7660515" cy="0"/>
+            </a:xfrm>
+            <a:custGeom>
+              <a:avLst/>
+              <a:pathLst>
+                <a:path w="7660515" h="0">
+                  <a:moveTo>
+                    <a:pt x="0" y="0"/>
+                  </a:moveTo>
+                  <a:lnTo>
+                    <a:pt x="7660515" y="0"/>
+                  </a:lnTo>
+                  <a:lnTo>
+                    <a:pt x="7660515" y="0"/>
+                  </a:lnTo>
+                </a:path>
+              </a:pathLst>
+            </a:custGeom>
+            <a:ln w="13550" cap="flat">
+              <a:solidFill>
+                <a:srgbClr val="EBEBEB">
+                  <a:alpha val="100000"/>
+                </a:srgbClr>
+              </a:solidFill>
+              <a:prstDash val="solid"/>
+              <a:round/>
+            </a:ln>
+          </p:spPr>
+          <p:txBody>
+            <a:bodyPr/>
+            <a:lstStyle/>
+            <a:p/>
+          </p:txBody>
+        </p:sp>
+        <p:sp>
+          <p:nvSpPr>
+            <p:cNvPr id="60" name="pl60"/>
+            <p:cNvSpPr/>
+            <p:nvPr/>
+          </p:nvSpPr>
+          <p:spPr>
+            <a:xfrm>
+              <a:off x="887106" y="4396351"/>
+              <a:ext cx="7660515" cy="0"/>
+            </a:xfrm>
+            <a:custGeom>
+              <a:avLst/>
+              <a:pathLst>
+                <a:path w="7660515" h="0">
+                  <a:moveTo>
+                    <a:pt x="0" y="0"/>
+                  </a:moveTo>
+                  <a:lnTo>
+                    <a:pt x="7660515" y="0"/>
+                  </a:lnTo>
+                  <a:lnTo>
+                    <a:pt x="7660515" y="0"/>
+                  </a:lnTo>
+                </a:path>
+              </a:pathLst>
+            </a:custGeom>
+            <a:ln w="13550" cap="flat">
+              <a:solidFill>
+                <a:srgbClr val="EBEBEB">
+                  <a:alpha val="100000"/>
+                </a:srgbClr>
+              </a:solidFill>
+              <a:prstDash val="solid"/>
+              <a:round/>
+            </a:ln>
+          </p:spPr>
+          <p:txBody>
+            <a:bodyPr/>
+            <a:lstStyle/>
+            <a:p/>
+          </p:txBody>
+        </p:sp>
+        <p:sp>
+          <p:nvSpPr>
+            <p:cNvPr id="61" name="pl61"/>
+            <p:cNvSpPr/>
+            <p:nvPr/>
+          </p:nvSpPr>
+          <p:spPr>
+            <a:xfrm>
+              <a:off x="1245010" y="4336484"/>
+              <a:ext cx="0" cy="1317069"/>
+            </a:xfrm>
+            <a:custGeom>
+              <a:avLst/>
+              <a:pathLst>
+                <a:path w="0" h="1317069">
+                  <a:moveTo>
+                    <a:pt x="0" y="1317069"/>
+                  </a:moveTo>
+                  <a:lnTo>
+                    <a:pt x="0" y="0"/>
+                  </a:lnTo>
+                  <a:lnTo>
+                    <a:pt x="0" y="0"/>
+                  </a:lnTo>
+                </a:path>
+              </a:pathLst>
+            </a:custGeom>
+            <a:ln w="13550" cap="flat">
+              <a:solidFill>
+                <a:srgbClr val="EBEBEB">
+                  <a:alpha val="100000"/>
+                </a:srgbClr>
+              </a:solidFill>
+              <a:prstDash val="solid"/>
+              <a:round/>
+            </a:ln>
+          </p:spPr>
+          <p:txBody>
+            <a:bodyPr/>
+            <a:lstStyle/>
+            <a:p/>
+          </p:txBody>
+        </p:sp>
+        <p:sp>
+          <p:nvSpPr>
+            <p:cNvPr id="62" name="pl62"/>
+            <p:cNvSpPr/>
+            <p:nvPr/>
+          </p:nvSpPr>
+          <p:spPr>
+            <a:xfrm>
+              <a:off x="2105273" y="4336484"/>
+              <a:ext cx="0" cy="1317069"/>
+            </a:xfrm>
+            <a:custGeom>
+              <a:avLst/>
+              <a:pathLst>
+                <a:path w="0" h="1317069">
+                  <a:moveTo>
+                    <a:pt x="0" y="1317069"/>
+                  </a:moveTo>
+                  <a:lnTo>
+                    <a:pt x="0" y="0"/>
+                  </a:lnTo>
+                  <a:lnTo>
+                    <a:pt x="0" y="0"/>
+                  </a:lnTo>
+                </a:path>
+              </a:pathLst>
+            </a:custGeom>
+            <a:ln w="13550" cap="flat">
+              <a:solidFill>
+                <a:srgbClr val="EBEBEB">
+                  <a:alpha val="100000"/>
+                </a:srgbClr>
+              </a:solidFill>
+              <a:prstDash val="solid"/>
+              <a:round/>
+            </a:ln>
+          </p:spPr>
+          <p:txBody>
+            <a:bodyPr/>
+            <a:lstStyle/>
+            <a:p/>
+          </p:txBody>
+        </p:sp>
+        <p:sp>
+          <p:nvSpPr>
+            <p:cNvPr id="63" name="pl63"/>
+            <p:cNvSpPr/>
+            <p:nvPr/>
+          </p:nvSpPr>
+          <p:spPr>
+            <a:xfrm>
+              <a:off x="2965536" y="4336484"/>
+              <a:ext cx="0" cy="1317069"/>
+            </a:xfrm>
+            <a:custGeom>
+              <a:avLst/>
+              <a:pathLst>
+                <a:path w="0" h="1317069">
+                  <a:moveTo>
+                    <a:pt x="0" y="1317069"/>
+                  </a:moveTo>
+                  <a:lnTo>
+                    <a:pt x="0" y="0"/>
+                  </a:lnTo>
+                  <a:lnTo>
+                    <a:pt x="0" y="0"/>
+                  </a:lnTo>
+                </a:path>
+              </a:pathLst>
+            </a:custGeom>
+            <a:ln w="13550" cap="flat">
+              <a:solidFill>
+                <a:srgbClr val="EBEBEB">
+                  <a:alpha val="100000"/>
+                </a:srgbClr>
+              </a:solidFill>
+              <a:prstDash val="solid"/>
+              <a:round/>
+            </a:ln>
+          </p:spPr>
+          <p:txBody>
+            <a:bodyPr/>
+            <a:lstStyle/>
+            <a:p/>
+          </p:txBody>
+        </p:sp>
+        <p:sp>
+          <p:nvSpPr>
+            <p:cNvPr id="64" name="pl64"/>
+            <p:cNvSpPr/>
+            <p:nvPr/>
+          </p:nvSpPr>
+          <p:spPr>
+            <a:xfrm>
+              <a:off x="3825799" y="4336484"/>
+              <a:ext cx="0" cy="1317069"/>
+            </a:xfrm>
+            <a:custGeom>
+              <a:avLst/>
+              <a:pathLst>
+                <a:path w="0" h="1317069">
+                  <a:moveTo>
+                    <a:pt x="0" y="1317069"/>
+                  </a:moveTo>
+                  <a:lnTo>
+                    <a:pt x="0" y="0"/>
+                  </a:lnTo>
+                  <a:lnTo>
+                    <a:pt x="0" y="0"/>
+                  </a:lnTo>
+                </a:path>
+              </a:pathLst>
+            </a:custGeom>
+            <a:ln w="13550" cap="flat">
+              <a:solidFill>
+                <a:srgbClr val="EBEBEB">
+                  <a:alpha val="100000"/>
+                </a:srgbClr>
+              </a:solidFill>
+              <a:prstDash val="solid"/>
+              <a:round/>
+            </a:ln>
+          </p:spPr>
+          <p:txBody>
+            <a:bodyPr/>
+            <a:lstStyle/>
+            <a:p/>
+          </p:txBody>
+        </p:sp>
+        <p:sp>
+          <p:nvSpPr>
+            <p:cNvPr id="65" name="pl65"/>
+            <p:cNvSpPr/>
+            <p:nvPr/>
+          </p:nvSpPr>
+          <p:spPr>
+            <a:xfrm>
+              <a:off x="4686062" y="4336484"/>
+              <a:ext cx="0" cy="1317069"/>
+            </a:xfrm>
+            <a:custGeom>
+              <a:avLst/>
+              <a:pathLst>
+                <a:path w="0" h="1317069">
+                  <a:moveTo>
+                    <a:pt x="0" y="1317069"/>
+                  </a:moveTo>
+                  <a:lnTo>
+                    <a:pt x="0" y="0"/>
+                  </a:lnTo>
+                  <a:lnTo>
+                    <a:pt x="0" y="0"/>
+                  </a:lnTo>
+                </a:path>
+              </a:pathLst>
+            </a:custGeom>
+            <a:ln w="13550" cap="flat">
+              <a:solidFill>
+                <a:srgbClr val="EBEBEB">
+                  <a:alpha val="100000"/>
+                </a:srgbClr>
+              </a:solidFill>
+              <a:prstDash val="solid"/>
+              <a:round/>
+            </a:ln>
+          </p:spPr>
+          <p:txBody>
+            <a:bodyPr/>
+            <a:lstStyle/>
+            <a:p/>
+          </p:txBody>
+        </p:sp>
+        <p:sp>
+          <p:nvSpPr>
+            <p:cNvPr id="66" name="pl66"/>
+            <p:cNvSpPr/>
+            <p:nvPr/>
+          </p:nvSpPr>
+          <p:spPr>
+            <a:xfrm>
+              <a:off x="5546325" y="4336484"/>
+              <a:ext cx="0" cy="1317069"/>
+            </a:xfrm>
+            <a:custGeom>
+              <a:avLst/>
+              <a:pathLst>
+                <a:path w="0" h="1317069">
+                  <a:moveTo>
+                    <a:pt x="0" y="1317069"/>
+                  </a:moveTo>
+                  <a:lnTo>
+                    <a:pt x="0" y="0"/>
+                  </a:lnTo>
+                  <a:lnTo>
+                    <a:pt x="0" y="0"/>
+                  </a:lnTo>
+                </a:path>
+              </a:pathLst>
+            </a:custGeom>
+            <a:ln w="13550" cap="flat">
+              <a:solidFill>
+                <a:srgbClr val="EBEBEB">
+                  <a:alpha val="100000"/>
+                </a:srgbClr>
+              </a:solidFill>
+              <a:prstDash val="solid"/>
+              <a:round/>
+            </a:ln>
+          </p:spPr>
+          <p:txBody>
+            <a:bodyPr/>
+            <a:lstStyle/>
+            <a:p/>
+          </p:txBody>
+        </p:sp>
+        <p:sp>
+          <p:nvSpPr>
+            <p:cNvPr id="67" name="pl67"/>
+            <p:cNvSpPr/>
+            <p:nvPr/>
+          </p:nvSpPr>
+          <p:spPr>
+            <a:xfrm>
+              <a:off x="6406588" y="4336484"/>
+              <a:ext cx="0" cy="1317069"/>
+            </a:xfrm>
+            <a:custGeom>
+              <a:avLst/>
+              <a:pathLst>
+                <a:path w="0" h="1317069">
+                  <a:moveTo>
+                    <a:pt x="0" y="1317069"/>
+                  </a:moveTo>
+                  <a:lnTo>
+                    <a:pt x="0" y="0"/>
+                  </a:lnTo>
+                  <a:lnTo>
+                    <a:pt x="0" y="0"/>
+                  </a:lnTo>
+                </a:path>
+              </a:pathLst>
+            </a:custGeom>
+            <a:ln w="13550" cap="flat">
+              <a:solidFill>
+                <a:srgbClr val="EBEBEB">
+                  <a:alpha val="100000"/>
+                </a:srgbClr>
+              </a:solidFill>
+              <a:prstDash val="solid"/>
+              <a:round/>
+            </a:ln>
+          </p:spPr>
+          <p:txBody>
+            <a:bodyPr/>
+            <a:lstStyle/>
+            <a:p/>
+          </p:txBody>
+        </p:sp>
+        <p:sp>
+          <p:nvSpPr>
+            <p:cNvPr id="68" name="pl68"/>
+            <p:cNvSpPr/>
+            <p:nvPr/>
+          </p:nvSpPr>
+          <p:spPr>
+            <a:xfrm>
+              <a:off x="7266851" y="4336484"/>
+              <a:ext cx="0" cy="1317069"/>
+            </a:xfrm>
+            <a:custGeom>
+              <a:avLst/>
+              <a:pathLst>
+                <a:path w="0" h="1317069">
+                  <a:moveTo>
+                    <a:pt x="0" y="1317069"/>
+                  </a:moveTo>
+                  <a:lnTo>
+                    <a:pt x="0" y="0"/>
+                  </a:lnTo>
+                  <a:lnTo>
+                    <a:pt x="0" y="0"/>
+                  </a:lnTo>
+                </a:path>
+              </a:pathLst>
+            </a:custGeom>
+            <a:ln w="13550" cap="flat">
+              <a:solidFill>
+                <a:srgbClr val="EBEBEB">
+                  <a:alpha val="100000"/>
+                </a:srgbClr>
+              </a:solidFill>
+              <a:prstDash val="solid"/>
+              <a:round/>
+            </a:ln>
+          </p:spPr>
+          <p:txBody>
+            <a:bodyPr/>
+            <a:lstStyle/>
+            <a:p/>
+          </p:txBody>
+        </p:sp>
+        <p:sp>
+          <p:nvSpPr>
+            <p:cNvPr id="69" name="pl69"/>
+            <p:cNvSpPr/>
+            <p:nvPr/>
+          </p:nvSpPr>
+          <p:spPr>
+            <a:xfrm>
+              <a:off x="8127114" y="4336484"/>
+              <a:ext cx="0" cy="1317069"/>
+            </a:xfrm>
+            <a:custGeom>
+              <a:avLst/>
+              <a:pathLst>
+                <a:path w="0" h="1317069">
+                  <a:moveTo>
+                    <a:pt x="0" y="1317069"/>
+                  </a:moveTo>
+                  <a:lnTo>
+                    <a:pt x="0" y="0"/>
+                  </a:lnTo>
+                  <a:lnTo>
+                    <a:pt x="0" y="0"/>
+                  </a:lnTo>
+                </a:path>
+              </a:pathLst>
+            </a:custGeom>
+            <a:ln w="13550" cap="flat">
+              <a:solidFill>
+                <a:srgbClr val="EBEBEB">
+                  <a:alpha val="100000"/>
+                </a:srgbClr>
+              </a:solidFill>
+              <a:prstDash val="solid"/>
+              <a:round/>
+            </a:ln>
+          </p:spPr>
+          <p:txBody>
+            <a:bodyPr/>
+            <a:lstStyle/>
+            <a:p/>
+          </p:txBody>
+        </p:sp>
+        <p:sp>
+          <p:nvSpPr>
+            <p:cNvPr id="70" name="pg70"/>
+            <p:cNvSpPr/>
+            <p:nvPr/>
+          </p:nvSpPr>
+          <p:spPr>
+            <a:xfrm>
+              <a:off x="1235312" y="4726674"/>
+              <a:ext cx="6964104" cy="794804"/>
+            </a:xfrm>
+            <a:custGeom>
+              <a:avLst/>
+              <a:pathLst>
+                <a:path w="6964104" h="794804">
+                  <a:moveTo>
+                    <a:pt x="0" y="0"/>
+                  </a:moveTo>
+                  <a:lnTo>
+                    <a:pt x="70344" y="21496"/>
+                  </a:lnTo>
+                  <a:lnTo>
+                    <a:pt x="140688" y="42459"/>
+                  </a:lnTo>
+                  <a:lnTo>
+                    <a:pt x="211033" y="62903"/>
+                  </a:lnTo>
+                  <a:lnTo>
+                    <a:pt x="281377" y="82840"/>
+                  </a:lnTo>
+                  <a:lnTo>
+                    <a:pt x="351722" y="102282"/>
+                  </a:lnTo>
+                  <a:lnTo>
+                    <a:pt x="422066" y="121242"/>
+                  </a:lnTo>
+                  <a:lnTo>
+                    <a:pt x="492411" y="139733"/>
+                  </a:lnTo>
+                  <a:lnTo>
+                    <a:pt x="562755" y="157765"/>
+                  </a:lnTo>
+                  <a:lnTo>
+                    <a:pt x="633100" y="175349"/>
+                  </a:lnTo>
+                  <a:lnTo>
+                    <a:pt x="703444" y="192498"/>
+                  </a:lnTo>
+                  <a:lnTo>
+                    <a:pt x="773789" y="209222"/>
+                  </a:lnTo>
+                  <a:lnTo>
+                    <a:pt x="844133" y="225531"/>
+                  </a:lnTo>
+                  <a:lnTo>
+                    <a:pt x="914478" y="241435"/>
+                  </a:lnTo>
+                  <a:lnTo>
+                    <a:pt x="984822" y="256946"/>
+                  </a:lnTo>
+                  <a:lnTo>
+                    <a:pt x="1055167" y="272071"/>
+                  </a:lnTo>
+                  <a:lnTo>
+                    <a:pt x="1125511" y="286822"/>
+                  </a:lnTo>
+                  <a:lnTo>
+                    <a:pt x="1195856" y="301207"/>
+                  </a:lnTo>
+                  <a:lnTo>
+                    <a:pt x="1266200" y="315235"/>
+                  </a:lnTo>
+                  <a:lnTo>
+                    <a:pt x="1336545" y="328916"/>
+                  </a:lnTo>
+                  <a:lnTo>
+                    <a:pt x="1406889" y="342257"/>
+                  </a:lnTo>
+                  <a:lnTo>
+                    <a:pt x="1477234" y="355268"/>
+                  </a:lnTo>
+                  <a:lnTo>
+                    <a:pt x="1547578" y="367956"/>
+                  </a:lnTo>
+                  <a:lnTo>
+                    <a:pt x="1617923" y="380329"/>
+                  </a:lnTo>
+                  <a:lnTo>
+                    <a:pt x="1688267" y="392396"/>
+                  </a:lnTo>
+                  <a:lnTo>
+                    <a:pt x="1758612" y="404163"/>
+                  </a:lnTo>
+                  <a:lnTo>
+                    <a:pt x="1828956" y="415639"/>
+                  </a:lnTo>
+                  <a:lnTo>
+                    <a:pt x="1899301" y="426830"/>
+                  </a:lnTo>
+                  <a:lnTo>
+                    <a:pt x="1969645" y="437744"/>
+                  </a:lnTo>
+                  <a:lnTo>
+                    <a:pt x="2039990" y="448387"/>
+                  </a:lnTo>
+                  <a:lnTo>
+                    <a:pt x="2110334" y="458766"/>
+                  </a:lnTo>
+                  <a:lnTo>
+                    <a:pt x="2180679" y="468888"/>
+                  </a:lnTo>
+                  <a:lnTo>
+                    <a:pt x="2251023" y="478759"/>
+                  </a:lnTo>
+                  <a:lnTo>
+                    <a:pt x="2321368" y="488385"/>
+                  </a:lnTo>
+                  <a:lnTo>
+                    <a:pt x="2391712" y="497773"/>
+                  </a:lnTo>
+                  <a:lnTo>
+                    <a:pt x="2462057" y="506927"/>
+                  </a:lnTo>
+                  <a:lnTo>
+                    <a:pt x="2532401" y="515855"/>
+                  </a:lnTo>
+                  <a:lnTo>
+                    <a:pt x="2602746" y="524562"/>
+                  </a:lnTo>
+                  <a:lnTo>
+                    <a:pt x="2673090" y="533052"/>
+                  </a:lnTo>
+                  <a:lnTo>
+                    <a:pt x="2743435" y="541332"/>
+                  </a:lnTo>
+                  <a:lnTo>
+                    <a:pt x="2813779" y="549407"/>
+                  </a:lnTo>
+                  <a:lnTo>
+                    <a:pt x="2884124" y="557282"/>
+                  </a:lnTo>
+                  <a:lnTo>
+                    <a:pt x="2954468" y="564961"/>
+                  </a:lnTo>
+                  <a:lnTo>
+                    <a:pt x="3024813" y="568779"/>
+                  </a:lnTo>
+                  <a:lnTo>
+                    <a:pt x="3095157" y="570490"/>
+                  </a:lnTo>
+                  <a:lnTo>
+                    <a:pt x="3165502" y="572191"/>
+                  </a:lnTo>
+                  <a:lnTo>
+                    <a:pt x="3235846" y="573882"/>
+                  </a:lnTo>
+                  <a:lnTo>
+                    <a:pt x="3306191" y="575564"/>
+                  </a:lnTo>
+                  <a:lnTo>
+                    <a:pt x="3376535" y="577236"/>
+                  </a:lnTo>
+                  <a:lnTo>
+                    <a:pt x="3446880" y="578899"/>
+                  </a:lnTo>
+                  <a:lnTo>
+                    <a:pt x="3517224" y="580552"/>
+                  </a:lnTo>
+                  <a:lnTo>
+                    <a:pt x="3587569" y="582195"/>
+                  </a:lnTo>
+                  <a:lnTo>
+                    <a:pt x="3657913" y="583830"/>
+                  </a:lnTo>
+                  <a:lnTo>
+                    <a:pt x="3728257" y="585454"/>
+                  </a:lnTo>
+                  <a:lnTo>
+                    <a:pt x="3798602" y="587070"/>
+                  </a:lnTo>
+                  <a:lnTo>
+                    <a:pt x="3868946" y="588676"/>
+                  </a:lnTo>
+                  <a:lnTo>
+                    <a:pt x="3939291" y="590273"/>
+                  </a:lnTo>
+                  <a:lnTo>
+                    <a:pt x="4009635" y="591860"/>
+                  </a:lnTo>
+                  <a:lnTo>
+                    <a:pt x="4079980" y="593439"/>
+                  </a:lnTo>
+                  <a:lnTo>
+                    <a:pt x="4150324" y="595009"/>
+                  </a:lnTo>
+                  <a:lnTo>
+                    <a:pt x="4220669" y="596569"/>
+                  </a:lnTo>
+                  <a:lnTo>
+                    <a:pt x="4291013" y="598121"/>
+                  </a:lnTo>
+                  <a:lnTo>
+                    <a:pt x="4361358" y="599664"/>
+                  </a:lnTo>
+                  <a:lnTo>
+                    <a:pt x="4431702" y="601198"/>
+                  </a:lnTo>
+                  <a:lnTo>
+                    <a:pt x="4502047" y="602723"/>
+                  </a:lnTo>
+                  <a:lnTo>
+                    <a:pt x="4572391" y="604239"/>
+                  </a:lnTo>
+                  <a:lnTo>
+                    <a:pt x="4642736" y="605747"/>
+                  </a:lnTo>
+                  <a:lnTo>
+                    <a:pt x="4713080" y="607246"/>
+                  </a:lnTo>
+                  <a:lnTo>
+                    <a:pt x="4783425" y="608736"/>
+                  </a:lnTo>
+                  <a:lnTo>
+                    <a:pt x="4853769" y="610218"/>
+                  </a:lnTo>
+                  <a:lnTo>
+                    <a:pt x="4924114" y="611691"/>
+                  </a:lnTo>
+                  <a:lnTo>
+                    <a:pt x="4994458" y="613156"/>
+                  </a:lnTo>
+                  <a:lnTo>
+                    <a:pt x="5064803" y="614612"/>
+                  </a:lnTo>
+                  <a:lnTo>
+                    <a:pt x="5135147" y="616061"/>
+                  </a:lnTo>
+                  <a:lnTo>
+                    <a:pt x="5205492" y="617500"/>
+                  </a:lnTo>
+                  <a:lnTo>
+                    <a:pt x="5275836" y="618932"/>
+                  </a:lnTo>
+                  <a:lnTo>
+                    <a:pt x="5346181" y="620355"/>
+                  </a:lnTo>
+                  <a:lnTo>
+                    <a:pt x="5416525" y="621770"/>
+                  </a:lnTo>
+                  <a:lnTo>
+                    <a:pt x="5486870" y="623177"/>
+                  </a:lnTo>
+                  <a:lnTo>
+                    <a:pt x="5557214" y="624576"/>
+                  </a:lnTo>
+                  <a:lnTo>
+                    <a:pt x="5627559" y="625967"/>
+                  </a:lnTo>
+                  <a:lnTo>
+                    <a:pt x="5697903" y="627350"/>
+                  </a:lnTo>
+                  <a:lnTo>
+                    <a:pt x="5768248" y="628725"/>
+                  </a:lnTo>
+                  <a:lnTo>
+                    <a:pt x="5838592" y="630093"/>
+                  </a:lnTo>
+                  <a:lnTo>
+                    <a:pt x="5908937" y="631452"/>
+                  </a:lnTo>
+                  <a:lnTo>
+                    <a:pt x="5979281" y="632803"/>
+                  </a:lnTo>
+                  <a:lnTo>
+                    <a:pt x="6049626" y="634147"/>
+                  </a:lnTo>
+                  <a:lnTo>
+                    <a:pt x="6119970" y="635483"/>
+                  </a:lnTo>
+                  <a:lnTo>
+                    <a:pt x="6190315" y="636812"/>
+                  </a:lnTo>
+                  <a:lnTo>
+                    <a:pt x="6260659" y="638132"/>
+                  </a:lnTo>
+                  <a:lnTo>
+                    <a:pt x="6331004" y="639445"/>
+                  </a:lnTo>
+                  <a:lnTo>
+                    <a:pt x="6401348" y="640751"/>
+                  </a:lnTo>
+                  <a:lnTo>
+                    <a:pt x="6471693" y="642049"/>
+                  </a:lnTo>
+                  <a:lnTo>
+                    <a:pt x="6542037" y="643340"/>
+                  </a:lnTo>
+                  <a:lnTo>
+                    <a:pt x="6612382" y="644623"/>
+                  </a:lnTo>
+                  <a:lnTo>
+                    <a:pt x="6682726" y="645899"/>
+                  </a:lnTo>
+                  <a:lnTo>
+                    <a:pt x="6753071" y="647168"/>
+                  </a:lnTo>
+                  <a:lnTo>
+                    <a:pt x="6823415" y="648429"/>
+                  </a:lnTo>
+                  <a:lnTo>
+                    <a:pt x="6893760" y="649683"/>
+                  </a:lnTo>
+                  <a:lnTo>
+                    <a:pt x="6964104" y="650930"/>
+                  </a:lnTo>
+                  <a:lnTo>
+                    <a:pt x="6964104" y="794804"/>
+                  </a:lnTo>
+                  <a:lnTo>
+                    <a:pt x="6893760" y="792968"/>
+                  </a:lnTo>
+                  <a:lnTo>
+                    <a:pt x="6823415" y="791086"/>
+                  </a:lnTo>
+                  <a:lnTo>
+                    <a:pt x="6753071" y="789156"/>
+                  </a:lnTo>
+                  <a:lnTo>
+                    <a:pt x="6682726" y="787176"/>
+                  </a:lnTo>
+                  <a:lnTo>
+                    <a:pt x="6612382" y="785146"/>
+                  </a:lnTo>
+                  <a:lnTo>
+                    <a:pt x="6542037" y="783065"/>
+                  </a:lnTo>
+                  <a:lnTo>
+                    <a:pt x="6471693" y="780931"/>
+                  </a:lnTo>
+                  <a:lnTo>
+                    <a:pt x="6401348" y="778742"/>
+                  </a:lnTo>
+                  <a:lnTo>
+                    <a:pt x="6331004" y="776498"/>
+                  </a:lnTo>
+                  <a:lnTo>
+                    <a:pt x="6260659" y="774197"/>
+                  </a:lnTo>
+                  <a:lnTo>
+                    <a:pt x="6190315" y="771837"/>
+                  </a:lnTo>
+                  <a:lnTo>
+                    <a:pt x="6119970" y="769418"/>
+                  </a:lnTo>
+                  <a:lnTo>
+                    <a:pt x="6049626" y="766936"/>
+                  </a:lnTo>
+                  <a:lnTo>
+                    <a:pt x="5979281" y="764392"/>
+                  </a:lnTo>
+                  <a:lnTo>
+                    <a:pt x="5908937" y="761783"/>
+                  </a:lnTo>
+                  <a:lnTo>
+                    <a:pt x="5838592" y="759108"/>
+                  </a:lnTo>
+                  <a:lnTo>
+                    <a:pt x="5768248" y="756364"/>
+                  </a:lnTo>
+                  <a:lnTo>
+                    <a:pt x="5697903" y="753551"/>
+                  </a:lnTo>
+                  <a:lnTo>
+                    <a:pt x="5627559" y="750667"/>
+                  </a:lnTo>
+                  <a:lnTo>
+                    <a:pt x="5557214" y="747709"/>
+                  </a:lnTo>
+                  <a:lnTo>
+                    <a:pt x="5486870" y="744675"/>
+                  </a:lnTo>
+                  <a:lnTo>
+                    <a:pt x="5416525" y="741565"/>
+                  </a:lnTo>
+                  <a:lnTo>
+                    <a:pt x="5346181" y="738376"/>
+                  </a:lnTo>
+                  <a:lnTo>
+                    <a:pt x="5275836" y="735105"/>
+                  </a:lnTo>
+                  <a:lnTo>
+                    <a:pt x="5205492" y="731752"/>
+                  </a:lnTo>
+                  <a:lnTo>
+                    <a:pt x="5135147" y="728313"/>
+                  </a:lnTo>
+                  <a:lnTo>
+                    <a:pt x="5064803" y="724787"/>
+                  </a:lnTo>
+                  <a:lnTo>
+                    <a:pt x="4994458" y="721171"/>
+                  </a:lnTo>
+                  <a:lnTo>
+                    <a:pt x="4924114" y="717463"/>
+                  </a:lnTo>
+                  <a:lnTo>
+                    <a:pt x="4853769" y="713661"/>
+                  </a:lnTo>
+                  <a:lnTo>
+                    <a:pt x="4783425" y="709762"/>
+                  </a:lnTo>
+                  <a:lnTo>
+                    <a:pt x="4713080" y="705764"/>
+                  </a:lnTo>
+                  <a:lnTo>
+                    <a:pt x="4642736" y="701665"/>
+                  </a:lnTo>
+                  <a:lnTo>
+                    <a:pt x="4572391" y="697461"/>
+                  </a:lnTo>
+                  <a:lnTo>
+                    <a:pt x="4502047" y="693150"/>
+                  </a:lnTo>
+                  <a:lnTo>
+                    <a:pt x="4431702" y="688730"/>
+                  </a:lnTo>
+                  <a:lnTo>
+                    <a:pt x="4361358" y="684197"/>
+                  </a:lnTo>
+                  <a:lnTo>
+                    <a:pt x="4291013" y="679549"/>
+                  </a:lnTo>
+                  <a:lnTo>
+                    <a:pt x="4220669" y="674783"/>
+                  </a:lnTo>
+                  <a:lnTo>
+                    <a:pt x="4150324" y="669896"/>
+                  </a:lnTo>
+                  <a:lnTo>
+                    <a:pt x="4079980" y="664885"/>
+                  </a:lnTo>
+                  <a:lnTo>
+                    <a:pt x="4009635" y="659746"/>
+                  </a:lnTo>
+                  <a:lnTo>
+                    <a:pt x="3939291" y="654476"/>
+                  </a:lnTo>
+                  <a:lnTo>
+                    <a:pt x="3868946" y="649073"/>
+                  </a:lnTo>
+                  <a:lnTo>
+                    <a:pt x="3798602" y="643532"/>
+                  </a:lnTo>
+                  <a:lnTo>
+                    <a:pt x="3728257" y="637850"/>
+                  </a:lnTo>
+                  <a:lnTo>
+                    <a:pt x="3657913" y="632024"/>
+                  </a:lnTo>
+                  <a:lnTo>
+                    <a:pt x="3587569" y="626050"/>
+                  </a:lnTo>
+                  <a:lnTo>
+                    <a:pt x="3517224" y="619923"/>
+                  </a:lnTo>
+                  <a:lnTo>
+                    <a:pt x="3446880" y="613641"/>
+                  </a:lnTo>
+                  <a:lnTo>
+                    <a:pt x="3376535" y="607200"/>
+                  </a:lnTo>
+                  <a:lnTo>
+                    <a:pt x="3306191" y="600594"/>
+                  </a:lnTo>
+                  <a:lnTo>
+                    <a:pt x="3235846" y="593821"/>
+                  </a:lnTo>
+                  <a:lnTo>
+                    <a:pt x="3165502" y="586875"/>
+                  </a:lnTo>
+                  <a:lnTo>
+                    <a:pt x="3095157" y="579753"/>
+                  </a:lnTo>
+                  <a:lnTo>
+                    <a:pt x="3024813" y="572450"/>
+                  </a:lnTo>
+                  <a:lnTo>
+                    <a:pt x="2954468" y="567058"/>
+                  </a:lnTo>
+                  <a:lnTo>
+                    <a:pt x="2884124" y="565327"/>
+                  </a:lnTo>
+                  <a:lnTo>
+                    <a:pt x="2813779" y="563586"/>
+                  </a:lnTo>
+                  <a:lnTo>
+                    <a:pt x="2743435" y="561835"/>
+                  </a:lnTo>
+                  <a:lnTo>
+                    <a:pt x="2673090" y="560074"/>
+                  </a:lnTo>
+                  <a:lnTo>
+                    <a:pt x="2602746" y="558303"/>
+                  </a:lnTo>
+                  <a:lnTo>
+                    <a:pt x="2532401" y="556521"/>
+                  </a:lnTo>
+                  <a:lnTo>
+                    <a:pt x="2462057" y="554730"/>
+                  </a:lnTo>
+                  <a:lnTo>
+                    <a:pt x="2391712" y="552928"/>
+                  </a:lnTo>
+                  <a:lnTo>
+                    <a:pt x="2321368" y="551115"/>
+                  </a:lnTo>
+                  <a:lnTo>
+                    <a:pt x="2251023" y="549292"/>
+                  </a:lnTo>
+                  <a:lnTo>
+                    <a:pt x="2180679" y="547459"/>
+                  </a:lnTo>
+                  <a:lnTo>
+                    <a:pt x="2110334" y="545615"/>
+                  </a:lnTo>
+                  <a:lnTo>
+                    <a:pt x="2039990" y="543760"/>
+                  </a:lnTo>
+                  <a:lnTo>
+                    <a:pt x="1969645" y="541895"/>
+                  </a:lnTo>
+                  <a:lnTo>
+                    <a:pt x="1899301" y="540019"/>
+                  </a:lnTo>
+                  <a:lnTo>
+                    <a:pt x="1828956" y="538132"/>
+                  </a:lnTo>
+                  <a:lnTo>
+                    <a:pt x="1758612" y="536234"/>
+                  </a:lnTo>
+                  <a:lnTo>
+                    <a:pt x="1688267" y="534325"/>
+                  </a:lnTo>
+                  <a:lnTo>
+                    <a:pt x="1617923" y="532406"/>
+                  </a:lnTo>
+                  <a:lnTo>
+                    <a:pt x="1547578" y="530475"/>
+                  </a:lnTo>
+                  <a:lnTo>
+                    <a:pt x="1477234" y="528533"/>
+                  </a:lnTo>
+                  <a:lnTo>
+                    <a:pt x="1406889" y="526580"/>
+                  </a:lnTo>
+                  <a:lnTo>
+                    <a:pt x="1336545" y="524615"/>
+                  </a:lnTo>
+                  <a:lnTo>
+                    <a:pt x="1266200" y="522639"/>
+                  </a:lnTo>
+                  <a:lnTo>
+                    <a:pt x="1195856" y="520652"/>
+                  </a:lnTo>
+                  <a:lnTo>
+                    <a:pt x="1125511" y="518653"/>
+                  </a:lnTo>
+                  <a:lnTo>
+                    <a:pt x="1055167" y="516643"/>
+                  </a:lnTo>
+                  <a:lnTo>
+                    <a:pt x="984822" y="514621"/>
+                  </a:lnTo>
+                  <a:lnTo>
+                    <a:pt x="914478" y="512588"/>
+                  </a:lnTo>
+                  <a:lnTo>
+                    <a:pt x="844133" y="510543"/>
+                  </a:lnTo>
+                  <a:lnTo>
+                    <a:pt x="773789" y="508486"/>
+                  </a:lnTo>
+                  <a:lnTo>
+                    <a:pt x="703444" y="506417"/>
+                  </a:lnTo>
+                  <a:lnTo>
+                    <a:pt x="633100" y="504336"/>
+                  </a:lnTo>
+                  <a:lnTo>
+                    <a:pt x="562755" y="502243"/>
+                  </a:lnTo>
+                  <a:lnTo>
+                    <a:pt x="492411" y="500138"/>
+                  </a:lnTo>
+                  <a:lnTo>
+                    <a:pt x="422066" y="498021"/>
+                  </a:lnTo>
+                  <a:lnTo>
+                    <a:pt x="351722" y="495892"/>
+                  </a:lnTo>
+                  <a:lnTo>
+                    <a:pt x="281377" y="493750"/>
+                  </a:lnTo>
+                  <a:lnTo>
+                    <a:pt x="211033" y="491597"/>
+                  </a:lnTo>
+                  <a:lnTo>
+                    <a:pt x="140688" y="489430"/>
+                  </a:lnTo>
+                  <a:lnTo>
+                    <a:pt x="70344" y="487251"/>
+                  </a:lnTo>
+                  <a:lnTo>
+                    <a:pt x="0" y="485060"/>
+                  </a:lnTo>
+                  <a:close/>
+                </a:path>
+              </a:pathLst>
+            </a:custGeom>
+            <a:solidFill>
+              <a:srgbClr val="FF8C00">
+                <a:alpha val="20000"/>
+              </a:srgbClr>
+            </a:solidFill>
+          </p:spPr>
+          <p:txBody>
+            <a:bodyPr/>
+            <a:lstStyle/>
+            <a:p/>
+          </p:txBody>
+        </p:sp>
+        <p:sp>
+          <p:nvSpPr>
+            <p:cNvPr id="71" name="pl71"/>
+            <p:cNvSpPr/>
+            <p:nvPr/>
+          </p:nvSpPr>
+          <p:spPr>
+            <a:xfrm>
+              <a:off x="1235312" y="4726674"/>
+              <a:ext cx="6964104" cy="650930"/>
+            </a:xfrm>
+            <a:custGeom>
+              <a:avLst/>
+              <a:pathLst>
+                <a:path w="6964104" h="650930">
+                  <a:moveTo>
+                    <a:pt x="0" y="0"/>
+                  </a:moveTo>
+                  <a:lnTo>
+                    <a:pt x="70344" y="21496"/>
+                  </a:lnTo>
+                  <a:lnTo>
+                    <a:pt x="140688" y="42459"/>
+                  </a:lnTo>
+                  <a:lnTo>
+                    <a:pt x="211033" y="62903"/>
+                  </a:lnTo>
+                  <a:lnTo>
+                    <a:pt x="281377" y="82840"/>
+                  </a:lnTo>
+                  <a:lnTo>
+                    <a:pt x="351722" y="102282"/>
+                  </a:lnTo>
+                  <a:lnTo>
+                    <a:pt x="422066" y="121242"/>
+                  </a:lnTo>
+                  <a:lnTo>
+                    <a:pt x="492411" y="139733"/>
+                  </a:lnTo>
+                  <a:lnTo>
+                    <a:pt x="562755" y="157765"/>
+                  </a:lnTo>
+                  <a:lnTo>
+                    <a:pt x="633100" y="175349"/>
+                  </a:lnTo>
+                  <a:lnTo>
+                    <a:pt x="703444" y="192498"/>
+                  </a:lnTo>
+                  <a:lnTo>
+                    <a:pt x="773789" y="209222"/>
+                  </a:lnTo>
+                  <a:lnTo>
+                    <a:pt x="844133" y="225531"/>
+                  </a:lnTo>
+                  <a:lnTo>
+                    <a:pt x="914478" y="241435"/>
+                  </a:lnTo>
+                  <a:lnTo>
+                    <a:pt x="984822" y="256946"/>
+                  </a:lnTo>
+                  <a:lnTo>
+                    <a:pt x="1055167" y="272071"/>
+                  </a:lnTo>
+                  <a:lnTo>
+                    <a:pt x="1125511" y="286822"/>
+                  </a:lnTo>
+                  <a:lnTo>
+                    <a:pt x="1195856" y="301207"/>
+                  </a:lnTo>
+                  <a:lnTo>
+                    <a:pt x="1266200" y="315235"/>
+                  </a:lnTo>
+                  <a:lnTo>
+                    <a:pt x="1336545" y="328916"/>
+                  </a:lnTo>
+                  <a:lnTo>
+                    <a:pt x="1406889" y="342257"/>
+                  </a:lnTo>
+                  <a:lnTo>
+                    <a:pt x="1477234" y="355268"/>
+                  </a:lnTo>
+                  <a:lnTo>
+                    <a:pt x="1547578" y="367956"/>
+                  </a:lnTo>
+                  <a:lnTo>
+                    <a:pt x="1617923" y="380329"/>
+                  </a:lnTo>
+                  <a:lnTo>
+                    <a:pt x="1688267" y="392396"/>
+                  </a:lnTo>
+                  <a:lnTo>
+                    <a:pt x="1758612" y="404163"/>
+                  </a:lnTo>
+                  <a:lnTo>
+                    <a:pt x="1828956" y="415639"/>
+                  </a:lnTo>
+                  <a:lnTo>
+                    <a:pt x="1899301" y="426830"/>
+                  </a:lnTo>
+                  <a:lnTo>
+                    <a:pt x="1969645" y="437744"/>
+                  </a:lnTo>
+                  <a:lnTo>
+                    <a:pt x="2039990" y="448387"/>
+                  </a:lnTo>
+                  <a:lnTo>
+                    <a:pt x="2110334" y="458766"/>
+                  </a:lnTo>
+                  <a:lnTo>
+                    <a:pt x="2180679" y="468888"/>
+                  </a:lnTo>
+                  <a:lnTo>
+                    <a:pt x="2251023" y="478759"/>
+                  </a:lnTo>
+                  <a:lnTo>
+                    <a:pt x="2321368" y="488385"/>
+                  </a:lnTo>
+                  <a:lnTo>
+                    <a:pt x="2391712" y="497773"/>
+                  </a:lnTo>
+                  <a:lnTo>
+                    <a:pt x="2462057" y="506927"/>
+                  </a:lnTo>
+                  <a:lnTo>
+                    <a:pt x="2532401" y="515855"/>
+                  </a:lnTo>
+                  <a:lnTo>
+                    <a:pt x="2602746" y="524562"/>
+                  </a:lnTo>
+                  <a:lnTo>
+                    <a:pt x="2673090" y="533052"/>
+                  </a:lnTo>
+                  <a:lnTo>
+                    <a:pt x="2743435" y="541332"/>
+                  </a:lnTo>
+                  <a:lnTo>
+                    <a:pt x="2813779" y="549407"/>
+                  </a:lnTo>
+                  <a:lnTo>
+                    <a:pt x="2884124" y="557282"/>
+                  </a:lnTo>
+                  <a:lnTo>
+                    <a:pt x="2954468" y="564961"/>
+                  </a:lnTo>
+                  <a:lnTo>
+                    <a:pt x="3024813" y="568779"/>
+                  </a:lnTo>
+                  <a:lnTo>
+                    <a:pt x="3095157" y="570490"/>
+                  </a:lnTo>
+                  <a:lnTo>
+                    <a:pt x="3165502" y="572191"/>
+                  </a:lnTo>
+                  <a:lnTo>
+                    <a:pt x="3235846" y="573882"/>
+                  </a:lnTo>
+                  <a:lnTo>
+                    <a:pt x="3306191" y="575564"/>
+                  </a:lnTo>
+                  <a:lnTo>
+                    <a:pt x="3376535" y="577236"/>
+                  </a:lnTo>
+                  <a:lnTo>
+                    <a:pt x="3446880" y="578899"/>
+                  </a:lnTo>
+                  <a:lnTo>
+                    <a:pt x="3517224" y="580552"/>
+                  </a:lnTo>
+                  <a:lnTo>
+                    <a:pt x="3587569" y="582195"/>
+                  </a:lnTo>
+                  <a:lnTo>
+                    <a:pt x="3657913" y="583830"/>
+                  </a:lnTo>
+                  <a:lnTo>
+                    <a:pt x="3728257" y="585454"/>
+                  </a:lnTo>
+                  <a:lnTo>
+                    <a:pt x="3798602" y="587070"/>
+                  </a:lnTo>
+                  <a:lnTo>
+                    <a:pt x="3868946" y="588676"/>
+                  </a:lnTo>
+                  <a:lnTo>
+                    <a:pt x="3939291" y="590273"/>
+                  </a:lnTo>
+                  <a:lnTo>
+                    <a:pt x="4009635" y="591860"/>
+                  </a:lnTo>
+                  <a:lnTo>
+                    <a:pt x="4079980" y="593439"/>
+                  </a:lnTo>
+                  <a:lnTo>
+                    <a:pt x="4150324" y="595009"/>
+                  </a:lnTo>
+                  <a:lnTo>
+                    <a:pt x="4220669" y="596569"/>
+                  </a:lnTo>
+                  <a:lnTo>
+                    <a:pt x="4291013" y="598121"/>
+                  </a:lnTo>
+                  <a:lnTo>
+                    <a:pt x="4361358" y="599664"/>
+                  </a:lnTo>
+                  <a:lnTo>
+                    <a:pt x="4431702" y="601198"/>
+                  </a:lnTo>
+                  <a:lnTo>
+                    <a:pt x="4502047" y="602723"/>
+                  </a:lnTo>
+                  <a:lnTo>
+                    <a:pt x="4572391" y="604239"/>
+                  </a:lnTo>
+                  <a:lnTo>
+                    <a:pt x="4642736" y="605747"/>
+                  </a:lnTo>
+                  <a:lnTo>
+                    <a:pt x="4713080" y="607246"/>
+                  </a:lnTo>
+                  <a:lnTo>
+                    <a:pt x="4783425" y="608736"/>
+                  </a:lnTo>
+                  <a:lnTo>
+                    <a:pt x="4853769" y="610218"/>
+                  </a:lnTo>
+                  <a:lnTo>
+                    <a:pt x="4924114" y="611691"/>
+                  </a:lnTo>
+                  <a:lnTo>
+                    <a:pt x="4994458" y="613156"/>
+                  </a:lnTo>
+                  <a:lnTo>
+                    <a:pt x="5064803" y="614612"/>
+                  </a:lnTo>
+                  <a:lnTo>
+                    <a:pt x="5135147" y="616061"/>
+                  </a:lnTo>
+                  <a:lnTo>
+                    <a:pt x="5205492" y="617500"/>
+                  </a:lnTo>
+                  <a:lnTo>
+                    <a:pt x="5275836" y="618932"/>
+                  </a:lnTo>
+                  <a:lnTo>
+                    <a:pt x="5346181" y="620355"/>
+                  </a:lnTo>
+                  <a:lnTo>
+                    <a:pt x="5416525" y="621770"/>
+                  </a:lnTo>
+                  <a:lnTo>
+                    <a:pt x="5486870" y="623177"/>
+                  </a:lnTo>
+                  <a:lnTo>
+                    <a:pt x="5557214" y="624576"/>
+                  </a:lnTo>
+                  <a:lnTo>
+                    <a:pt x="5627559" y="625967"/>
+                  </a:lnTo>
+                  <a:lnTo>
+                    <a:pt x="5697903" y="627350"/>
+                  </a:lnTo>
+                  <a:lnTo>
+                    <a:pt x="5768248" y="628725"/>
+                  </a:lnTo>
+                  <a:lnTo>
+                    <a:pt x="5838592" y="630093"/>
+                  </a:lnTo>
+                  <a:lnTo>
+                    <a:pt x="5908937" y="631452"/>
+                  </a:lnTo>
+                  <a:lnTo>
+                    <a:pt x="5979281" y="632803"/>
+                  </a:lnTo>
+                  <a:lnTo>
+                    <a:pt x="6049626" y="634147"/>
+                  </a:lnTo>
+                  <a:lnTo>
+                    <a:pt x="6119970" y="635483"/>
+                  </a:lnTo>
+                  <a:lnTo>
+                    <a:pt x="6190315" y="636812"/>
+                  </a:lnTo>
+                  <a:lnTo>
+                    <a:pt x="6260659" y="638132"/>
+                  </a:lnTo>
+                  <a:lnTo>
+                    <a:pt x="6331004" y="639445"/>
+                  </a:lnTo>
+                  <a:lnTo>
+                    <a:pt x="6401348" y="640751"/>
+                  </a:lnTo>
+                  <a:lnTo>
+                    <a:pt x="6471693" y="642049"/>
+                  </a:lnTo>
+                  <a:lnTo>
+                    <a:pt x="6542037" y="643340"/>
+                  </a:lnTo>
+                  <a:lnTo>
+                    <a:pt x="6612382" y="644623"/>
+                  </a:lnTo>
+                  <a:lnTo>
+                    <a:pt x="6682726" y="645899"/>
+                  </a:lnTo>
+                  <a:lnTo>
+                    <a:pt x="6753071" y="647168"/>
+                  </a:lnTo>
+                  <a:lnTo>
+                    <a:pt x="6823415" y="648429"/>
+                  </a:lnTo>
+                  <a:lnTo>
+                    <a:pt x="6893760" y="649683"/>
+                  </a:lnTo>
+                  <a:lnTo>
+                    <a:pt x="6964104" y="650930"/>
+                  </a:lnTo>
+                </a:path>
+              </a:pathLst>
+            </a:custGeom>
+          </p:spPr>
+          <p:txBody>
+            <a:bodyPr/>
+            <a:lstStyle/>
+            <a:p/>
+          </p:txBody>
+        </p:sp>
+        <p:sp>
+          <p:nvSpPr>
+            <p:cNvPr id="72" name="pl72"/>
+            <p:cNvSpPr/>
+            <p:nvPr/>
+          </p:nvSpPr>
+          <p:spPr>
+            <a:xfrm>
+              <a:off x="1235312" y="5211734"/>
+              <a:ext cx="6964104" cy="309744"/>
+            </a:xfrm>
+            <a:custGeom>
+              <a:avLst/>
+              <a:pathLst>
+                <a:path w="6964104" h="309744">
+                  <a:moveTo>
+                    <a:pt x="6964104" y="309744"/>
+                  </a:moveTo>
+                  <a:lnTo>
+                    <a:pt x="6893760" y="307908"/>
+                  </a:lnTo>
+                  <a:lnTo>
+                    <a:pt x="6823415" y="306025"/>
+                  </a:lnTo>
+                  <a:lnTo>
+                    <a:pt x="6753071" y="304095"/>
+                  </a:lnTo>
+                  <a:lnTo>
+                    <a:pt x="6682726" y="302116"/>
+                  </a:lnTo>
+                  <a:lnTo>
+                    <a:pt x="6612382" y="300086"/>
+                  </a:lnTo>
+                  <a:lnTo>
+                    <a:pt x="6542037" y="298005"/>
+                  </a:lnTo>
+                  <a:lnTo>
+                    <a:pt x="6471693" y="295870"/>
+                  </a:lnTo>
+                  <a:lnTo>
+                    <a:pt x="6401348" y="293682"/>
+                  </a:lnTo>
+                  <a:lnTo>
+                    <a:pt x="6331004" y="291438"/>
+                  </a:lnTo>
+                  <a:lnTo>
+                    <a:pt x="6260659" y="289136"/>
+                  </a:lnTo>
+                  <a:lnTo>
+                    <a:pt x="6190315" y="286777"/>
+                  </a:lnTo>
+                  <a:lnTo>
+                    <a:pt x="6119970" y="284357"/>
+                  </a:lnTo>
+                  <a:lnTo>
+                    <a:pt x="6049626" y="281876"/>
+                  </a:lnTo>
+                  <a:lnTo>
+                    <a:pt x="5979281" y="279331"/>
+                  </a:lnTo>
+                  <a:lnTo>
+                    <a:pt x="5908937" y="276722"/>
+                  </a:lnTo>
+                  <a:lnTo>
+                    <a:pt x="5838592" y="274047"/>
+                  </a:lnTo>
+                  <a:lnTo>
+                    <a:pt x="5768248" y="271304"/>
+                  </a:lnTo>
+                  <a:lnTo>
+                    <a:pt x="5697903" y="268491"/>
+                  </a:lnTo>
+                  <a:lnTo>
+                    <a:pt x="5627559" y="265606"/>
+                  </a:lnTo>
+                  <a:lnTo>
+                    <a:pt x="5557214" y="262648"/>
+                  </a:lnTo>
+                  <a:lnTo>
+                    <a:pt x="5486870" y="259615"/>
+                  </a:lnTo>
+                  <a:lnTo>
+                    <a:pt x="5416525" y="256505"/>
+                  </a:lnTo>
+                  <a:lnTo>
+                    <a:pt x="5346181" y="253315"/>
+                  </a:lnTo>
+                  <a:lnTo>
+                    <a:pt x="5275836" y="250045"/>
+                  </a:lnTo>
+                  <a:lnTo>
+                    <a:pt x="5205492" y="246691"/>
+                  </a:lnTo>
+                  <a:lnTo>
+                    <a:pt x="5135147" y="243252"/>
+                  </a:lnTo>
+                  <a:lnTo>
+                    <a:pt x="5064803" y="239726"/>
+                  </a:lnTo>
+                  <a:lnTo>
+                    <a:pt x="4994458" y="236110"/>
+                  </a:lnTo>
+                  <a:lnTo>
+                    <a:pt x="4924114" y="232402"/>
+                  </a:lnTo>
+                  <a:lnTo>
+                    <a:pt x="4853769" y="228600"/>
+                  </a:lnTo>
+                  <a:lnTo>
+                    <a:pt x="4783425" y="224701"/>
+                  </a:lnTo>
+                  <a:lnTo>
+                    <a:pt x="4713080" y="220704"/>
+                  </a:lnTo>
+                  <a:lnTo>
+                    <a:pt x="4642736" y="216604"/>
+                  </a:lnTo>
+                  <a:lnTo>
+                    <a:pt x="4572391" y="212400"/>
+                  </a:lnTo>
+                  <a:lnTo>
+                    <a:pt x="4502047" y="208090"/>
+                  </a:lnTo>
+                  <a:lnTo>
+                    <a:pt x="4431702" y="203669"/>
+                  </a:lnTo>
+                  <a:lnTo>
+                    <a:pt x="4361358" y="199137"/>
+                  </a:lnTo>
+                  <a:lnTo>
+                    <a:pt x="4291013" y="194489"/>
+                  </a:lnTo>
+                  <a:lnTo>
+                    <a:pt x="4220669" y="189723"/>
+                  </a:lnTo>
+                  <a:lnTo>
+                    <a:pt x="4150324" y="184836"/>
+                  </a:lnTo>
+                  <a:lnTo>
+                    <a:pt x="4079980" y="179824"/>
+                  </a:lnTo>
+                  <a:lnTo>
+                    <a:pt x="4009635" y="174685"/>
+                  </a:lnTo>
+                  <a:lnTo>
+                    <a:pt x="3939291" y="169416"/>
+                  </a:lnTo>
+                  <a:lnTo>
+                    <a:pt x="3868946" y="164012"/>
+                  </a:lnTo>
+                  <a:lnTo>
+                    <a:pt x="3798602" y="158471"/>
+                  </a:lnTo>
+                  <a:lnTo>
+                    <a:pt x="3728257" y="152790"/>
+                  </a:lnTo>
+                  <a:lnTo>
+                    <a:pt x="3657913" y="146963"/>
+                  </a:lnTo>
+                  <a:lnTo>
+                    <a:pt x="3587569" y="140989"/>
+                  </a:lnTo>
+                  <a:lnTo>
+                    <a:pt x="3517224" y="134863"/>
+                  </a:lnTo>
+                  <a:lnTo>
+                    <a:pt x="3446880" y="128581"/>
+                  </a:lnTo>
+                  <a:lnTo>
+                    <a:pt x="3376535" y="122139"/>
+                  </a:lnTo>
+                  <a:lnTo>
+                    <a:pt x="3306191" y="115534"/>
+                  </a:lnTo>
+                  <a:lnTo>
+                    <a:pt x="3235846" y="108760"/>
+                  </a:lnTo>
+                  <a:lnTo>
+                    <a:pt x="3165502" y="101815"/>
+                  </a:lnTo>
+                  <a:lnTo>
+                    <a:pt x="3095157" y="94693"/>
+                  </a:lnTo>
+                  <a:lnTo>
+                    <a:pt x="3024813" y="87389"/>
+                  </a:lnTo>
+                  <a:lnTo>
+                    <a:pt x="2954468" y="81997"/>
+                  </a:lnTo>
+                  <a:lnTo>
+                    <a:pt x="2884124" y="80266"/>
+                  </a:lnTo>
+                  <a:lnTo>
+                    <a:pt x="2813779" y="78525"/>
+                  </a:lnTo>
+                  <a:lnTo>
+                    <a:pt x="2743435" y="76774"/>
+                  </a:lnTo>
+                  <a:lnTo>
+                    <a:pt x="2673090" y="75013"/>
+                  </a:lnTo>
+                  <a:lnTo>
+                    <a:pt x="2602746" y="73242"/>
+                  </a:lnTo>
+                  <a:lnTo>
+                    <a:pt x="2532401" y="71461"/>
+                  </a:lnTo>
+                  <a:lnTo>
+                    <a:pt x="2462057" y="69669"/>
+                  </a:lnTo>
+                  <a:lnTo>
+                    <a:pt x="2391712" y="67867"/>
+                  </a:lnTo>
+                  <a:lnTo>
+                    <a:pt x="2321368" y="66055"/>
+                  </a:lnTo>
+                  <a:lnTo>
+                    <a:pt x="2251023" y="64232"/>
+                  </a:lnTo>
+                  <a:lnTo>
+                    <a:pt x="2180679" y="62398"/>
+                  </a:lnTo>
+                  <a:lnTo>
+                    <a:pt x="2110334" y="60554"/>
+                  </a:lnTo>
+                  <a:lnTo>
+                    <a:pt x="2039990" y="58700"/>
+                  </a:lnTo>
+                  <a:lnTo>
+                    <a:pt x="1969645" y="56834"/>
+                  </a:lnTo>
+                  <a:lnTo>
+                    <a:pt x="1899301" y="54958"/>
+                  </a:lnTo>
+                  <a:lnTo>
+                    <a:pt x="1828956" y="53071"/>
+                  </a:lnTo>
+                  <a:lnTo>
+                    <a:pt x="1758612" y="51174"/>
+                  </a:lnTo>
+                  <a:lnTo>
+                    <a:pt x="1688267" y="49265"/>
+                  </a:lnTo>
+                  <a:lnTo>
+                    <a:pt x="1617923" y="47345"/>
+                  </a:lnTo>
+                  <a:lnTo>
+                    <a:pt x="1547578" y="45414"/>
+                  </a:lnTo>
+                  <a:lnTo>
+                    <a:pt x="1477234" y="43472"/>
+                  </a:lnTo>
+                  <a:lnTo>
+                    <a:pt x="1406889" y="41519"/>
+                  </a:lnTo>
+                  <a:lnTo>
+                    <a:pt x="1336545" y="39555"/>
+                  </a:lnTo>
+                  <a:lnTo>
+                    <a:pt x="1266200" y="37579"/>
+                  </a:lnTo>
+                  <a:lnTo>
+                    <a:pt x="1195856" y="35592"/>
+                  </a:lnTo>
+                  <a:lnTo>
+                    <a:pt x="1125511" y="33593"/>
+                  </a:lnTo>
+                  <a:lnTo>
+                    <a:pt x="1055167" y="31583"/>
+                  </a:lnTo>
+                  <a:lnTo>
+                    <a:pt x="984822" y="29561"/>
+                  </a:lnTo>
+                  <a:lnTo>
+                    <a:pt x="914478" y="27527"/>
+                  </a:lnTo>
+                  <a:lnTo>
+                    <a:pt x="844133" y="25482"/>
+                  </a:lnTo>
+                  <a:lnTo>
+                    <a:pt x="773789" y="23425"/>
+                  </a:lnTo>
+                  <a:lnTo>
+                    <a:pt x="703444" y="21356"/>
+                  </a:lnTo>
+                  <a:lnTo>
+                    <a:pt x="633100" y="19276"/>
+                  </a:lnTo>
+                  <a:lnTo>
+                    <a:pt x="562755" y="17183"/>
+                  </a:lnTo>
+                  <a:lnTo>
+                    <a:pt x="492411" y="15078"/>
+                  </a:lnTo>
+                  <a:lnTo>
+                    <a:pt x="422066" y="12961"/>
+                  </a:lnTo>
+                  <a:lnTo>
+                    <a:pt x="351722" y="10832"/>
+                  </a:lnTo>
+                  <a:lnTo>
+                    <a:pt x="281377" y="8690"/>
+                  </a:lnTo>
+                  <a:lnTo>
+                    <a:pt x="211033" y="6536"/>
+                  </a:lnTo>
+                  <a:lnTo>
+                    <a:pt x="140688" y="4370"/>
+                  </a:lnTo>
+                  <a:lnTo>
+                    <a:pt x="70344" y="2191"/>
+                  </a:lnTo>
+                  <a:lnTo>
+                    <a:pt x="0" y="0"/>
+                  </a:lnTo>
+                </a:path>
+              </a:pathLst>
+            </a:custGeom>
+          </p:spPr>
+          <p:txBody>
+            <a:bodyPr/>
+            <a:lstStyle/>
+            <a:p/>
+          </p:txBody>
+        </p:sp>
+        <p:sp>
+          <p:nvSpPr>
+            <p:cNvPr id="73" name="pl73"/>
+            <p:cNvSpPr/>
+            <p:nvPr/>
+          </p:nvSpPr>
+          <p:spPr>
+            <a:xfrm>
+              <a:off x="1235312" y="5018224"/>
+              <a:ext cx="6964104" cy="450551"/>
+            </a:xfrm>
+            <a:custGeom>
+              <a:avLst/>
+              <a:pathLst>
+                <a:path w="6964104" h="450551">
+                  <a:moveTo>
+                    <a:pt x="0" y="0"/>
+                  </a:moveTo>
+                  <a:lnTo>
+                    <a:pt x="70344" y="8811"/>
+                  </a:lnTo>
+                  <a:lnTo>
+                    <a:pt x="140688" y="17487"/>
+                  </a:lnTo>
+                  <a:lnTo>
+                    <a:pt x="211033" y="26031"/>
+                  </a:lnTo>
+                  <a:lnTo>
+                    <a:pt x="281377" y="34443"/>
+                  </a:lnTo>
+                  <a:lnTo>
+                    <a:pt x="351722" y="42727"/>
+                  </a:lnTo>
+                  <a:lnTo>
+                    <a:pt x="422066" y="50884"/>
+                  </a:lnTo>
+                  <a:lnTo>
+                    <a:pt x="492411" y="58916"/>
+                  </a:lnTo>
+                  <a:lnTo>
+                    <a:pt x="562755" y="66825"/>
+                  </a:lnTo>
+                  <a:lnTo>
+                    <a:pt x="633100" y="74613"/>
+                  </a:lnTo>
+                  <a:lnTo>
+                    <a:pt x="703444" y="82282"/>
+                  </a:lnTo>
+                  <a:lnTo>
+                    <a:pt x="773789" y="89834"/>
+                  </a:lnTo>
+                  <a:lnTo>
+                    <a:pt x="844133" y="97269"/>
+                  </a:lnTo>
+                  <a:lnTo>
+                    <a:pt x="914478" y="104591"/>
+                  </a:lnTo>
+                  <a:lnTo>
+                    <a:pt x="984822" y="111801"/>
+                  </a:lnTo>
+                  <a:lnTo>
+                    <a:pt x="1055167" y="118900"/>
+                  </a:lnTo>
+                  <a:lnTo>
+                    <a:pt x="1125511" y="125891"/>
+                  </a:lnTo>
+                  <a:lnTo>
+                    <a:pt x="1195856" y="132775"/>
+                  </a:lnTo>
+                  <a:lnTo>
+                    <a:pt x="1266200" y="139553"/>
+                  </a:lnTo>
+                  <a:lnTo>
+                    <a:pt x="1336545" y="146227"/>
+                  </a:lnTo>
+                  <a:lnTo>
+                    <a:pt x="1406889" y="152800"/>
+                  </a:lnTo>
+                  <a:lnTo>
+                    <a:pt x="1477234" y="159271"/>
+                  </a:lnTo>
+                  <a:lnTo>
+                    <a:pt x="1547578" y="165644"/>
+                  </a:lnTo>
+                  <a:lnTo>
+                    <a:pt x="1617923" y="171919"/>
+                  </a:lnTo>
+                  <a:lnTo>
+                    <a:pt x="1688267" y="178098"/>
+                  </a:lnTo>
+                  <a:lnTo>
+                    <a:pt x="1758612" y="184182"/>
+                  </a:lnTo>
+                  <a:lnTo>
+                    <a:pt x="1828956" y="190173"/>
+                  </a:lnTo>
+                  <a:lnTo>
+                    <a:pt x="1899301" y="196072"/>
+                  </a:lnTo>
+                  <a:lnTo>
+                    <a:pt x="1969645" y="201881"/>
+                  </a:lnTo>
+                  <a:lnTo>
+                    <a:pt x="2039990" y="207602"/>
+                  </a:lnTo>
+                  <a:lnTo>
+                    <a:pt x="2110334" y="213234"/>
+                  </a:lnTo>
+                  <a:lnTo>
+                    <a:pt x="2180679" y="218780"/>
+                  </a:lnTo>
+                  <a:lnTo>
+                    <a:pt x="2251023" y="224242"/>
+                  </a:lnTo>
+                  <a:lnTo>
+                    <a:pt x="2321368" y="229620"/>
+                  </a:lnTo>
+                  <a:lnTo>
+                    <a:pt x="2391712" y="234915"/>
+                  </a:lnTo>
+                  <a:lnTo>
+                    <a:pt x="2462057" y="240129"/>
+                  </a:lnTo>
+                  <a:lnTo>
+                    <a:pt x="2532401" y="245264"/>
+                  </a:lnTo>
+                  <a:lnTo>
+                    <a:pt x="2602746" y="250320"/>
+                  </a:lnTo>
+                  <a:lnTo>
+                    <a:pt x="2673090" y="255298"/>
+                  </a:lnTo>
+                  <a:lnTo>
+                    <a:pt x="2743435" y="260200"/>
+                  </a:lnTo>
+                  <a:lnTo>
+                    <a:pt x="2813779" y="265027"/>
+                  </a:lnTo>
+                  <a:lnTo>
+                    <a:pt x="2884124" y="269781"/>
+                  </a:lnTo>
+                  <a:lnTo>
+                    <a:pt x="2954468" y="274461"/>
+                  </a:lnTo>
+                  <a:lnTo>
+                    <a:pt x="3024813" y="279070"/>
+                  </a:lnTo>
+                  <a:lnTo>
+                    <a:pt x="3095157" y="283608"/>
+                  </a:lnTo>
+                  <a:lnTo>
+                    <a:pt x="3165502" y="288077"/>
+                  </a:lnTo>
+                  <a:lnTo>
+                    <a:pt x="3235846" y="292477"/>
+                  </a:lnTo>
+                  <a:lnTo>
+                    <a:pt x="3306191" y="296810"/>
+                  </a:lnTo>
+                  <a:lnTo>
+                    <a:pt x="3376535" y="301077"/>
+                  </a:lnTo>
+                  <a:lnTo>
+                    <a:pt x="3446880" y="305278"/>
+                  </a:lnTo>
+                  <a:lnTo>
+                    <a:pt x="3517224" y="309415"/>
+                  </a:lnTo>
+                  <a:lnTo>
+                    <a:pt x="3587569" y="313489"/>
+                  </a:lnTo>
+                  <a:lnTo>
+                    <a:pt x="3657913" y="317500"/>
+                  </a:lnTo>
+                  <a:lnTo>
+                    <a:pt x="3728257" y="321450"/>
+                  </a:lnTo>
+                  <a:lnTo>
+                    <a:pt x="3798602" y="325339"/>
+                  </a:lnTo>
+                  <a:lnTo>
+                    <a:pt x="3868946" y="329169"/>
+                  </a:lnTo>
+                  <a:lnTo>
+                    <a:pt x="3939291" y="332940"/>
+                  </a:lnTo>
+                  <a:lnTo>
+                    <a:pt x="4009635" y="336653"/>
+                  </a:lnTo>
+                  <a:lnTo>
+                    <a:pt x="4079980" y="340310"/>
+                  </a:lnTo>
+                  <a:lnTo>
+                    <a:pt x="4150324" y="343910"/>
+                  </a:lnTo>
+                  <a:lnTo>
+                    <a:pt x="4220669" y="347456"/>
+                  </a:lnTo>
+                  <a:lnTo>
+                    <a:pt x="4291013" y="350947"/>
+                  </a:lnTo>
+                  <a:lnTo>
+                    <a:pt x="4361358" y="354385"/>
+                  </a:lnTo>
+                  <a:lnTo>
+                    <a:pt x="4431702" y="357770"/>
+                  </a:lnTo>
+                  <a:lnTo>
+                    <a:pt x="4502047" y="361103"/>
+                  </a:lnTo>
+                  <a:lnTo>
+                    <a:pt x="4572391" y="364385"/>
+                  </a:lnTo>
+                  <a:lnTo>
+                    <a:pt x="4642736" y="367617"/>
+                  </a:lnTo>
+                  <a:lnTo>
+                    <a:pt x="4713080" y="370799"/>
+                  </a:lnTo>
+                  <a:lnTo>
+                    <a:pt x="4783425" y="373933"/>
+                  </a:lnTo>
+                  <a:lnTo>
+                    <a:pt x="4853769" y="377019"/>
+                  </a:lnTo>
+                  <a:lnTo>
+                    <a:pt x="4924114" y="380057"/>
+                  </a:lnTo>
+                  <a:lnTo>
+                    <a:pt x="4994458" y="383049"/>
+                  </a:lnTo>
+                  <a:lnTo>
+                    <a:pt x="5064803" y="385995"/>
+                  </a:lnTo>
+                  <a:lnTo>
+                    <a:pt x="5135147" y="388896"/>
+                  </a:lnTo>
+                  <a:lnTo>
+                    <a:pt x="5205492" y="391753"/>
+                  </a:lnTo>
+                  <a:lnTo>
+                    <a:pt x="5275836" y="394566"/>
+                  </a:lnTo>
+                  <a:lnTo>
+                    <a:pt x="5346181" y="397336"/>
+                  </a:lnTo>
+                  <a:lnTo>
+                    <a:pt x="5416525" y="400063"/>
+                  </a:lnTo>
+                  <a:lnTo>
+                    <a:pt x="5486870" y="402749"/>
+                  </a:lnTo>
+                  <a:lnTo>
+                    <a:pt x="5557214" y="405393"/>
+                  </a:lnTo>
+                  <a:lnTo>
+                    <a:pt x="5627559" y="407997"/>
+                  </a:lnTo>
+                  <a:lnTo>
+                    <a:pt x="5697903" y="410561"/>
+                  </a:lnTo>
+                  <a:lnTo>
+                    <a:pt x="5768248" y="413086"/>
+                  </a:lnTo>
+                  <a:lnTo>
+                    <a:pt x="5838592" y="415573"/>
+                  </a:lnTo>
+                  <a:lnTo>
+                    <a:pt x="5908937" y="418021"/>
+                  </a:lnTo>
+                  <a:lnTo>
+                    <a:pt x="5979281" y="420431"/>
+                  </a:lnTo>
+                  <a:lnTo>
+                    <a:pt x="6049626" y="422805"/>
+                  </a:lnTo>
+                  <a:lnTo>
+                    <a:pt x="6119970" y="425143"/>
+                  </a:lnTo>
+                  <a:lnTo>
+                    <a:pt x="6190315" y="427444"/>
+                  </a:lnTo>
+                  <a:lnTo>
+                    <a:pt x="6260659" y="429711"/>
+                  </a:lnTo>
+                  <a:lnTo>
+                    <a:pt x="6331004" y="431942"/>
+                  </a:lnTo>
+                  <a:lnTo>
+                    <a:pt x="6401348" y="434140"/>
+                  </a:lnTo>
+                  <a:lnTo>
+                    <a:pt x="6471693" y="436304"/>
+                  </a:lnTo>
+                  <a:lnTo>
+                    <a:pt x="6542037" y="438434"/>
+                  </a:lnTo>
+                  <a:lnTo>
+                    <a:pt x="6612382" y="440533"/>
+                  </a:lnTo>
+                  <a:lnTo>
+                    <a:pt x="6682726" y="442599"/>
+                  </a:lnTo>
+                  <a:lnTo>
+                    <a:pt x="6753071" y="444633"/>
+                  </a:lnTo>
+                  <a:lnTo>
+                    <a:pt x="6823415" y="446636"/>
+                  </a:lnTo>
+                  <a:lnTo>
+                    <a:pt x="6893760" y="448609"/>
+                  </a:lnTo>
+                  <a:lnTo>
+                    <a:pt x="6964104" y="450551"/>
+                  </a:lnTo>
+                </a:path>
+              </a:pathLst>
+            </a:custGeom>
+            <a:ln w="27101" cap="flat">
+              <a:solidFill>
+                <a:srgbClr val="FF8C00">
+                  <a:alpha val="100000"/>
+                </a:srgbClr>
+              </a:solidFill>
+              <a:prstDash val="solid"/>
+              <a:round/>
+            </a:ln>
+          </p:spPr>
+          <p:txBody>
+            <a:bodyPr/>
+            <a:lstStyle/>
+            <a:p/>
+          </p:txBody>
+        </p:sp>
+        <p:sp>
+          <p:nvSpPr>
+            <p:cNvPr id="74" name="pl74"/>
+            <p:cNvSpPr/>
+            <p:nvPr/>
+          </p:nvSpPr>
+          <p:spPr>
+            <a:xfrm>
+              <a:off x="887106" y="5294352"/>
+              <a:ext cx="7660515" cy="0"/>
+            </a:xfrm>
+            <a:custGeom>
+              <a:avLst/>
+              <a:pathLst>
+                <a:path w="7660515" h="0">
+                  <a:moveTo>
+                    <a:pt x="0" y="0"/>
+                  </a:moveTo>
+                  <a:lnTo>
+                    <a:pt x="7660515" y="0"/>
+                  </a:lnTo>
+                  <a:lnTo>
+                    <a:pt x="7660515" y="0"/>
+                  </a:lnTo>
+                </a:path>
+              </a:pathLst>
+            </a:custGeom>
+            <a:ln w="13550" cap="flat">
+              <a:solidFill>
+                <a:srgbClr val="7F7F7F">
+                  <a:alpha val="100000"/>
+                </a:srgbClr>
+              </a:solidFill>
+              <a:prstDash val="dash"/>
+              <a:round/>
+            </a:ln>
+          </p:spPr>
+          <p:txBody>
+            <a:bodyPr/>
+            <a:lstStyle/>
+            <a:p/>
+          </p:txBody>
+        </p:sp>
+        <p:sp>
+          <p:nvSpPr>
+            <p:cNvPr id="75" name="pl75"/>
+            <p:cNvSpPr/>
+            <p:nvPr/>
+          </p:nvSpPr>
+          <p:spPr>
+            <a:xfrm>
+              <a:off x="4215100" y="4336484"/>
+              <a:ext cx="0" cy="1317069"/>
+            </a:xfrm>
+            <a:custGeom>
+              <a:avLst/>
+              <a:pathLst>
+                <a:path w="0" h="1317069">
+                  <a:moveTo>
+                    <a:pt x="0" y="1317069"/>
+                  </a:moveTo>
+                  <a:lnTo>
+                    <a:pt x="0" y="0"/>
+                  </a:lnTo>
+                  <a:lnTo>
+                    <a:pt x="0" y="0"/>
+                  </a:lnTo>
+                </a:path>
+              </a:pathLst>
+            </a:custGeom>
+            <a:ln w="13550" cap="flat">
+              <a:solidFill>
+                <a:srgbClr val="666666">
+                  <a:alpha val="100000"/>
+                </a:srgbClr>
+              </a:solidFill>
+              <a:prstDash val="dot"/>
+              <a:round/>
+            </a:ln>
+          </p:spPr>
+          <p:txBody>
+            <a:bodyPr/>
+            <a:lstStyle/>
+            <a:p/>
+          </p:txBody>
+        </p:sp>
+        <p:sp>
+          <p:nvSpPr>
+            <p:cNvPr id="76" name="pl76"/>
+            <p:cNvSpPr/>
+            <p:nvPr/>
+          </p:nvSpPr>
+          <p:spPr>
+            <a:xfrm>
+              <a:off x="3046793" y="4336484"/>
+              <a:ext cx="0" cy="1317069"/>
+            </a:xfrm>
+            <a:custGeom>
+              <a:avLst/>
+              <a:pathLst>
+                <a:path w="0" h="1317069">
+                  <a:moveTo>
+                    <a:pt x="0" y="1317069"/>
+                  </a:moveTo>
+                  <a:lnTo>
+                    <a:pt x="0" y="0"/>
+                  </a:lnTo>
+                  <a:lnTo>
+                    <a:pt x="0" y="0"/>
+                  </a:lnTo>
+                </a:path>
+              </a:pathLst>
+            </a:custGeom>
+            <a:ln w="13550" cap="flat">
+              <a:solidFill>
+                <a:srgbClr val="4682B4">
+                  <a:alpha val="69803"/>
+                </a:srgbClr>
+              </a:solidFill>
+              <a:prstDash val="dash"/>
+              <a:round/>
+            </a:ln>
+          </p:spPr>
+          <p:txBody>
+            <a:bodyPr/>
+            <a:lstStyle/>
+            <a:p/>
+          </p:txBody>
+        </p:sp>
+        <p:sp>
+          <p:nvSpPr>
+            <p:cNvPr id="77" name="pl77"/>
+            <p:cNvSpPr/>
+            <p:nvPr/>
+          </p:nvSpPr>
+          <p:spPr>
+            <a:xfrm>
+              <a:off x="5409191" y="4336484"/>
+              <a:ext cx="0" cy="1317069"/>
+            </a:xfrm>
+            <a:custGeom>
+              <a:avLst/>
+              <a:pathLst>
+                <a:path w="0" h="1317069">
+                  <a:moveTo>
+                    <a:pt x="0" y="1317069"/>
+                  </a:moveTo>
+                  <a:lnTo>
+                    <a:pt x="0" y="0"/>
+                  </a:lnTo>
+                  <a:lnTo>
+                    <a:pt x="0" y="0"/>
+                  </a:lnTo>
+                </a:path>
+              </a:pathLst>
+            </a:custGeom>
+            <a:ln w="13550" cap="flat">
+              <a:solidFill>
+                <a:srgbClr val="4682B4">
+                  <a:alpha val="69803"/>
+                </a:srgbClr>
+              </a:solidFill>
+              <a:prstDash val="dash"/>
+              <a:round/>
+            </a:ln>
+          </p:spPr>
+          <p:txBody>
+            <a:bodyPr/>
+            <a:lstStyle/>
+            <a:p/>
+          </p:txBody>
+        </p:sp>
+        <p:sp>
+          <p:nvSpPr>
+            <p:cNvPr id="78" name="tx78"/>
+            <p:cNvSpPr/>
+            <p:nvPr/>
+          </p:nvSpPr>
+          <p:spPr>
+            <a:xfrm>
+              <a:off x="762297" y="5553636"/>
+              <a:ext cx="62179" cy="80101"/>
+            </a:xfrm>
+            <a:prstGeom prst="rect">
+              <a:avLst/>
+            </a:prstGeom>
+            <a:noFill/>
+          </p:spPr>
+          <p:txBody>
+            <a:bodyPr lIns="0" rIns="0" tIns="0" bIns="0" anchorCtr="1" anchor="ctr" wrap="none"/>
+            <a:lstStyle/>
+            <a:p>
+              <a:pPr algn="l" marL="0" marR="0" indent="0">
+                <a:lnSpc>
+                  <a:spcPts val="880"/>
+                </a:lnSpc>
+                <a:spcBef>
+                  <a:spcPts val="0"/>
+                </a:spcBef>
+                <a:spcAft>
+                  <a:spcPts val="0"/>
+                </a:spcAft>
+              </a:pPr>
+              <a:r>
+                <a:rPr sz="880">
+                  <a:solidFill>
+                    <a:srgbClr val="4D4D4D">
+                      <a:alpha val="100000"/>
+                    </a:srgbClr>
+                  </a:solidFill>
+                  <a:latin typeface="Helvetica"/>
+                  <a:cs typeface="Helvetica"/>
+                </a:rPr>
+                <a:t>0</a:t>
+              </a:r>
+            </a:p>
+          </p:txBody>
+        </p:sp>
+        <p:sp>
+          <p:nvSpPr>
+            <p:cNvPr id="79" name="tx79"/>
+            <p:cNvSpPr/>
+            <p:nvPr/>
+          </p:nvSpPr>
+          <p:spPr>
+            <a:xfrm>
+              <a:off x="762297" y="5254302"/>
+              <a:ext cx="62179" cy="80101"/>
+            </a:xfrm>
+            <a:prstGeom prst="rect">
+              <a:avLst/>
+            </a:prstGeom>
+            <a:noFill/>
+          </p:spPr>
+          <p:txBody>
+            <a:bodyPr lIns="0" rIns="0" tIns="0" bIns="0" anchorCtr="1" anchor="ctr" wrap="none"/>
+            <a:lstStyle/>
+            <a:p>
+              <a:pPr algn="l" marL="0" marR="0" indent="0">
+                <a:lnSpc>
+                  <a:spcPts val="880"/>
+                </a:lnSpc>
+                <a:spcBef>
+                  <a:spcPts val="0"/>
+                </a:spcBef>
+                <a:spcAft>
+                  <a:spcPts val="0"/>
+                </a:spcAft>
+              </a:pPr>
+              <a:r>
+                <a:rPr sz="880">
+                  <a:solidFill>
+                    <a:srgbClr val="4D4D4D">
+                      <a:alpha val="100000"/>
+                    </a:srgbClr>
+                  </a:solidFill>
+                  <a:latin typeface="Helvetica"/>
+                  <a:cs typeface="Helvetica"/>
+                </a:rPr>
+                <a:t>1</a:t>
+              </a:r>
+            </a:p>
+          </p:txBody>
+        </p:sp>
+        <p:sp>
+          <p:nvSpPr>
+            <p:cNvPr id="80" name="tx80"/>
+            <p:cNvSpPr/>
+            <p:nvPr/>
+          </p:nvSpPr>
+          <p:spPr>
+            <a:xfrm>
+              <a:off x="762297" y="4954968"/>
+              <a:ext cx="62179" cy="80101"/>
+            </a:xfrm>
+            <a:prstGeom prst="rect">
+              <a:avLst/>
+            </a:prstGeom>
+            <a:noFill/>
+          </p:spPr>
+          <p:txBody>
+            <a:bodyPr lIns="0" rIns="0" tIns="0" bIns="0" anchorCtr="1" anchor="ctr" wrap="none"/>
+            <a:lstStyle/>
+            <a:p>
+              <a:pPr algn="l" marL="0" marR="0" indent="0">
+                <a:lnSpc>
+                  <a:spcPts val="880"/>
+                </a:lnSpc>
+                <a:spcBef>
+                  <a:spcPts val="0"/>
+                </a:spcBef>
+                <a:spcAft>
+                  <a:spcPts val="0"/>
+                </a:spcAft>
+              </a:pPr>
+              <a:r>
+                <a:rPr sz="880">
+                  <a:solidFill>
+                    <a:srgbClr val="4D4D4D">
+                      <a:alpha val="100000"/>
+                    </a:srgbClr>
+                  </a:solidFill>
+                  <a:latin typeface="Helvetica"/>
+                  <a:cs typeface="Helvetica"/>
+                </a:rPr>
+                <a:t>2</a:t>
+              </a:r>
+            </a:p>
+          </p:txBody>
+        </p:sp>
+        <p:sp>
+          <p:nvSpPr>
+            <p:cNvPr id="81" name="tx81"/>
+            <p:cNvSpPr/>
+            <p:nvPr/>
+          </p:nvSpPr>
+          <p:spPr>
+            <a:xfrm>
+              <a:off x="762297" y="4655634"/>
+              <a:ext cx="62179" cy="80101"/>
+            </a:xfrm>
+            <a:prstGeom prst="rect">
+              <a:avLst/>
+            </a:prstGeom>
+            <a:noFill/>
+          </p:spPr>
+          <p:txBody>
+            <a:bodyPr lIns="0" rIns="0" tIns="0" bIns="0" anchorCtr="1" anchor="ctr" wrap="none"/>
+            <a:lstStyle/>
+            <a:p>
+              <a:pPr algn="l" marL="0" marR="0" indent="0">
+                <a:lnSpc>
+                  <a:spcPts val="880"/>
+                </a:lnSpc>
+                <a:spcBef>
+                  <a:spcPts val="0"/>
+                </a:spcBef>
+                <a:spcAft>
+                  <a:spcPts val="0"/>
+                </a:spcAft>
+              </a:pPr>
+              <a:r>
+                <a:rPr sz="880">
+                  <a:solidFill>
+                    <a:srgbClr val="4D4D4D">
+                      <a:alpha val="100000"/>
+                    </a:srgbClr>
+                  </a:solidFill>
+                  <a:latin typeface="Helvetica"/>
+                  <a:cs typeface="Helvetica"/>
+                </a:rPr>
+                <a:t>3</a:t>
+              </a:r>
+            </a:p>
+          </p:txBody>
+        </p:sp>
+        <p:sp>
+          <p:nvSpPr>
+            <p:cNvPr id="82" name="tx82"/>
+            <p:cNvSpPr/>
+            <p:nvPr/>
+          </p:nvSpPr>
+          <p:spPr>
+            <a:xfrm>
+              <a:off x="762297" y="4356300"/>
+              <a:ext cx="62179" cy="80101"/>
+            </a:xfrm>
+            <a:prstGeom prst="rect">
+              <a:avLst/>
+            </a:prstGeom>
+            <a:noFill/>
+          </p:spPr>
+          <p:txBody>
+            <a:bodyPr lIns="0" rIns="0" tIns="0" bIns="0" anchorCtr="1" anchor="ctr" wrap="none"/>
+            <a:lstStyle/>
+            <a:p>
+              <a:pPr algn="l" marL="0" marR="0" indent="0">
+                <a:lnSpc>
+                  <a:spcPts val="880"/>
+                </a:lnSpc>
+                <a:spcBef>
+                  <a:spcPts val="0"/>
+                </a:spcBef>
+                <a:spcAft>
+                  <a:spcPts val="0"/>
+                </a:spcAft>
+              </a:pPr>
+              <a:r>
+                <a:rPr sz="880">
+                  <a:solidFill>
+                    <a:srgbClr val="4D4D4D">
+                      <a:alpha val="100000"/>
+                    </a:srgbClr>
+                  </a:solidFill>
+                  <a:latin typeface="Helvetica"/>
+                  <a:cs typeface="Helvetica"/>
+                </a:rPr>
+                <a:t>4</a:t>
+              </a:r>
+            </a:p>
+          </p:txBody>
+        </p:sp>
+        <p:sp>
+          <p:nvSpPr>
+            <p:cNvPr id="83" name="tx83"/>
+            <p:cNvSpPr/>
+            <p:nvPr/>
+          </p:nvSpPr>
+          <p:spPr>
+            <a:xfrm>
+              <a:off x="1164222" y="5716183"/>
+              <a:ext cx="161574" cy="80101"/>
+            </a:xfrm>
+            <a:prstGeom prst="rect">
+              <a:avLst/>
+            </a:prstGeom>
+            <a:noFill/>
+          </p:spPr>
+          <p:txBody>
+            <a:bodyPr lIns="0" rIns="0" tIns="0" bIns="0" anchorCtr="1" anchor="ctr" wrap="none"/>
+            <a:lstStyle/>
+            <a:p>
+              <a:pPr algn="l" marL="0" marR="0" indent="0">
+                <a:lnSpc>
+                  <a:spcPts val="880"/>
+                </a:lnSpc>
+                <a:spcBef>
+                  <a:spcPts val="0"/>
+                </a:spcBef>
+                <a:spcAft>
+                  <a:spcPts val="0"/>
+                </a:spcAft>
+              </a:pPr>
+              <a:r>
+                <a:rPr sz="880">
+                  <a:solidFill>
+                    <a:srgbClr val="4D4D4D">
+                      <a:alpha val="100000"/>
+                    </a:srgbClr>
+                  </a:solidFill>
+                  <a:latin typeface="Helvetica"/>
+                  <a:cs typeface="Helvetica"/>
+                </a:rPr>
+                <a:t>-50</a:t>
+              </a:r>
+            </a:p>
+          </p:txBody>
+        </p:sp>
+        <p:sp>
+          <p:nvSpPr>
+            <p:cNvPr id="84" name="tx84"/>
+            <p:cNvSpPr/>
+            <p:nvPr/>
+          </p:nvSpPr>
+          <p:spPr>
+            <a:xfrm>
+              <a:off x="2024485" y="5716183"/>
+              <a:ext cx="161574" cy="80101"/>
+            </a:xfrm>
+            <a:prstGeom prst="rect">
+              <a:avLst/>
+            </a:prstGeom>
+            <a:noFill/>
+          </p:spPr>
+          <p:txBody>
+            <a:bodyPr lIns="0" rIns="0" tIns="0" bIns="0" anchorCtr="1" anchor="ctr" wrap="none"/>
+            <a:lstStyle/>
+            <a:p>
+              <a:pPr algn="l" marL="0" marR="0" indent="0">
+                <a:lnSpc>
+                  <a:spcPts val="880"/>
+                </a:lnSpc>
+                <a:spcBef>
+                  <a:spcPts val="0"/>
+                </a:spcBef>
+                <a:spcAft>
+                  <a:spcPts val="0"/>
+                </a:spcAft>
+              </a:pPr>
+              <a:r>
+                <a:rPr sz="880">
+                  <a:solidFill>
+                    <a:srgbClr val="4D4D4D">
+                      <a:alpha val="100000"/>
+                    </a:srgbClr>
+                  </a:solidFill>
+                  <a:latin typeface="Helvetica"/>
+                  <a:cs typeface="Helvetica"/>
+                </a:rPr>
+                <a:t>-40</a:t>
+              </a:r>
+            </a:p>
+          </p:txBody>
+        </p:sp>
+        <p:sp>
+          <p:nvSpPr>
+            <p:cNvPr id="85" name="tx85"/>
+            <p:cNvSpPr/>
+            <p:nvPr/>
+          </p:nvSpPr>
+          <p:spPr>
+            <a:xfrm>
+              <a:off x="2884749" y="5716183"/>
+              <a:ext cx="161574" cy="80101"/>
+            </a:xfrm>
+            <a:prstGeom prst="rect">
+              <a:avLst/>
+            </a:prstGeom>
+            <a:noFill/>
+          </p:spPr>
+          <p:txBody>
+            <a:bodyPr lIns="0" rIns="0" tIns="0" bIns="0" anchorCtr="1" anchor="ctr" wrap="none"/>
+            <a:lstStyle/>
+            <a:p>
+              <a:pPr algn="l" marL="0" marR="0" indent="0">
+                <a:lnSpc>
+                  <a:spcPts val="880"/>
+                </a:lnSpc>
+                <a:spcBef>
+                  <a:spcPts val="0"/>
+                </a:spcBef>
+                <a:spcAft>
+                  <a:spcPts val="0"/>
+                </a:spcAft>
+              </a:pPr>
+              <a:r>
+                <a:rPr sz="880">
+                  <a:solidFill>
+                    <a:srgbClr val="4D4D4D">
+                      <a:alpha val="100000"/>
+                    </a:srgbClr>
+                  </a:solidFill>
+                  <a:latin typeface="Helvetica"/>
+                  <a:cs typeface="Helvetica"/>
+                </a:rPr>
+                <a:t>-30</a:t>
+              </a:r>
+            </a:p>
+          </p:txBody>
+        </p:sp>
+        <p:sp>
+          <p:nvSpPr>
+            <p:cNvPr id="86" name="tx86"/>
+            <p:cNvSpPr/>
+            <p:nvPr/>
+          </p:nvSpPr>
+          <p:spPr>
+            <a:xfrm>
+              <a:off x="3745012" y="5716183"/>
+              <a:ext cx="161574" cy="80101"/>
+            </a:xfrm>
+            <a:prstGeom prst="rect">
+              <a:avLst/>
+            </a:prstGeom>
+            <a:noFill/>
+          </p:spPr>
+          <p:txBody>
+            <a:bodyPr lIns="0" rIns="0" tIns="0" bIns="0" anchorCtr="1" anchor="ctr" wrap="none"/>
+            <a:lstStyle/>
+            <a:p>
+              <a:pPr algn="l" marL="0" marR="0" indent="0">
+                <a:lnSpc>
+                  <a:spcPts val="880"/>
+                </a:lnSpc>
+                <a:spcBef>
+                  <a:spcPts val="0"/>
+                </a:spcBef>
+                <a:spcAft>
+                  <a:spcPts val="0"/>
+                </a:spcAft>
+              </a:pPr>
+              <a:r>
+                <a:rPr sz="880">
+                  <a:solidFill>
+                    <a:srgbClr val="4D4D4D">
+                      <a:alpha val="100000"/>
+                    </a:srgbClr>
+                  </a:solidFill>
+                  <a:latin typeface="Helvetica"/>
+                  <a:cs typeface="Helvetica"/>
+                </a:rPr>
+                <a:t>-20</a:t>
+              </a:r>
+            </a:p>
+          </p:txBody>
+        </p:sp>
+        <p:sp>
+          <p:nvSpPr>
+            <p:cNvPr id="87" name="tx87"/>
+            <p:cNvSpPr/>
+            <p:nvPr/>
+          </p:nvSpPr>
+          <p:spPr>
+            <a:xfrm>
+              <a:off x="4605275" y="5716183"/>
+              <a:ext cx="161574" cy="80101"/>
+            </a:xfrm>
+            <a:prstGeom prst="rect">
+              <a:avLst/>
+            </a:prstGeom>
+            <a:noFill/>
+          </p:spPr>
+          <p:txBody>
+            <a:bodyPr lIns="0" rIns="0" tIns="0" bIns="0" anchorCtr="1" anchor="ctr" wrap="none"/>
+            <a:lstStyle/>
+            <a:p>
+              <a:pPr algn="l" marL="0" marR="0" indent="0">
+                <a:lnSpc>
+                  <a:spcPts val="880"/>
+                </a:lnSpc>
+                <a:spcBef>
+                  <a:spcPts val="0"/>
+                </a:spcBef>
+                <a:spcAft>
+                  <a:spcPts val="0"/>
+                </a:spcAft>
+              </a:pPr>
+              <a:r>
+                <a:rPr sz="880">
+                  <a:solidFill>
+                    <a:srgbClr val="4D4D4D">
+                      <a:alpha val="100000"/>
+                    </a:srgbClr>
+                  </a:solidFill>
+                  <a:latin typeface="Helvetica"/>
+                  <a:cs typeface="Helvetica"/>
+                </a:rPr>
+                <a:t>-10</a:t>
+              </a:r>
+            </a:p>
+          </p:txBody>
+        </p:sp>
+        <p:sp>
+          <p:nvSpPr>
+            <p:cNvPr id="88" name="tx88"/>
+            <p:cNvSpPr/>
+            <p:nvPr/>
+          </p:nvSpPr>
+          <p:spPr>
+            <a:xfrm>
+              <a:off x="5515235" y="5716183"/>
+              <a:ext cx="62179" cy="80101"/>
+            </a:xfrm>
+            <a:prstGeom prst="rect">
+              <a:avLst/>
+            </a:prstGeom>
+            <a:noFill/>
+          </p:spPr>
+          <p:txBody>
+            <a:bodyPr lIns="0" rIns="0" tIns="0" bIns="0" anchorCtr="1" anchor="ctr" wrap="none"/>
+            <a:lstStyle/>
+            <a:p>
+              <a:pPr algn="l" marL="0" marR="0" indent="0">
+                <a:lnSpc>
+                  <a:spcPts val="880"/>
+                </a:lnSpc>
+                <a:spcBef>
+                  <a:spcPts val="0"/>
+                </a:spcBef>
+                <a:spcAft>
+                  <a:spcPts val="0"/>
+                </a:spcAft>
+              </a:pPr>
+              <a:r>
+                <a:rPr sz="880">
+                  <a:solidFill>
+                    <a:srgbClr val="4D4D4D">
+                      <a:alpha val="100000"/>
+                    </a:srgbClr>
+                  </a:solidFill>
+                  <a:latin typeface="Helvetica"/>
+                  <a:cs typeface="Helvetica"/>
+                </a:rPr>
+                <a:t>0</a:t>
+              </a:r>
+            </a:p>
+          </p:txBody>
+        </p:sp>
+        <p:sp>
+          <p:nvSpPr>
+            <p:cNvPr id="89" name="tx89"/>
+            <p:cNvSpPr/>
+            <p:nvPr/>
+          </p:nvSpPr>
+          <p:spPr>
+            <a:xfrm>
+              <a:off x="6344409" y="5716183"/>
+              <a:ext cx="124358" cy="80101"/>
+            </a:xfrm>
+            <a:prstGeom prst="rect">
+              <a:avLst/>
+            </a:prstGeom>
+            <a:noFill/>
+          </p:spPr>
+          <p:txBody>
+            <a:bodyPr lIns="0" rIns="0" tIns="0" bIns="0" anchorCtr="1" anchor="ctr" wrap="none"/>
+            <a:lstStyle/>
+            <a:p>
+              <a:pPr algn="l" marL="0" marR="0" indent="0">
+                <a:lnSpc>
+                  <a:spcPts val="880"/>
+                </a:lnSpc>
+                <a:spcBef>
+                  <a:spcPts val="0"/>
+                </a:spcBef>
+                <a:spcAft>
+                  <a:spcPts val="0"/>
+                </a:spcAft>
+              </a:pPr>
+              <a:r>
+                <a:rPr sz="880">
+                  <a:solidFill>
+                    <a:srgbClr val="4D4D4D">
+                      <a:alpha val="100000"/>
+                    </a:srgbClr>
+                  </a:solidFill>
+                  <a:latin typeface="Helvetica"/>
+                  <a:cs typeface="Helvetica"/>
+                </a:rPr>
+                <a:t>10</a:t>
+              </a:r>
+            </a:p>
+          </p:txBody>
+        </p:sp>
+        <p:sp>
+          <p:nvSpPr>
+            <p:cNvPr id="90" name="tx90"/>
+            <p:cNvSpPr/>
+            <p:nvPr/>
+          </p:nvSpPr>
+          <p:spPr>
+            <a:xfrm>
+              <a:off x="7204672" y="5716183"/>
+              <a:ext cx="124358" cy="80101"/>
+            </a:xfrm>
+            <a:prstGeom prst="rect">
+              <a:avLst/>
+            </a:prstGeom>
+            <a:noFill/>
+          </p:spPr>
+          <p:txBody>
+            <a:bodyPr lIns="0" rIns="0" tIns="0" bIns="0" anchorCtr="1" anchor="ctr" wrap="none"/>
+            <a:lstStyle/>
+            <a:p>
+              <a:pPr algn="l" marL="0" marR="0" indent="0">
+                <a:lnSpc>
+                  <a:spcPts val="880"/>
+                </a:lnSpc>
+                <a:spcBef>
+                  <a:spcPts val="0"/>
+                </a:spcBef>
+                <a:spcAft>
+                  <a:spcPts val="0"/>
+                </a:spcAft>
+              </a:pPr>
+              <a:r>
+                <a:rPr sz="880">
+                  <a:solidFill>
+                    <a:srgbClr val="4D4D4D">
+                      <a:alpha val="100000"/>
+                    </a:srgbClr>
+                  </a:solidFill>
+                  <a:latin typeface="Helvetica"/>
+                  <a:cs typeface="Helvetica"/>
+                </a:rPr>
+                <a:t>20</a:t>
+              </a:r>
+            </a:p>
+          </p:txBody>
+        </p:sp>
+        <p:sp>
+          <p:nvSpPr>
+            <p:cNvPr id="91" name="tx91"/>
+            <p:cNvSpPr/>
+            <p:nvPr/>
+          </p:nvSpPr>
+          <p:spPr>
+            <a:xfrm>
+              <a:off x="8064935" y="5716183"/>
+              <a:ext cx="124358" cy="80101"/>
+            </a:xfrm>
+            <a:prstGeom prst="rect">
+              <a:avLst/>
+            </a:prstGeom>
+            <a:noFill/>
+          </p:spPr>
+          <p:txBody>
+            <a:bodyPr lIns="0" rIns="0" tIns="0" bIns="0" anchorCtr="1" anchor="ctr" wrap="none"/>
+            <a:lstStyle/>
+            <a:p>
+              <a:pPr algn="l" marL="0" marR="0" indent="0">
+                <a:lnSpc>
+                  <a:spcPts val="880"/>
+                </a:lnSpc>
+                <a:spcBef>
+                  <a:spcPts val="0"/>
+                </a:spcBef>
+                <a:spcAft>
+                  <a:spcPts val="0"/>
+                </a:spcAft>
+              </a:pPr>
+              <a:r>
+                <a:rPr sz="880">
+                  <a:solidFill>
+                    <a:srgbClr val="4D4D4D">
+                      <a:alpha val="100000"/>
+                    </a:srgbClr>
+                  </a:solidFill>
+                  <a:latin typeface="Helvetica"/>
+                  <a:cs typeface="Helvetica"/>
+                </a:rPr>
+                <a:t>30</a:t>
+              </a:r>
+            </a:p>
+          </p:txBody>
+        </p:sp>
+        <p:sp>
+          <p:nvSpPr>
+            <p:cNvPr id="92" name="tx92"/>
+            <p:cNvSpPr/>
+            <p:nvPr/>
+          </p:nvSpPr>
+          <p:spPr>
+            <a:xfrm>
+              <a:off x="1561815" y="5855859"/>
+              <a:ext cx="6311097" cy="100218"/>
+            </a:xfrm>
+            <a:prstGeom prst="rect">
+              <a:avLst/>
+            </a:prstGeom>
+            <a:noFill/>
+          </p:spPr>
+          <p:txBody>
+            <a:bodyPr lIns="0" rIns="0" tIns="0" bIns="0" anchorCtr="1" anchor="ctr" wrap="none"/>
+            <a:lstStyle/>
+            <a:p>
+              <a:pPr algn="l" marL="0" marR="0" indent="0">
+                <a:lnSpc>
+                  <a:spcPts val="1100"/>
+                </a:lnSpc>
+                <a:spcBef>
+                  <a:spcPts val="0"/>
+                </a:spcBef>
+                <a:spcAft>
+                  <a:spcPts val="0"/>
+                </a:spcAft>
+              </a:pPr>
+              <a:r>
+                <a:rPr sz="1100">
+                  <a:solidFill>
+                    <a:srgbClr val="000000">
+                      <a:alpha val="100000"/>
+                    </a:srgbClr>
+                  </a:solidFill>
+                  <a:latin typeface="Helvetica"/>
+                  <a:cs typeface="Helvetica"/>
+                </a:rPr>
+                <a:t>Sensitivity eGFR Difference (%): 100 × (CKD-EPI 2012 CysC − CKD-EPI 2021 Cr) / CKD-EPI 2021 Cr</a:t>
+              </a:r>
+            </a:p>
+          </p:txBody>
+        </p:sp>
+        <p:sp>
+          <p:nvSpPr>
+            <p:cNvPr id="93" name="tx93"/>
+            <p:cNvSpPr/>
+            <p:nvPr/>
+          </p:nvSpPr>
+          <p:spPr>
+            <a:xfrm rot="-5400000">
+              <a:off x="138035" y="4944909"/>
+              <a:ext cx="1016904" cy="100218"/>
+            </a:xfrm>
+            <a:prstGeom prst="rect">
+              <a:avLst/>
+            </a:prstGeom>
+            <a:noFill/>
+          </p:spPr>
+          <p:txBody>
+            <a:bodyPr lIns="0" rIns="0" tIns="0" bIns="0" anchorCtr="1" anchor="ctr" wrap="none"/>
+            <a:lstStyle/>
+            <a:p>
+              <a:pPr algn="l" marL="0" marR="0" indent="0">
+                <a:lnSpc>
+                  <a:spcPts val="1100"/>
+                </a:lnSpc>
+                <a:spcBef>
+                  <a:spcPts val="0"/>
+                </a:spcBef>
+                <a:spcAft>
+                  <a:spcPts val="0"/>
+                </a:spcAft>
+              </a:pPr>
+              <a:r>
+                <a:rPr sz="1100">
+                  <a:solidFill>
+                    <a:srgbClr val="000000">
+                      <a:alpha val="100000"/>
+                    </a:srgbClr>
+                  </a:solidFill>
+                  <a:latin typeface="Helvetica"/>
+                  <a:cs typeface="Helvetica"/>
+                </a:rPr>
+                <a:t>subHR (95% CI)</a:t>
+              </a:r>
+            </a:p>
+          </p:txBody>
+        </p:sp>
+        <p:sp>
+          <p:nvSpPr>
+            <p:cNvPr id="94" name="tx94"/>
+            <p:cNvSpPr/>
+            <p:nvPr/>
+          </p:nvSpPr>
+          <p:spPr>
+            <a:xfrm>
+              <a:off x="887106" y="4159544"/>
+              <a:ext cx="6959864" cy="82021"/>
+            </a:xfrm>
+            <a:prstGeom prst="rect">
+              <a:avLst/>
+            </a:prstGeom>
+            <a:noFill/>
+          </p:spPr>
+          <p:txBody>
+            <a:bodyPr lIns="0" rIns="0" tIns="0" bIns="0" anchorCtr="1" anchor="ctr" wrap="none"/>
+            <a:lstStyle/>
+            <a:p>
+              <a:pPr algn="l" marL="0" marR="0" indent="0">
+                <a:lnSpc>
+                  <a:spcPts val="900"/>
+                </a:lnSpc>
+                <a:spcBef>
+                  <a:spcPts val="0"/>
+                </a:spcBef>
+                <a:spcAft>
+                  <a:spcPts val="0"/>
+                </a:spcAft>
+              </a:pPr>
+              <a:r>
+                <a:rPr sz="900">
+                  <a:solidFill>
+                    <a:srgbClr val="404040">
+                      <a:alpha val="100000"/>
+                    </a:srgbClr>
+                  </a:solidFill>
+                  <a:latin typeface="Helvetica"/>
+                  <a:cs typeface="Helvetica"/>
+                </a:rPr>
+                <a:t>subHR per 10 % decline: 1.21 (1.07-1.36), p_Bonf = 0.011 (n = 6)  |  per IQR decline (Δ = 27.5 %): 1.68 (1.21-2.32)  |  IQR: [-29.1, -1.6] %</a:t>
+              </a:r>
+            </a:p>
+          </p:txBody>
+        </p:sp>
+        <p:sp>
+          <p:nvSpPr>
+            <p:cNvPr id="95" name="tx95"/>
+            <p:cNvSpPr/>
+            <p:nvPr/>
+          </p:nvSpPr>
+          <p:spPr>
+            <a:xfrm>
+              <a:off x="887106" y="3932770"/>
               <a:ext cx="2132106" cy="120152"/>
             </a:xfrm>
             <a:prstGeom prst="rect">
